--- a/output/AI_Agent_개선_최종발표.pptx
+++ b/output/AI_Agent_개선_최종발표.pptx
@@ -2,21 +2,21 @@
 <file path=ppt/presentation.xml><?xml version="1.0" encoding="utf-8"?>
 <p:presentation xmlns:p="http://schemas.openxmlformats.org/presentationml/2006/main">
   <p:sldMasterIdLst>
-    <p:sldMasterId xmlns:r="http://schemas.openxmlformats.org/officeDocument/2006/relationships" id="2147483648" r:id="R1c2899daa90247d7"/>
+    <p:sldMasterId xmlns:r="http://schemas.openxmlformats.org/officeDocument/2006/relationships" id="2147483648" r:id="R02c64f3a22a546f9"/>
   </p:sldMasterIdLst>
   <p:notesMasterIdLst>
-    <p:notesMasterId xmlns:r="http://schemas.openxmlformats.org/officeDocument/2006/relationships" r:id="Rf48510761f2b4e09"/>
+    <p:notesMasterId xmlns:r="http://schemas.openxmlformats.org/officeDocument/2006/relationships" r:id="R035d1405fc1346d1"/>
   </p:notesMasterIdLst>
   <p:sldIdLst>
-    <p:sldId xmlns:r="http://schemas.openxmlformats.org/officeDocument/2006/relationships" id="256" r:id="R5877abcec7154e67"/>
-    <p:sldId xmlns:r="http://schemas.openxmlformats.org/officeDocument/2006/relationships" id="257" r:id="R79ae1443e2874505"/>
-    <p:sldId xmlns:r="http://schemas.openxmlformats.org/officeDocument/2006/relationships" id="258" r:id="Re2c8a57997d14896"/>
-    <p:sldId xmlns:r="http://schemas.openxmlformats.org/officeDocument/2006/relationships" id="259" r:id="R860795907bb64a6a"/>
-    <p:sldId xmlns:r="http://schemas.openxmlformats.org/officeDocument/2006/relationships" id="260" r:id="R8d55518630a643c8"/>
-    <p:sldId xmlns:r="http://schemas.openxmlformats.org/officeDocument/2006/relationships" id="261" r:id="Rf872861649b94a16"/>
-    <p:sldId xmlns:r="http://schemas.openxmlformats.org/officeDocument/2006/relationships" id="262" r:id="R2a27277b959e4987"/>
-    <p:sldId xmlns:r="http://schemas.openxmlformats.org/officeDocument/2006/relationships" id="263" r:id="Rbeabf12c64c6402b"/>
-    <p:sldId xmlns:r="http://schemas.openxmlformats.org/officeDocument/2006/relationships" id="264" r:id="Rd0b2e3b940b64e36"/>
+    <p:sldId xmlns:r="http://schemas.openxmlformats.org/officeDocument/2006/relationships" id="256" r:id="R5c9d8e1cdae94a1c"/>
+    <p:sldId xmlns:r="http://schemas.openxmlformats.org/officeDocument/2006/relationships" id="257" r:id="R951b0acf70174bc8"/>
+    <p:sldId xmlns:r="http://schemas.openxmlformats.org/officeDocument/2006/relationships" id="258" r:id="R6efa406728f94419"/>
+    <p:sldId xmlns:r="http://schemas.openxmlformats.org/officeDocument/2006/relationships" id="259" r:id="R290f796467cd4224"/>
+    <p:sldId xmlns:r="http://schemas.openxmlformats.org/officeDocument/2006/relationships" id="260" r:id="Ra25f253bff344c40"/>
+    <p:sldId xmlns:r="http://schemas.openxmlformats.org/officeDocument/2006/relationships" id="261" r:id="Rd4eefa48b6b84984"/>
+    <p:sldId xmlns:r="http://schemas.openxmlformats.org/officeDocument/2006/relationships" id="262" r:id="R5435dba9ccca4876"/>
+    <p:sldId xmlns:r="http://schemas.openxmlformats.org/officeDocument/2006/relationships" id="263" r:id="Rff6e57bcc55741c4"/>
+    <p:sldId xmlns:r="http://schemas.openxmlformats.org/officeDocument/2006/relationships" id="264" r:id="Rc43796e217cb4e7e"/>
   </p:sldIdLst>
   <p:sldSz cx="12192000" cy="6858000"/>
   <p:notesSz cx="6858000" cy="9144000"/>
@@ -450,7 +450,22 @@
           <a:lstStyle xmlns:a="http://schemas.openxmlformats.org/drawingml/2006/main"/>
           <a:p xmlns:a="http://schemas.openxmlformats.org/drawingml/2006/main">
             <a:r>
-              <a:t>안녕하세요. 이정인입니다. 기존 운영 인시던트 Agent를 개선했습니다. AI가 답을 길게 만드는 것보다, 사용자가 요청한 서비스를 실제로 조회했는지와 그 근거에 맞게 답하는지를 확인하는 데 집중했습니다. 오늘 숫자는 실제 운영 장애가 아닌 수업용 고정 샘플의 비교 결과입니다. 발표는 문제, 설계, 코드, 실측, 한계 순서입니다.</a:t>
+              <a:t>안녕하세요. 이정인입니다. 기존 과제와 최종 개선본을 비교하겠습니다. 원본에도 질문 분류, 복수 서비스 계획, MCP 조회와 런북 기반 작성, 대화 저장이 있었습니다. 이 기반은 유지하고 요청 누락, 런북 선택, 답변 검수를 보완했습니다. 비교 대상은 원본 0d8405e와 최종 제품 69d58eb입니다. 오늘 수치는 실제 운영 장애가 아니라 고정한 수업용 샘플입니다.</a:t>
+            </a:r>
+          </a:p>
+          <a:p xmlns:a="http://schemas.openxmlformats.org/drawingml/2006/main">
+            <a:r>
+              <a:t/>
+            </a:r>
+          </a:p>
+          <a:p xmlns:a="http://schemas.openxmlformats.org/drawingml/2006/main">
+            <a:r>
+              <a:t>[근거]</a:t>
+            </a:r>
+          </a:p>
+          <a:p xmlns:a="http://schemas.openxmlformats.org/drawingml/2006/main">
+            <a:r>
+              <a:t>원본: 기존과제자료_백업_20261020/agent/graph.py, server.py. 최종: agent/graph.py. 제품 소스 69d58eb.</a:t>
             </a:r>
           </a:p>
         </p:txBody>
@@ -520,7 +535,22 @@
           <a:lstStyle xmlns:a="http://schemas.openxmlformats.org/drawingml/2006/main"/>
           <a:p xmlns:a="http://schemas.openxmlformats.org/drawingml/2006/main">
             <a:r>
-              <a:t>원본에도 계획, MCP 조회, 런북 기반 작성, 세션 저장과 반복 제한은 있었습니다. 개선점은 그 기능의 존재가 아니라 검사 수준입니다. 원본의 런북 분류는 첫 키워드 일치 유형 하나를 고르고, Validator는 글자 수와 번호를 확인합니다. 그래서 요청 대상과 실제 결과, 수치와 적용 조건까지 확인하도록 강화했습니다. 과거 응답의 결함이 어느 코드 한 줄 때문이라고 단정하지 않고 실제 흐름과 테스트로 확인했습니다.</a:t>
+              <a:t>원본에서 보완할 점은 세 가지입니다. 먼저 복수 서비스 계획과 이름 보정은 있었지만, 하나의 대상만 계획되면 나머지를 모두 복구하는 검사는 없었습니다. 둘째, 런북은 알림의 첫 일치 키워드 유형으로 골랐기 때문에 복합 증상을 충분히 담지 못할 수 있었습니다. 셋째, 답변은 글자 수와 번호를 검사했습니다. 세 번째 실패는 강제 통과했습니다. 이 설명은 코드에서 확인한 동작과 가능한 한계이며 모든 입력이 실제 실패했다는 뜻은 아닙니다.</a:t>
+            </a:r>
+          </a:p>
+          <a:p xmlns:a="http://schemas.openxmlformats.org/drawingml/2006/main">
+            <a:r>
+              <a:t/>
+            </a:r>
+          </a:p>
+          <a:p xmlns:a="http://schemas.openxmlformats.org/drawingml/2006/main">
+            <a:r>
+              <a:t>[근거]</a:t>
+            </a:r>
+          </a:p>
+          <a:p xmlns:a="http://schemas.openxmlformats.org/drawingml/2006/main">
+            <a:r>
+              <a:t>원본: agent/openai_llm.py OpenAIFastLLM.plan()의 if not seen; graph.py _classify_incident_type(), validate_node(). 원본 소스 0d8405e.</a:t>
             </a:r>
           </a:p>
         </p:txBody>
@@ -590,7 +620,22 @@
           <a:lstStyle xmlns:a="http://schemas.openxmlformats.org/drawingml/2006/main"/>
           <a:p xmlns:a="http://schemas.openxmlformats.org/drawingml/2006/main">
             <a:r>
-              <a:t>FastAPI는 요청을 받고, LangGraph는 단계를 연결합니다. MCP는 모니터링 도구와 런북 원문을 제공합니다. 의존성 주입으로 모델과 도구를 전달하기 때문에 테스트에서는 통제된 모델과 도구로 바꿀 수 있습니다. 새로 보완한 부분은 이전 대상 연결, 조사 범위 대조, RAG, 구조화 검수, 선택적 Reviewer입니다. 모든 노드가 독립 Agent라는 뜻은 아닙니다. 작성과 검토를 별도 역할과 지시문으로 나눴습니다.</a:t>
+              <a:t>기존 FastAPI lifespan, MCP, 의존성 주입, SQLite 세션, LangGraph와 LangSmith를 재사용했습니다. MCP 클라이언트와 일시 오류 재시도 모듈은 원본과 파일 내용도 같습니다. 최종본은 대상 연결, 요청 범위 대조, RAG, 근거·조건 검수와 별도 Reviewer를 기존 흐름에 연결합니다. AI와 코드의 역할 분리도 원본 게이트에 이미 있었고, 최종본은 모델이 선택하는 범위와 코드가 검사하는 계약을 더 구체화했습니다.</a:t>
+            </a:r>
+          </a:p>
+          <a:p xmlns:a="http://schemas.openxmlformats.org/drawingml/2006/main">
+            <a:r>
+              <a:t/>
+            </a:r>
+          </a:p>
+          <a:p xmlns:a="http://schemas.openxmlformats.org/drawingml/2006/main">
+            <a:r>
+              <a:t>[근거]</a:t>
+            </a:r>
+          </a:p>
+          <a:p xmlns:a="http://schemas.openxmlformats.org/drawingml/2006/main">
+            <a:r>
+              <a:t>원본·최종: agent/mcp_client.py, retry.py 내용 동일. server.py lifespan(), agent/deps.py SupervisorDeps.</a:t>
             </a:r>
           </a:p>
         </p:txBody>
@@ -660,7 +705,22 @@
           <a:lstStyle xmlns:a="http://schemas.openxmlformats.org/drawingml/2006/main"/>
           <a:p xmlns:a="http://schemas.openxmlformats.org/drawingml/2006/main">
             <a:r>
-              <a:t>런북은 장애 대응 매뉴얼입니다. 서비스별 알림과 질문을 나눠 Chroma에서 검색한 뒤 관련성 모델의 선택과 실제 인용을 코드로 확인합니다. 이전의 두 문서 제한은 교재가 요구한 규칙이 아니며 세 증상의 근거를 누락시킬 수 있어 제거했습니다. 현재 문서는 여섯 개로 작으므로 전체 후보를 확인합니다. 문서가 커지면 후보 수와 입력 토큰 예산을 새로 설계해야 합니다. 실제 F08의 세 런북 결과는 별도 실행 기록으로 남겼습니다.</a:t>
+              <a:t>원본도 MCP로 런북을 읽고 Writer에게 전달했습니다. 달라진 부분은 선택 방법입니다. 원본은 알림 문자열의 키워드를 순서대로 검사해 첫 장애 유형 하나를 고르고, 일치하지 않으면 db-down으로 대체합니다. 최종본은 서비스별 알림과 질문을 각각 검색하고, 관련성 판정과 인용 검사를 거쳐 원문을 읽습니다. 최종본 F08에서는 세 서비스를 조회하고 CPU, 메모리, 디스크 런북을 확보했습니다. 이 입력의 원본 결과를 함께 측정하지는 않았으므로 검색 정답률이 높아졌다는 수치로 쓰지 않습니다.</a:t>
+            </a:r>
+          </a:p>
+          <a:p xmlns:a="http://schemas.openxmlformats.org/drawingml/2006/main">
+            <a:r>
+              <a:t/>
+            </a:r>
+          </a:p>
+          <a:p xmlns:a="http://schemas.openxmlformats.org/drawingml/2006/main">
+            <a:r>
+              <a:t>[근거]</a:t>
+            </a:r>
+          </a:p>
+          <a:p xmlns:a="http://schemas.openxmlformats.org/drawingml/2006/main">
+            <a:r>
+              <a:t>원본 graph.py _classify_incident_type(), replan_check_node(). 최종 runbook_retriever.py search(), relevance.py, graph.py retrieve_runbooks_node(). 실제 F08: doc/final_execution_examples.json.</a:t>
             </a:r>
           </a:p>
         </p:txBody>
@@ -730,7 +790,22 @@
           <a:lstStyle xmlns:a="http://schemas.openxmlformats.org/drawingml/2006/main"/>
           <a:p xmlns:a="http://schemas.openxmlformats.org/drawingml/2006/main">
             <a:r>
-              <a:t>SQLite가 대화를 저장하는 기능은 원래 있었습니다. 하지만 운영 계획에 이전 대상을 연결하는 것은 별도의 문제입니다. 이번에는 최근 사용자 메시지에서 이름만 가져와 작업 질문을 구성합니다. 두 대상 중 하나를 가리키면 추가 질문하고, 둘 다라고 하면 둘을 새로 조회합니다. 첫 실제 검사에서 대상은 맞게 연결했지만 라우터가 일반 대화로 보내 이전 수치를 답한 문제가 나타났습니다. 그 실패를 보존하고, 대상이 연결된 운영 질문은 반드시 조회하도록 가드를 추가했습니다. 아직 모든 한국어 대명사를 처리하는 기능은 아닙니다.</a:t>
+              <a:t>대화 저장과 이름 기억도 원본에 있었습니다. 다만 이전 대화는 일반 대화 경로에 전달하고, 운영 분류와 계획은 현재 질문을 사용했습니다. 최종본은 최근 사용자 메시지의 서비스 이름을 그 서비스 같은 후속 질문에 연결합니다. 이름만 가져오고 이전 측정값은 사용하지 않습니다. 대상이 모호하면 되묻고 확인되면 새로 조회합니다. 화면은 요청 ID로 늦게 도착한 이벤트를 거르고, 실패 초안을 성공 답변으로 저장하지 않습니다. 모든 대명사를 이해하는 기능은 아니며 제한된 표현과 최근 열 개 메시지 범위입니다.</a:t>
+            </a:r>
+          </a:p>
+          <a:p xmlns:a="http://schemas.openxmlformats.org/drawingml/2006/main">
+            <a:r>
+              <a:t/>
+            </a:r>
+          </a:p>
+          <a:p xmlns:a="http://schemas.openxmlformats.org/drawingml/2006/main">
+            <a:r>
+              <a:t>[근거]</a:t>
+            </a:r>
+          </a:p>
+          <a:p xmlns:a="http://schemas.openxmlformats.org/drawingml/2006/main">
+            <a:r>
+              <a:t>원본 server.py _handle_chat(), graph.py route_node(), chat_answer_node(). 최종 request_context.py resolve_followup(), request_ui.js accepts(), session_store.py append_turn().</a:t>
             </a:r>
           </a:p>
         </p:txBody>
@@ -800,7 +875,22 @@
           <a:lstStyle xmlns:a="http://schemas.openxmlformats.org/drawingml/2006/main"/>
           <a:p xmlns:a="http://schemas.openxmlformats.org/drawingml/2006/main">
             <a:r>
-              <a:t>Writer는 긴 보고서 대신 허용된 절차와 가설의 ID를 선택합니다. Python이 실제 조회 사실과 조건을 붙이고, Validator가 존재하지 않는 ID나 바뀐 수치, 확인되지 않은 조건을 검사합니다. 복잡한 질문은 별도 Reviewer가 누락과 관련성을 읽습니다. Reviewer가 반려하면 다시 쓰고 코드 검사도 다시 받습니다. Writer 세 번, Reviewer 두 번 한도 뒤에는 강제 합격하지 않습니다. 이 횟수 조합과 보류 정책은 프로젝트 선택이며 교재의 그대로인 숫자는 아닙니다.</a:t>
+              <a:t>원본 Writer는 모니터링, 런북, 분석 결과로 자유로운 문장을 작성했습니다. 최종 OpenAI Writer는 허용된 절차와 가설 ID만 선택하고 Python이 사실과 조건, 출처를 붙입니다. Validator는 수치와 대상, ID, 조건을 검사합니다. 복잡한 요청에는 별도 Reviewer가 누락과 관련성을 읽습니다. 원본에도 최대 세 번의 작성 제한은 있었습니다. 달라진 정책은 한도에 도달해도 강제 합격하지 않는다는 점입니다. Reviewer는 최대 두 번이고 수정 답변도 코드 검사를 다시 받습니다. AI Reviewer는 사람 승인이 아닙니다.</a:t>
+            </a:r>
+          </a:p>
+          <a:p xmlns:a="http://schemas.openxmlformats.org/drawingml/2006/main">
+            <a:r>
+              <a:t/>
+            </a:r>
+          </a:p>
+          <a:p xmlns:a="http://schemas.openxmlformats.org/drawingml/2006/main">
+            <a:r>
+              <a:t>[근거]</a:t>
+            </a:r>
+          </a:p>
+          <a:p xmlns:a="http://schemas.openxmlformats.org/drawingml/2006/main">
+            <a:r>
+              <a:t>원본 graph.py write_node(), validate_node(). 최종 report_selection.py, validator.py, semantic_review.py, graph.py review_node(), _after_validate(), _after_review(). AI Agent 교재 p.108·116~118은 역할 분리·검토의 개념 근거이며 현재 필드·횟수는 프로젝트 선택.</a:t>
             </a:r>
           </a:p>
         </p:txBody>
@@ -870,7 +960,22 @@
           <a:lstStyle xmlns:a="http://schemas.openxmlformats.org/drawingml/2006/main"/>
           <a:p xmlns:a="http://schemas.openxmlformats.org/drawingml/2006/main">
             <a:r>
-              <a:t>같은 열한 입력을 세 번씩 실행해 원본과 최종 수정본 각각 서른세 건을 비교했습니다. 평균 시간은 4.207초와 3.246초, 모델 총 토큰은 29,671개와 74,252개입니다. 토큰에는 Reviewer가 포함됩니다. 검색 준비 여덟 건과 새 기능 열 건은 본 비교에서 제외하고 따로 기록했습니다. 조회 대상 일치에는 Q08의 기존 auth-service 대체 정책이 포함됩니다. billing-service를 조사했다는 뜻은 아닙니다. 자동 처리 완료와 조회 대상 일치는 답변 정답률과 다릅니다. 네트워크와 모델 변동이 있고 변경을 묶어서 비교했으므로 개별 변경의 인과 효과를 단정하지 않습니다.</a:t>
+              <a:t>같은 열한 입력을 세 번씩 실행해 원본과 최종본 각각 서른세 건을 비교했습니다. 평균 처리시간은 4.207초에서 3.246초, 모델 총 토큰은 29,671개에서 74,252개였습니다. 토큰에는 Reviewer를 포함합니다. 검색 준비 여덟 건과 최종본 추가 기능 열 건은 따로 기록했습니다. 조회 대상 정책 일치는 양쪽 모두 스물네 건 중 스물네 건이므로 이번 실행에서 조회 정확도가 개선됐다고 주장하지 않습니다. 여기에 billing-service의 기존 auth-service 대체 정책도 포함됩니다. 처리 완료와 검수 승인은 답변 정답률과 다릅니다.</a:t>
+            </a:r>
+          </a:p>
+          <a:p xmlns:a="http://schemas.openxmlformats.org/drawingml/2006/main">
+            <a:r>
+              <a:t/>
+            </a:r>
+          </a:p>
+          <a:p xmlns:a="http://schemas.openxmlformats.org/drawingml/2006/main">
+            <a:r>
+              <a:t>[근거]</a:t>
+            </a:r>
+          </a:p>
+          <a:p xmlns:a="http://schemas.openxmlformats.org/drawingml/2006/main">
+            <a:r>
+              <a:t>doc/final_measurement_summary.json, final_comparison.csv. 고정 수업 샘플, 원본·최종 각 33건, warm cache. actual invoice와 independent semantic accuracy는 미측정.</a:t>
             </a:r>
           </a:p>
         </p:txBody>
@@ -940,7 +1045,22 @@
           <a:lstStyle xmlns:a="http://schemas.openxmlformats.org/drawingml/2006/main"/>
           <a:p xmlns:a="http://schemas.openxmlformats.org/drawingml/2006/main">
             <a:r>
-              <a:t>검사를 강화하면 모델 입력과 검토 비용이 늘 수 있습니다. 빠르다는 것과 싸다는 것은 다르므로 둘을 분리했습니다. 현재 데이터는 수업용 샘플이며 시계열, 배포 이력, 호출 관계가 없어 실제 원인을 확정할 수 없습니다. 미지원 billing-service를 auth-service로 대체하는 기존 정책도 남아 있습니다. 사람 승인과 실제 재시작, 롤백, 증설은 구현하지 않았습니다. 독립적인 사람의 의미 정확도 채점과 실제 청구액 확인도 남았습니다.</a:t>
+              <a:t>이번 구조에는 비용과 적용 범위의 한계가 있습니다. 짧은 ID 출력으로 생성량을 줄일 수 있어도, 근거와 조건, Reviewer 입력이 늘면 전체 토큰은 증가합니다. 여러 변경을 함께 비교했으므로 각 변경의 시간 기여를 분리하지는 못했습니다. 현재 여섯 런북을 전체 후보로 주므로 문서가 늘면 입력 예산을 정해야 합니다. 시계열과 배포 이력, 실제 호출 관계가 없어 원인을 확정할 수 없습니다. 미지원 서비스 대체 정책과 제한된 지시 표현도 개선 과제로 남습니다.</a:t>
+            </a:r>
+          </a:p>
+          <a:p xmlns:a="http://schemas.openxmlformats.org/drawingml/2006/main">
+            <a:r>
+              <a:t/>
+            </a:r>
+          </a:p>
+          <a:p xmlns:a="http://schemas.openxmlformats.org/drawingml/2006/main">
+            <a:r>
+              <a:t>[근거]</a:t>
+            </a:r>
+          </a:p>
+          <a:p xmlns:a="http://schemas.openxmlformats.org/drawingml/2006/main">
+            <a:r>
+              <a:t>doc/final_review.md, original_final_feature_audit.md, final_measurement_summary.json. 실제 조치·HITL·실서비스 원인 확정은 미구현.</a:t>
             </a:r>
           </a:p>
         </p:txBody>
@@ -1010,7 +1130,22 @@
           <a:lstStyle xmlns:a="http://schemas.openxmlformats.org/drawingml/2006/main"/>
           <a:p xmlns:a="http://schemas.openxmlformats.org/drawingml/2006/main">
             <a:r>
-              <a:t>코드 검사는 Python 아흔 개와 화면 처리 다섯 개를 통과했습니다. 실제 API는 같은 입력 예순여섯 건과 별도 기능 열 건을 실행했고, 84개 그래프 추적을 재조회했습니다. 원문 해시, 고정 지표, 제공자 토큰을 대조해 숫자를 재현할 근거를 남겼습니다. 발표 시에는 F08의 세 증상 조회, F02의 후속 질문, F05의 모호한 대상 확인을 시연할 수 있습니다. 다음은 독립 평가자의 의미 정확도 채점과 미지원 서비스 정책, 문서가 많아질 때의 입력 예산 개선입니다. 감사합니다.</a:t>
+              <a:t>마지막으로 원본 기능을 열아홉 항목으로 대조하고 코드 구절과 줄 번호를 연결했습니다. 최종 제품은 Python 아흔 개와 화면 처리 다섯 개 검사를 통과했고, 같은 입력 예순여섯 건과 최종본 추가 기능 열 건을 확인했습니다. 준비 실행을 포함한 LangSmith 그래프 여든네 건도 재조회했습니다. 이번 설명 수정에서는 운영 코드와 측정값을 바꾸지 않았습니다. 다음은 독립적인 답변 의미 평가, 미지원 서비스 안내와 검색 입력 예산을 개선하는 것입니다. 감사합니다.</a:t>
+            </a:r>
+          </a:p>
+          <a:p xmlns:a="http://schemas.openxmlformats.org/drawingml/2006/main">
+            <a:r>
+              <a:t/>
+            </a:r>
+          </a:p>
+          <a:p xmlns:a="http://schemas.openxmlformats.org/drawingml/2006/main">
+            <a:r>
+              <a:t>[근거]</a:t>
+            </a:r>
+          </a:p>
+          <a:p xmlns:a="http://schemas.openxmlformats.org/drawingml/2006/main">
+            <a:r>
+              <a:t>doc/original_final_feature_audit.json 19개 근거, final_verification.json, final_measurement_summary.json. 실제 발표·PowerPoint 앱 실행은 미확인.</a:t>
             </a:r>
           </a:p>
         </p:txBody>
@@ -3453,12 +3588,12 @@
   </p:cSld>
   <p:clrMap bg1="lt1" tx1="dk1" bg2="lt2" tx2="dk2" accent1="accent1" accent2="accent2" accent3="accent3" accent4="accent4" accent5="accent5" accent6="accent6" hlink="hlink" folHlink="folHlink"/>
   <p:sldLayoutIdLst>
-    <p:sldLayoutId xmlns:r="http://schemas.openxmlformats.org/officeDocument/2006/relationships" id="2147483649" r:id="R273d26f26fdb4cf7"/>
-    <p:sldLayoutId xmlns:r="http://schemas.openxmlformats.org/officeDocument/2006/relationships" id="2147483650" r:id="Rcfff3a492021413b"/>
-    <p:sldLayoutId xmlns:r="http://schemas.openxmlformats.org/officeDocument/2006/relationships" id="2147483651" r:id="R6008345f70e84f5d"/>
-    <p:sldLayoutId xmlns:r="http://schemas.openxmlformats.org/officeDocument/2006/relationships" id="2147483652" r:id="R6b43fbfc46da4efb"/>
-    <p:sldLayoutId xmlns:r="http://schemas.openxmlformats.org/officeDocument/2006/relationships" id="2147483653" r:id="Rf0e5c44630d84f94"/>
-    <p:sldLayoutId xmlns:r="http://schemas.openxmlformats.org/officeDocument/2006/relationships" id="2147483654" r:id="R9885f79f78644399"/>
+    <p:sldLayoutId xmlns:r="http://schemas.openxmlformats.org/officeDocument/2006/relationships" id="2147483649" r:id="R50846da33a6c4c30"/>
+    <p:sldLayoutId xmlns:r="http://schemas.openxmlformats.org/officeDocument/2006/relationships" id="2147483650" r:id="R6fded8a688364d86"/>
+    <p:sldLayoutId xmlns:r="http://schemas.openxmlformats.org/officeDocument/2006/relationships" id="2147483651" r:id="R4784eee03b094095"/>
+    <p:sldLayoutId xmlns:r="http://schemas.openxmlformats.org/officeDocument/2006/relationships" id="2147483652" r:id="R8440db8291c343b1"/>
+    <p:sldLayoutId xmlns:r="http://schemas.openxmlformats.org/officeDocument/2006/relationships" id="2147483653" r:id="R0d5582aff81a42cd"/>
+    <p:sldLayoutId xmlns:r="http://schemas.openxmlformats.org/officeDocument/2006/relationships" id="2147483654" r:id="R6fcf17e2c24542b9"/>
   </p:sldLayoutIdLst>
   <p:txStyles>
     <p:titleStyle>
@@ -4075,6 +4210,7 @@
               </a:defRPr>
             </a:defPPr>
             <a:lvl1pPr>
+              <a:buNone/>
               <a:defRPr sz="1275" b="1">
                 <a:solidFill>
                   <a:srgbClr val="235ECB"/>
@@ -4085,6 +4221,7 @@
               </a:defRPr>
             </a:lvl1pPr>
             <a:lvl2pPr>
+              <a:buNone/>
               <a:defRPr sz="1275" b="1">
                 <a:solidFill>
                   <a:srgbClr val="235ECB"/>
@@ -4095,6 +4232,7 @@
               </a:defRPr>
             </a:lvl2pPr>
             <a:lvl3pPr>
+              <a:buNone/>
               <a:defRPr sz="1275" b="1">
                 <a:solidFill>
                   <a:srgbClr val="235ECB"/>
@@ -4105,6 +4243,7 @@
               </a:defRPr>
             </a:lvl3pPr>
             <a:lvl4pPr>
+              <a:buNone/>
               <a:defRPr sz="1275" b="1">
                 <a:solidFill>
                   <a:srgbClr val="235ECB"/>
@@ -4115,6 +4254,7 @@
               </a:defRPr>
             </a:lvl4pPr>
             <a:lvl5pPr>
+              <a:buNone/>
               <a:defRPr sz="1275" b="1">
                 <a:solidFill>
                   <a:srgbClr val="235ECB"/>
@@ -4125,6 +4265,7 @@
               </a:defRPr>
             </a:lvl5pPr>
             <a:lvl6pPr>
+              <a:buNone/>
               <a:defRPr sz="1275" b="1">
                 <a:solidFill>
                   <a:srgbClr val="235ECB"/>
@@ -4135,6 +4276,7 @@
               </a:defRPr>
             </a:lvl6pPr>
             <a:lvl7pPr>
+              <a:buNone/>
               <a:defRPr sz="1275" b="1">
                 <a:solidFill>
                   <a:srgbClr val="235ECB"/>
@@ -4145,6 +4287,7 @@
               </a:defRPr>
             </a:lvl7pPr>
             <a:lvl8pPr>
+              <a:buNone/>
               <a:defRPr sz="1275" b="1">
                 <a:solidFill>
                   <a:srgbClr val="235ECB"/>
@@ -4155,6 +4298,7 @@
               </a:defRPr>
             </a:lvl8pPr>
             <a:lvl9pPr>
+              <a:buNone/>
               <a:defRPr sz="1275" b="1">
                 <a:solidFill>
                   <a:srgbClr val="235ECB"/>
@@ -4167,6 +4311,7 @@
           </a:lstStyle>
           <a:p xmlns:a="http://schemas.openxmlformats.org/drawingml/2006/main">
             <a:pPr>
+              <a:buNone/>
               <a:defRPr sz="1275" b="1">
                 <a:solidFill>
                   <a:srgbClr val="235ECB"/>
@@ -4231,6 +4376,7 @@
               </a:defRPr>
             </a:defPPr>
             <a:lvl1pPr>
+              <a:buNone/>
               <a:defRPr sz="2850" b="1">
                 <a:solidFill>
                   <a:srgbClr val="172B4D"/>
@@ -4241,6 +4387,7 @@
               </a:defRPr>
             </a:lvl1pPr>
             <a:lvl2pPr>
+              <a:buNone/>
               <a:defRPr sz="2850" b="1">
                 <a:solidFill>
                   <a:srgbClr val="172B4D"/>
@@ -4251,6 +4398,7 @@
               </a:defRPr>
             </a:lvl2pPr>
             <a:lvl3pPr>
+              <a:buNone/>
               <a:defRPr sz="2850" b="1">
                 <a:solidFill>
                   <a:srgbClr val="172B4D"/>
@@ -4261,6 +4409,7 @@
               </a:defRPr>
             </a:lvl3pPr>
             <a:lvl4pPr>
+              <a:buNone/>
               <a:defRPr sz="2850" b="1">
                 <a:solidFill>
                   <a:srgbClr val="172B4D"/>
@@ -4271,6 +4420,7 @@
               </a:defRPr>
             </a:lvl4pPr>
             <a:lvl5pPr>
+              <a:buNone/>
               <a:defRPr sz="2850" b="1">
                 <a:solidFill>
                   <a:srgbClr val="172B4D"/>
@@ -4281,6 +4431,7 @@
               </a:defRPr>
             </a:lvl5pPr>
             <a:lvl6pPr>
+              <a:buNone/>
               <a:defRPr sz="2850" b="1">
                 <a:solidFill>
                   <a:srgbClr val="172B4D"/>
@@ -4291,6 +4442,7 @@
               </a:defRPr>
             </a:lvl6pPr>
             <a:lvl7pPr>
+              <a:buNone/>
               <a:defRPr sz="2850" b="1">
                 <a:solidFill>
                   <a:srgbClr val="172B4D"/>
@@ -4301,6 +4453,7 @@
               </a:defRPr>
             </a:lvl7pPr>
             <a:lvl8pPr>
+              <a:buNone/>
               <a:defRPr sz="2850" b="1">
                 <a:solidFill>
                   <a:srgbClr val="172B4D"/>
@@ -4311,6 +4464,7 @@
               </a:defRPr>
             </a:lvl8pPr>
             <a:lvl9pPr>
+              <a:buNone/>
               <a:defRPr sz="2850" b="1">
                 <a:solidFill>
                   <a:srgbClr val="172B4D"/>
@@ -4323,6 +4477,7 @@
           </a:lstStyle>
           <a:p xmlns:a="http://schemas.openxmlformats.org/drawingml/2006/main">
             <a:pPr>
+              <a:buNone/>
               <a:defRPr sz="2850" b="1">
                 <a:solidFill>
                   <a:srgbClr val="172B4D"/>
@@ -4341,7 +4496,7 @@
                 <a:ea typeface="Apple SD Gothic Neo"/>
                 <a:cs typeface="Apple SD Gothic Neo"/>
               </a:rPr>
-              <a:t>운영 인시던트 Agent 개선</a:t>
+              <a:t>기존 과제와 최종 개선본 비교</a:t>
             </a:r>
           </a:p>
         </p:txBody>
@@ -4417,6 +4572,7 @@
               </a:defRPr>
             </a:defPPr>
             <a:lvl1pPr>
+              <a:buNone/>
               <a:defRPr sz="975" b="0">
                 <a:solidFill>
                   <a:srgbClr val="5D6D84"/>
@@ -4427,6 +4583,7 @@
               </a:defRPr>
             </a:lvl1pPr>
             <a:lvl2pPr>
+              <a:buNone/>
               <a:defRPr sz="975" b="0">
                 <a:solidFill>
                   <a:srgbClr val="5D6D84"/>
@@ -4437,6 +4594,7 @@
               </a:defRPr>
             </a:lvl2pPr>
             <a:lvl3pPr>
+              <a:buNone/>
               <a:defRPr sz="975" b="0">
                 <a:solidFill>
                   <a:srgbClr val="5D6D84"/>
@@ -4447,6 +4605,7 @@
               </a:defRPr>
             </a:lvl3pPr>
             <a:lvl4pPr>
+              <a:buNone/>
               <a:defRPr sz="975" b="0">
                 <a:solidFill>
                   <a:srgbClr val="5D6D84"/>
@@ -4457,6 +4616,7 @@
               </a:defRPr>
             </a:lvl4pPr>
             <a:lvl5pPr>
+              <a:buNone/>
               <a:defRPr sz="975" b="0">
                 <a:solidFill>
                   <a:srgbClr val="5D6D84"/>
@@ -4467,6 +4627,7 @@
               </a:defRPr>
             </a:lvl5pPr>
             <a:lvl6pPr>
+              <a:buNone/>
               <a:defRPr sz="975" b="0">
                 <a:solidFill>
                   <a:srgbClr val="5D6D84"/>
@@ -4477,6 +4638,7 @@
               </a:defRPr>
             </a:lvl6pPr>
             <a:lvl7pPr>
+              <a:buNone/>
               <a:defRPr sz="975" b="0">
                 <a:solidFill>
                   <a:srgbClr val="5D6D84"/>
@@ -4487,6 +4649,7 @@
               </a:defRPr>
             </a:lvl7pPr>
             <a:lvl8pPr>
+              <a:buNone/>
               <a:defRPr sz="975" b="0">
                 <a:solidFill>
                   <a:srgbClr val="5D6D84"/>
@@ -4497,6 +4660,7 @@
               </a:defRPr>
             </a:lvl8pPr>
             <a:lvl9pPr>
+              <a:buNone/>
               <a:defRPr sz="975" b="0">
                 <a:solidFill>
                   <a:srgbClr val="5D6D84"/>
@@ -4509,6 +4673,7 @@
           </a:lstStyle>
           <a:p xmlns:a="http://schemas.openxmlformats.org/drawingml/2006/main">
             <a:pPr>
+              <a:buNone/>
               <a:defRPr sz="975" b="0">
                 <a:solidFill>
                   <a:srgbClr val="5D6D84"/>
@@ -4573,6 +4738,7 @@
               </a:defRPr>
             </a:defPPr>
             <a:lvl1pPr>
+              <a:buNone/>
               <a:defRPr sz="1125" b="1">
                 <a:solidFill>
                   <a:srgbClr val="5D6D84"/>
@@ -4583,6 +4749,7 @@
               </a:defRPr>
             </a:lvl1pPr>
             <a:lvl2pPr>
+              <a:buNone/>
               <a:defRPr sz="1125" b="1">
                 <a:solidFill>
                   <a:srgbClr val="5D6D84"/>
@@ -4593,6 +4760,7 @@
               </a:defRPr>
             </a:lvl2pPr>
             <a:lvl3pPr>
+              <a:buNone/>
               <a:defRPr sz="1125" b="1">
                 <a:solidFill>
                   <a:srgbClr val="5D6D84"/>
@@ -4603,6 +4771,7 @@
               </a:defRPr>
             </a:lvl3pPr>
             <a:lvl4pPr>
+              <a:buNone/>
               <a:defRPr sz="1125" b="1">
                 <a:solidFill>
                   <a:srgbClr val="5D6D84"/>
@@ -4613,6 +4782,7 @@
               </a:defRPr>
             </a:lvl4pPr>
             <a:lvl5pPr>
+              <a:buNone/>
               <a:defRPr sz="1125" b="1">
                 <a:solidFill>
                   <a:srgbClr val="5D6D84"/>
@@ -4623,6 +4793,7 @@
               </a:defRPr>
             </a:lvl5pPr>
             <a:lvl6pPr>
+              <a:buNone/>
               <a:defRPr sz="1125" b="1">
                 <a:solidFill>
                   <a:srgbClr val="5D6D84"/>
@@ -4633,6 +4804,7 @@
               </a:defRPr>
             </a:lvl6pPr>
             <a:lvl7pPr>
+              <a:buNone/>
               <a:defRPr sz="1125" b="1">
                 <a:solidFill>
                   <a:srgbClr val="5D6D84"/>
@@ -4643,6 +4815,7 @@
               </a:defRPr>
             </a:lvl7pPr>
             <a:lvl8pPr>
+              <a:buNone/>
               <a:defRPr sz="1125" b="1">
                 <a:solidFill>
                   <a:srgbClr val="5D6D84"/>
@@ -4653,6 +4826,7 @@
               </a:defRPr>
             </a:lvl8pPr>
             <a:lvl9pPr>
+              <a:buNone/>
               <a:defRPr sz="1125" b="1">
                 <a:solidFill>
                   <a:srgbClr val="5D6D84"/>
@@ -4665,6 +4839,7 @@
           </a:lstStyle>
           <a:p xmlns:a="http://schemas.openxmlformats.org/drawingml/2006/main">
             <a:pPr>
+              <a:buNone/>
               <a:defRPr sz="1125" b="1">
                 <a:solidFill>
                   <a:srgbClr val="5D6D84"/>
@@ -4729,6 +4904,7 @@
               </a:defRPr>
             </a:defPPr>
             <a:lvl1pPr>
+              <a:buNone/>
               <a:defRPr sz="3300" b="1">
                 <a:solidFill>
                   <a:srgbClr val="172B4D"/>
@@ -4739,6 +4915,7 @@
               </a:defRPr>
             </a:lvl1pPr>
             <a:lvl2pPr>
+              <a:buNone/>
               <a:defRPr sz="3300" b="1">
                 <a:solidFill>
                   <a:srgbClr val="172B4D"/>
@@ -4749,6 +4926,7 @@
               </a:defRPr>
             </a:lvl2pPr>
             <a:lvl3pPr>
+              <a:buNone/>
               <a:defRPr sz="3300" b="1">
                 <a:solidFill>
                   <a:srgbClr val="172B4D"/>
@@ -4759,6 +4937,7 @@
               </a:defRPr>
             </a:lvl3pPr>
             <a:lvl4pPr>
+              <a:buNone/>
               <a:defRPr sz="3300" b="1">
                 <a:solidFill>
                   <a:srgbClr val="172B4D"/>
@@ -4769,6 +4948,7 @@
               </a:defRPr>
             </a:lvl4pPr>
             <a:lvl5pPr>
+              <a:buNone/>
               <a:defRPr sz="3300" b="1">
                 <a:solidFill>
                   <a:srgbClr val="172B4D"/>
@@ -4779,6 +4959,7 @@
               </a:defRPr>
             </a:lvl5pPr>
             <a:lvl6pPr>
+              <a:buNone/>
               <a:defRPr sz="3300" b="1">
                 <a:solidFill>
                   <a:srgbClr val="172B4D"/>
@@ -4789,6 +4970,7 @@
               </a:defRPr>
             </a:lvl6pPr>
             <a:lvl7pPr>
+              <a:buNone/>
               <a:defRPr sz="3300" b="1">
                 <a:solidFill>
                   <a:srgbClr val="172B4D"/>
@@ -4799,6 +4981,7 @@
               </a:defRPr>
             </a:lvl7pPr>
             <a:lvl8pPr>
+              <a:buNone/>
               <a:defRPr sz="3300" b="1">
                 <a:solidFill>
                   <a:srgbClr val="172B4D"/>
@@ -4809,6 +4992,7 @@
               </a:defRPr>
             </a:lvl8pPr>
             <a:lvl9pPr>
+              <a:buNone/>
               <a:defRPr sz="3300" b="1">
                 <a:solidFill>
                   <a:srgbClr val="172B4D"/>
@@ -4821,6 +5005,7 @@
           </a:lstStyle>
           <a:p xmlns:a="http://schemas.openxmlformats.org/drawingml/2006/main">
             <a:pPr>
+              <a:buNone/>
               <a:defRPr sz="3300" b="1">
                 <a:solidFill>
                   <a:srgbClr val="172B4D"/>
@@ -4839,7 +5024,7 @@
                 <a:ea typeface="Apple SD Gothic Neo"/>
                 <a:cs typeface="Apple SD Gothic Neo"/>
               </a:rPr>
-              <a:t>대상 확인부터 답변 검수까지</a:t>
+              <a:t>조회 누락·런북 선택·답변 검수 강화</a:t>
             </a:r>
           </a:p>
         </p:txBody>
@@ -4885,6 +5070,7 @@
               </a:defRPr>
             </a:defPPr>
             <a:lvl1pPr>
+              <a:buNone/>
               <a:defRPr sz="1950" b="0">
                 <a:solidFill>
                   <a:srgbClr val="5D6D84"/>
@@ -4895,6 +5081,7 @@
               </a:defRPr>
             </a:lvl1pPr>
             <a:lvl2pPr>
+              <a:buNone/>
               <a:defRPr sz="1950" b="0">
                 <a:solidFill>
                   <a:srgbClr val="5D6D84"/>
@@ -4905,6 +5092,7 @@
               </a:defRPr>
             </a:lvl2pPr>
             <a:lvl3pPr>
+              <a:buNone/>
               <a:defRPr sz="1950" b="0">
                 <a:solidFill>
                   <a:srgbClr val="5D6D84"/>
@@ -4915,6 +5103,7 @@
               </a:defRPr>
             </a:lvl3pPr>
             <a:lvl4pPr>
+              <a:buNone/>
               <a:defRPr sz="1950" b="0">
                 <a:solidFill>
                   <a:srgbClr val="5D6D84"/>
@@ -4925,6 +5114,7 @@
               </a:defRPr>
             </a:lvl4pPr>
             <a:lvl5pPr>
+              <a:buNone/>
               <a:defRPr sz="1950" b="0">
                 <a:solidFill>
                   <a:srgbClr val="5D6D84"/>
@@ -4935,6 +5125,7 @@
               </a:defRPr>
             </a:lvl5pPr>
             <a:lvl6pPr>
+              <a:buNone/>
               <a:defRPr sz="1950" b="0">
                 <a:solidFill>
                   <a:srgbClr val="5D6D84"/>
@@ -4945,6 +5136,7 @@
               </a:defRPr>
             </a:lvl6pPr>
             <a:lvl7pPr>
+              <a:buNone/>
               <a:defRPr sz="1950" b="0">
                 <a:solidFill>
                   <a:srgbClr val="5D6D84"/>
@@ -4955,6 +5147,7 @@
               </a:defRPr>
             </a:lvl7pPr>
             <a:lvl8pPr>
+              <a:buNone/>
               <a:defRPr sz="1950" b="0">
                 <a:solidFill>
                   <a:srgbClr val="5D6D84"/>
@@ -4965,6 +5158,7 @@
               </a:defRPr>
             </a:lvl8pPr>
             <a:lvl9pPr>
+              <a:buNone/>
               <a:defRPr sz="1950" b="0">
                 <a:solidFill>
                   <a:srgbClr val="5D6D84"/>
@@ -4977,6 +5171,7 @@
           </a:lstStyle>
           <a:p xmlns:a="http://schemas.openxmlformats.org/drawingml/2006/main">
             <a:pPr>
+              <a:buNone/>
               <a:defRPr sz="1950" b="0">
                 <a:solidFill>
                   <a:srgbClr val="5D6D84"/>
@@ -5071,6 +5266,7 @@
               </a:defRPr>
             </a:defPPr>
             <a:lvl1pPr>
+              <a:buNone/>
               <a:defRPr sz="1875" b="1">
                 <a:solidFill>
                   <a:srgbClr val="FFFFFF"/>
@@ -5081,6 +5277,7 @@
               </a:defRPr>
             </a:lvl1pPr>
             <a:lvl2pPr>
+              <a:buNone/>
               <a:defRPr sz="1875" b="1">
                 <a:solidFill>
                   <a:srgbClr val="FFFFFF"/>
@@ -5091,6 +5288,7 @@
               </a:defRPr>
             </a:lvl2pPr>
             <a:lvl3pPr>
+              <a:buNone/>
               <a:defRPr sz="1875" b="1">
                 <a:solidFill>
                   <a:srgbClr val="FFFFFF"/>
@@ -5101,6 +5299,7 @@
               </a:defRPr>
             </a:lvl3pPr>
             <a:lvl4pPr>
+              <a:buNone/>
               <a:defRPr sz="1875" b="1">
                 <a:solidFill>
                   <a:srgbClr val="FFFFFF"/>
@@ -5111,6 +5310,7 @@
               </a:defRPr>
             </a:lvl4pPr>
             <a:lvl5pPr>
+              <a:buNone/>
               <a:defRPr sz="1875" b="1">
                 <a:solidFill>
                   <a:srgbClr val="FFFFFF"/>
@@ -5121,6 +5321,7 @@
               </a:defRPr>
             </a:lvl5pPr>
             <a:lvl6pPr>
+              <a:buNone/>
               <a:defRPr sz="1875" b="1">
                 <a:solidFill>
                   <a:srgbClr val="FFFFFF"/>
@@ -5131,6 +5332,7 @@
               </a:defRPr>
             </a:lvl6pPr>
             <a:lvl7pPr>
+              <a:buNone/>
               <a:defRPr sz="1875" b="1">
                 <a:solidFill>
                   <a:srgbClr val="FFFFFF"/>
@@ -5141,6 +5343,7 @@
               </a:defRPr>
             </a:lvl7pPr>
             <a:lvl8pPr>
+              <a:buNone/>
               <a:defRPr sz="1875" b="1">
                 <a:solidFill>
                   <a:srgbClr val="FFFFFF"/>
@@ -5151,6 +5354,7 @@
               </a:defRPr>
             </a:lvl8pPr>
             <a:lvl9pPr>
+              <a:buNone/>
               <a:defRPr sz="1875" b="1">
                 <a:solidFill>
                   <a:srgbClr val="FFFFFF"/>
@@ -5163,6 +5367,7 @@
           </a:lstStyle>
           <a:p xmlns:a="http://schemas.openxmlformats.org/drawingml/2006/main">
             <a:pPr>
+              <a:buNone/>
               <a:defRPr sz="1875" b="1">
                 <a:solidFill>
                   <a:srgbClr val="FFFFFF"/>
@@ -5181,7 +5386,7 @@
                 <a:ea typeface="Apple SD Gothic Neo"/>
                 <a:cs typeface="Apple SD Gothic Neo"/>
               </a:rPr>
-              <a:t>이번에 확인한 것</a:t>
+              <a:t>실제 변경을 확인한 범위</a:t>
             </a:r>
           </a:p>
         </p:txBody>
@@ -5227,6 +5432,7 @@
               </a:defRPr>
             </a:defPPr>
             <a:lvl1pPr>
+              <a:buNone/>
               <a:defRPr sz="2325" b="0">
                 <a:solidFill>
                   <a:srgbClr val="FFFFFF"/>
@@ -5237,6 +5443,7 @@
               </a:defRPr>
             </a:lvl1pPr>
             <a:lvl2pPr>
+              <a:buNone/>
               <a:defRPr sz="2325" b="0">
                 <a:solidFill>
                   <a:srgbClr val="FFFFFF"/>
@@ -5247,6 +5454,7 @@
               </a:defRPr>
             </a:lvl2pPr>
             <a:lvl3pPr>
+              <a:buNone/>
               <a:defRPr sz="2325" b="0">
                 <a:solidFill>
                   <a:srgbClr val="FFFFFF"/>
@@ -5257,6 +5465,7 @@
               </a:defRPr>
             </a:lvl3pPr>
             <a:lvl4pPr>
+              <a:buNone/>
               <a:defRPr sz="2325" b="0">
                 <a:solidFill>
                   <a:srgbClr val="FFFFFF"/>
@@ -5267,6 +5476,7 @@
               </a:defRPr>
             </a:lvl4pPr>
             <a:lvl5pPr>
+              <a:buNone/>
               <a:defRPr sz="2325" b="0">
                 <a:solidFill>
                   <a:srgbClr val="FFFFFF"/>
@@ -5277,6 +5487,7 @@
               </a:defRPr>
             </a:lvl5pPr>
             <a:lvl6pPr>
+              <a:buNone/>
               <a:defRPr sz="2325" b="0">
                 <a:solidFill>
                   <a:srgbClr val="FFFFFF"/>
@@ -5287,6 +5498,7 @@
               </a:defRPr>
             </a:lvl6pPr>
             <a:lvl7pPr>
+              <a:buNone/>
               <a:defRPr sz="2325" b="0">
                 <a:solidFill>
                   <a:srgbClr val="FFFFFF"/>
@@ -5297,6 +5509,7 @@
               </a:defRPr>
             </a:lvl7pPr>
             <a:lvl8pPr>
+              <a:buNone/>
               <a:defRPr sz="2325" b="0">
                 <a:solidFill>
                   <a:srgbClr val="FFFFFF"/>
@@ -5307,6 +5520,7 @@
               </a:defRPr>
             </a:lvl8pPr>
             <a:lvl9pPr>
+              <a:buNone/>
               <a:defRPr sz="2325" b="0">
                 <a:solidFill>
                   <a:srgbClr val="FFFFFF"/>
@@ -5319,6 +5533,7 @@
           </a:lstStyle>
           <a:p xmlns:a="http://schemas.openxmlformats.org/drawingml/2006/main">
             <a:pPr>
+              <a:buNone/>
               <a:defRPr sz="2325" b="0">
                 <a:solidFill>
                   <a:srgbClr val="FFFFFF"/>
@@ -5442,6 +5657,7 @@
               </a:defRPr>
             </a:defPPr>
             <a:lvl1pPr>
+              <a:buNone/>
               <a:defRPr sz="1275" b="1">
                 <a:solidFill>
                   <a:srgbClr val="235ECB"/>
@@ -5452,6 +5668,7 @@
               </a:defRPr>
             </a:lvl1pPr>
             <a:lvl2pPr>
+              <a:buNone/>
               <a:defRPr sz="1275" b="1">
                 <a:solidFill>
                   <a:srgbClr val="235ECB"/>
@@ -5462,6 +5679,7 @@
               </a:defRPr>
             </a:lvl2pPr>
             <a:lvl3pPr>
+              <a:buNone/>
               <a:defRPr sz="1275" b="1">
                 <a:solidFill>
                   <a:srgbClr val="235ECB"/>
@@ -5472,6 +5690,7 @@
               </a:defRPr>
             </a:lvl3pPr>
             <a:lvl4pPr>
+              <a:buNone/>
               <a:defRPr sz="1275" b="1">
                 <a:solidFill>
                   <a:srgbClr val="235ECB"/>
@@ -5482,6 +5701,7 @@
               </a:defRPr>
             </a:lvl4pPr>
             <a:lvl5pPr>
+              <a:buNone/>
               <a:defRPr sz="1275" b="1">
                 <a:solidFill>
                   <a:srgbClr val="235ECB"/>
@@ -5492,6 +5712,7 @@
               </a:defRPr>
             </a:lvl5pPr>
             <a:lvl6pPr>
+              <a:buNone/>
               <a:defRPr sz="1275" b="1">
                 <a:solidFill>
                   <a:srgbClr val="235ECB"/>
@@ -5502,6 +5723,7 @@
               </a:defRPr>
             </a:lvl6pPr>
             <a:lvl7pPr>
+              <a:buNone/>
               <a:defRPr sz="1275" b="1">
                 <a:solidFill>
                   <a:srgbClr val="235ECB"/>
@@ -5512,6 +5734,7 @@
               </a:defRPr>
             </a:lvl7pPr>
             <a:lvl8pPr>
+              <a:buNone/>
               <a:defRPr sz="1275" b="1">
                 <a:solidFill>
                   <a:srgbClr val="235ECB"/>
@@ -5522,6 +5745,7 @@
               </a:defRPr>
             </a:lvl8pPr>
             <a:lvl9pPr>
+              <a:buNone/>
               <a:defRPr sz="1275" b="1">
                 <a:solidFill>
                   <a:srgbClr val="235ECB"/>
@@ -5534,6 +5758,7 @@
           </a:lstStyle>
           <a:p xmlns:a="http://schemas.openxmlformats.org/drawingml/2006/main">
             <a:pPr>
+              <a:buNone/>
               <a:defRPr sz="1275" b="1">
                 <a:solidFill>
                   <a:srgbClr val="235ECB"/>
@@ -5598,6 +5823,7 @@
               </a:defRPr>
             </a:defPPr>
             <a:lvl1pPr>
+              <a:buNone/>
               <a:defRPr sz="2850" b="1">
                 <a:solidFill>
                   <a:srgbClr val="172B4D"/>
@@ -5608,6 +5834,7 @@
               </a:defRPr>
             </a:lvl1pPr>
             <a:lvl2pPr>
+              <a:buNone/>
               <a:defRPr sz="2850" b="1">
                 <a:solidFill>
                   <a:srgbClr val="172B4D"/>
@@ -5618,6 +5845,7 @@
               </a:defRPr>
             </a:lvl2pPr>
             <a:lvl3pPr>
+              <a:buNone/>
               <a:defRPr sz="2850" b="1">
                 <a:solidFill>
                   <a:srgbClr val="172B4D"/>
@@ -5628,6 +5856,7 @@
               </a:defRPr>
             </a:lvl3pPr>
             <a:lvl4pPr>
+              <a:buNone/>
               <a:defRPr sz="2850" b="1">
                 <a:solidFill>
                   <a:srgbClr val="172B4D"/>
@@ -5638,6 +5867,7 @@
               </a:defRPr>
             </a:lvl4pPr>
             <a:lvl5pPr>
+              <a:buNone/>
               <a:defRPr sz="2850" b="1">
                 <a:solidFill>
                   <a:srgbClr val="172B4D"/>
@@ -5648,6 +5878,7 @@
               </a:defRPr>
             </a:lvl5pPr>
             <a:lvl6pPr>
+              <a:buNone/>
               <a:defRPr sz="2850" b="1">
                 <a:solidFill>
                   <a:srgbClr val="172B4D"/>
@@ -5658,6 +5889,7 @@
               </a:defRPr>
             </a:lvl6pPr>
             <a:lvl7pPr>
+              <a:buNone/>
               <a:defRPr sz="2850" b="1">
                 <a:solidFill>
                   <a:srgbClr val="172B4D"/>
@@ -5668,6 +5900,7 @@
               </a:defRPr>
             </a:lvl7pPr>
             <a:lvl8pPr>
+              <a:buNone/>
               <a:defRPr sz="2850" b="1">
                 <a:solidFill>
                   <a:srgbClr val="172B4D"/>
@@ -5678,6 +5911,7 @@
               </a:defRPr>
             </a:lvl8pPr>
             <a:lvl9pPr>
+              <a:buNone/>
               <a:defRPr sz="2850" b="1">
                 <a:solidFill>
                   <a:srgbClr val="172B4D"/>
@@ -5690,6 +5924,7 @@
           </a:lstStyle>
           <a:p xmlns:a="http://schemas.openxmlformats.org/drawingml/2006/main">
             <a:pPr>
+              <a:buNone/>
               <a:defRPr sz="2850" b="1">
                 <a:solidFill>
                   <a:srgbClr val="172B4D"/>
@@ -5708,7 +5943,7 @@
                 <a:ea typeface="Apple SD Gothic Neo"/>
                 <a:cs typeface="Apple SD Gothic Neo"/>
               </a:rPr>
-              <a:t>기존 답변의 근거를 더 자세히 확인했습니다</a:t>
+              <a:t>기존 기능에서 보완할 지점을 찾았습니다</a:t>
             </a:r>
           </a:p>
         </p:txBody>
@@ -5784,6 +6019,7 @@
               </a:defRPr>
             </a:defPPr>
             <a:lvl1pPr>
+              <a:buNone/>
               <a:defRPr sz="975" b="0">
                 <a:solidFill>
                   <a:srgbClr val="5D6D84"/>
@@ -5794,6 +6030,7 @@
               </a:defRPr>
             </a:lvl1pPr>
             <a:lvl2pPr>
+              <a:buNone/>
               <a:defRPr sz="975" b="0">
                 <a:solidFill>
                   <a:srgbClr val="5D6D84"/>
@@ -5804,6 +6041,7 @@
               </a:defRPr>
             </a:lvl2pPr>
             <a:lvl3pPr>
+              <a:buNone/>
               <a:defRPr sz="975" b="0">
                 <a:solidFill>
                   <a:srgbClr val="5D6D84"/>
@@ -5814,6 +6052,7 @@
               </a:defRPr>
             </a:lvl3pPr>
             <a:lvl4pPr>
+              <a:buNone/>
               <a:defRPr sz="975" b="0">
                 <a:solidFill>
                   <a:srgbClr val="5D6D84"/>
@@ -5824,6 +6063,7 @@
               </a:defRPr>
             </a:lvl4pPr>
             <a:lvl5pPr>
+              <a:buNone/>
               <a:defRPr sz="975" b="0">
                 <a:solidFill>
                   <a:srgbClr val="5D6D84"/>
@@ -5834,6 +6074,7 @@
               </a:defRPr>
             </a:lvl5pPr>
             <a:lvl6pPr>
+              <a:buNone/>
               <a:defRPr sz="975" b="0">
                 <a:solidFill>
                   <a:srgbClr val="5D6D84"/>
@@ -5844,6 +6085,7 @@
               </a:defRPr>
             </a:lvl6pPr>
             <a:lvl7pPr>
+              <a:buNone/>
               <a:defRPr sz="975" b="0">
                 <a:solidFill>
                   <a:srgbClr val="5D6D84"/>
@@ -5854,6 +6096,7 @@
               </a:defRPr>
             </a:lvl7pPr>
             <a:lvl8pPr>
+              <a:buNone/>
               <a:defRPr sz="975" b="0">
                 <a:solidFill>
                   <a:srgbClr val="5D6D84"/>
@@ -5864,6 +6107,7 @@
               </a:defRPr>
             </a:lvl8pPr>
             <a:lvl9pPr>
+              <a:buNone/>
               <a:defRPr sz="975" b="0">
                 <a:solidFill>
                   <a:srgbClr val="5D6D84"/>
@@ -5876,6 +6120,7 @@
           </a:lstStyle>
           <a:p xmlns:a="http://schemas.openxmlformats.org/drawingml/2006/main">
             <a:pPr>
+              <a:buNone/>
               <a:defRPr sz="975" b="0">
                 <a:solidFill>
                   <a:srgbClr val="5D6D84"/>
@@ -5940,6 +6185,7 @@
               </a:defRPr>
             </a:defPPr>
             <a:lvl1pPr>
+              <a:buNone/>
               <a:defRPr sz="1125" b="1">
                 <a:solidFill>
                   <a:srgbClr val="5D6D84"/>
@@ -5950,6 +6196,7 @@
               </a:defRPr>
             </a:lvl1pPr>
             <a:lvl2pPr>
+              <a:buNone/>
               <a:defRPr sz="1125" b="1">
                 <a:solidFill>
                   <a:srgbClr val="5D6D84"/>
@@ -5960,6 +6207,7 @@
               </a:defRPr>
             </a:lvl2pPr>
             <a:lvl3pPr>
+              <a:buNone/>
               <a:defRPr sz="1125" b="1">
                 <a:solidFill>
                   <a:srgbClr val="5D6D84"/>
@@ -5970,6 +6218,7 @@
               </a:defRPr>
             </a:lvl3pPr>
             <a:lvl4pPr>
+              <a:buNone/>
               <a:defRPr sz="1125" b="1">
                 <a:solidFill>
                   <a:srgbClr val="5D6D84"/>
@@ -5980,6 +6229,7 @@
               </a:defRPr>
             </a:lvl4pPr>
             <a:lvl5pPr>
+              <a:buNone/>
               <a:defRPr sz="1125" b="1">
                 <a:solidFill>
                   <a:srgbClr val="5D6D84"/>
@@ -5990,6 +6240,7 @@
               </a:defRPr>
             </a:lvl5pPr>
             <a:lvl6pPr>
+              <a:buNone/>
               <a:defRPr sz="1125" b="1">
                 <a:solidFill>
                   <a:srgbClr val="5D6D84"/>
@@ -6000,6 +6251,7 @@
               </a:defRPr>
             </a:lvl6pPr>
             <a:lvl7pPr>
+              <a:buNone/>
               <a:defRPr sz="1125" b="1">
                 <a:solidFill>
                   <a:srgbClr val="5D6D84"/>
@@ -6010,6 +6262,7 @@
               </a:defRPr>
             </a:lvl7pPr>
             <a:lvl8pPr>
+              <a:buNone/>
               <a:defRPr sz="1125" b="1">
                 <a:solidFill>
                   <a:srgbClr val="5D6D84"/>
@@ -6020,6 +6273,7 @@
               </a:defRPr>
             </a:lvl8pPr>
             <a:lvl9pPr>
+              <a:buNone/>
               <a:defRPr sz="1125" b="1">
                 <a:solidFill>
                   <a:srgbClr val="5D6D84"/>
@@ -6032,6 +6286,7 @@
           </a:lstStyle>
           <a:p xmlns:a="http://schemas.openxmlformats.org/drawingml/2006/main">
             <a:pPr>
+              <a:buNone/>
               <a:defRPr sz="1125" b="1">
                 <a:solidFill>
                   <a:srgbClr val="5D6D84"/>
@@ -6156,6 +6411,7 @@
               </a:defRPr>
             </a:defPPr>
             <a:lvl1pPr>
+              <a:buNone/>
               <a:defRPr sz="2100" b="1">
                 <a:solidFill>
                   <a:srgbClr val="172B4D"/>
@@ -6166,6 +6422,7 @@
               </a:defRPr>
             </a:lvl1pPr>
             <a:lvl2pPr>
+              <a:buNone/>
               <a:defRPr sz="2100" b="1">
                 <a:solidFill>
                   <a:srgbClr val="172B4D"/>
@@ -6176,6 +6433,7 @@
               </a:defRPr>
             </a:lvl2pPr>
             <a:lvl3pPr>
+              <a:buNone/>
               <a:defRPr sz="2100" b="1">
                 <a:solidFill>
                   <a:srgbClr val="172B4D"/>
@@ -6186,6 +6444,7 @@
               </a:defRPr>
             </a:lvl3pPr>
             <a:lvl4pPr>
+              <a:buNone/>
               <a:defRPr sz="2100" b="1">
                 <a:solidFill>
                   <a:srgbClr val="172B4D"/>
@@ -6196,6 +6455,7 @@
               </a:defRPr>
             </a:lvl4pPr>
             <a:lvl5pPr>
+              <a:buNone/>
               <a:defRPr sz="2100" b="1">
                 <a:solidFill>
                   <a:srgbClr val="172B4D"/>
@@ -6206,6 +6466,7 @@
               </a:defRPr>
             </a:lvl5pPr>
             <a:lvl6pPr>
+              <a:buNone/>
               <a:defRPr sz="2100" b="1">
                 <a:solidFill>
                   <a:srgbClr val="172B4D"/>
@@ -6216,6 +6477,7 @@
               </a:defRPr>
             </a:lvl6pPr>
             <a:lvl7pPr>
+              <a:buNone/>
               <a:defRPr sz="2100" b="1">
                 <a:solidFill>
                   <a:srgbClr val="172B4D"/>
@@ -6226,6 +6488,7 @@
               </a:defRPr>
             </a:lvl7pPr>
             <a:lvl8pPr>
+              <a:buNone/>
               <a:defRPr sz="2100" b="1">
                 <a:solidFill>
                   <a:srgbClr val="172B4D"/>
@@ -6236,6 +6499,7 @@
               </a:defRPr>
             </a:lvl8pPr>
             <a:lvl9pPr>
+              <a:buNone/>
               <a:defRPr sz="2100" b="1">
                 <a:solidFill>
                   <a:srgbClr val="172B4D"/>
@@ -6248,6 +6512,7 @@
           </a:lstStyle>
           <a:p xmlns:a="http://schemas.openxmlformats.org/drawingml/2006/main">
             <a:pPr>
+              <a:buNone/>
               <a:defRPr sz="2100" b="1">
                 <a:solidFill>
                   <a:srgbClr val="172B4D"/>
@@ -6312,6 +6577,7 @@
               </a:defRPr>
             </a:defPPr>
             <a:lvl1pPr>
+              <a:buNone/>
               <a:defRPr sz="1800" b="0">
                 <a:solidFill>
                   <a:srgbClr val="253650"/>
@@ -6322,6 +6588,7 @@
               </a:defRPr>
             </a:lvl1pPr>
             <a:lvl2pPr>
+              <a:buNone/>
               <a:defRPr sz="1800" b="0">
                 <a:solidFill>
                   <a:srgbClr val="253650"/>
@@ -6332,6 +6599,7 @@
               </a:defRPr>
             </a:lvl2pPr>
             <a:lvl3pPr>
+              <a:buNone/>
               <a:defRPr sz="1800" b="0">
                 <a:solidFill>
                   <a:srgbClr val="253650"/>
@@ -6342,6 +6610,7 @@
               </a:defRPr>
             </a:lvl3pPr>
             <a:lvl4pPr>
+              <a:buNone/>
               <a:defRPr sz="1800" b="0">
                 <a:solidFill>
                   <a:srgbClr val="253650"/>
@@ -6352,6 +6621,7 @@
               </a:defRPr>
             </a:lvl4pPr>
             <a:lvl5pPr>
+              <a:buNone/>
               <a:defRPr sz="1800" b="0">
                 <a:solidFill>
                   <a:srgbClr val="253650"/>
@@ -6362,6 +6632,7 @@
               </a:defRPr>
             </a:lvl5pPr>
             <a:lvl6pPr>
+              <a:buNone/>
               <a:defRPr sz="1800" b="0">
                 <a:solidFill>
                   <a:srgbClr val="253650"/>
@@ -6372,6 +6643,7 @@
               </a:defRPr>
             </a:lvl6pPr>
             <a:lvl7pPr>
+              <a:buNone/>
               <a:defRPr sz="1800" b="0">
                 <a:solidFill>
                   <a:srgbClr val="253650"/>
@@ -6382,6 +6654,7 @@
               </a:defRPr>
             </a:lvl7pPr>
             <a:lvl8pPr>
+              <a:buNone/>
               <a:defRPr sz="1800" b="0">
                 <a:solidFill>
                   <a:srgbClr val="253650"/>
@@ -6392,6 +6665,7 @@
               </a:defRPr>
             </a:lvl8pPr>
             <a:lvl9pPr>
+              <a:buNone/>
               <a:defRPr sz="1800" b="0">
                 <a:solidFill>
                   <a:srgbClr val="253650"/>
@@ -6404,6 +6678,7 @@
           </a:lstStyle>
           <a:p xmlns:a="http://schemas.openxmlformats.org/drawingml/2006/main">
             <a:pPr>
+              <a:buNone/>
               <a:defRPr sz="1800" b="0">
                 <a:solidFill>
                   <a:srgbClr val="253650"/>
@@ -6422,11 +6697,12 @@
                 <a:ea typeface="Apple SD Gothic Neo"/>
                 <a:cs typeface="Apple SD Gothic Neo"/>
               </a:rPr>
-              <a:t>모델 계획에 의존했습니다.</a:t>
+              <a:t>복수 서비스 계획은 가능했습니다.</a:t>
             </a:r>
           </a:p>
           <a:p xmlns:a="http://schemas.openxmlformats.org/drawingml/2006/main">
             <a:pPr>
+              <a:buNone/>
               <a:defRPr sz="1800" b="0">
                 <a:solidFill>
                   <a:srgbClr val="253650"/>
@@ -6445,7 +6721,7 @@
                 <a:ea typeface="Apple SD Gothic Neo"/>
                 <a:cs typeface="Apple SD Gothic Neo"/>
               </a:rPr>
-              <a:t>요청 범위와 실제 조회 목록을 대조할 필요가 있었습니다.</a:t>
+              <a:t>일부만 계획되면 나머지 대상을 강제로 보완하지 않았습니다.</a:t>
             </a:r>
           </a:p>
         </p:txBody>
@@ -6551,6 +6827,7 @@
               </a:defRPr>
             </a:defPPr>
             <a:lvl1pPr>
+              <a:buNone/>
               <a:defRPr sz="2100" b="1">
                 <a:solidFill>
                   <a:srgbClr val="172B4D"/>
@@ -6561,6 +6838,7 @@
               </a:defRPr>
             </a:lvl1pPr>
             <a:lvl2pPr>
+              <a:buNone/>
               <a:defRPr sz="2100" b="1">
                 <a:solidFill>
                   <a:srgbClr val="172B4D"/>
@@ -6571,6 +6849,7 @@
               </a:defRPr>
             </a:lvl2pPr>
             <a:lvl3pPr>
+              <a:buNone/>
               <a:defRPr sz="2100" b="1">
                 <a:solidFill>
                   <a:srgbClr val="172B4D"/>
@@ -6581,6 +6860,7 @@
               </a:defRPr>
             </a:lvl3pPr>
             <a:lvl4pPr>
+              <a:buNone/>
               <a:defRPr sz="2100" b="1">
                 <a:solidFill>
                   <a:srgbClr val="172B4D"/>
@@ -6591,6 +6871,7 @@
               </a:defRPr>
             </a:lvl4pPr>
             <a:lvl5pPr>
+              <a:buNone/>
               <a:defRPr sz="2100" b="1">
                 <a:solidFill>
                   <a:srgbClr val="172B4D"/>
@@ -6601,6 +6882,7 @@
               </a:defRPr>
             </a:lvl5pPr>
             <a:lvl6pPr>
+              <a:buNone/>
               <a:defRPr sz="2100" b="1">
                 <a:solidFill>
                   <a:srgbClr val="172B4D"/>
@@ -6611,6 +6893,7 @@
               </a:defRPr>
             </a:lvl6pPr>
             <a:lvl7pPr>
+              <a:buNone/>
               <a:defRPr sz="2100" b="1">
                 <a:solidFill>
                   <a:srgbClr val="172B4D"/>
@@ -6621,6 +6904,7 @@
               </a:defRPr>
             </a:lvl7pPr>
             <a:lvl8pPr>
+              <a:buNone/>
               <a:defRPr sz="2100" b="1">
                 <a:solidFill>
                   <a:srgbClr val="172B4D"/>
@@ -6631,6 +6915,7 @@
               </a:defRPr>
             </a:lvl8pPr>
             <a:lvl9pPr>
+              <a:buNone/>
               <a:defRPr sz="2100" b="1">
                 <a:solidFill>
                   <a:srgbClr val="172B4D"/>
@@ -6643,6 +6928,7 @@
           </a:lstStyle>
           <a:p xmlns:a="http://schemas.openxmlformats.org/drawingml/2006/main">
             <a:pPr>
+              <a:buNone/>
               <a:defRPr sz="2100" b="1">
                 <a:solidFill>
                   <a:srgbClr val="172B4D"/>
@@ -6707,6 +6993,7 @@
               </a:defRPr>
             </a:defPPr>
             <a:lvl1pPr>
+              <a:buNone/>
               <a:defRPr sz="1800" b="0">
                 <a:solidFill>
                   <a:srgbClr val="253650"/>
@@ -6717,6 +7004,7 @@
               </a:defRPr>
             </a:lvl1pPr>
             <a:lvl2pPr>
+              <a:buNone/>
               <a:defRPr sz="1800" b="0">
                 <a:solidFill>
                   <a:srgbClr val="253650"/>
@@ -6727,6 +7015,7 @@
               </a:defRPr>
             </a:lvl2pPr>
             <a:lvl3pPr>
+              <a:buNone/>
               <a:defRPr sz="1800" b="0">
                 <a:solidFill>
                   <a:srgbClr val="253650"/>
@@ -6737,6 +7026,7 @@
               </a:defRPr>
             </a:lvl3pPr>
             <a:lvl4pPr>
+              <a:buNone/>
               <a:defRPr sz="1800" b="0">
                 <a:solidFill>
                   <a:srgbClr val="253650"/>
@@ -6747,6 +7037,7 @@
               </a:defRPr>
             </a:lvl4pPr>
             <a:lvl5pPr>
+              <a:buNone/>
               <a:defRPr sz="1800" b="0">
                 <a:solidFill>
                   <a:srgbClr val="253650"/>
@@ -6757,6 +7048,7 @@
               </a:defRPr>
             </a:lvl5pPr>
             <a:lvl6pPr>
+              <a:buNone/>
               <a:defRPr sz="1800" b="0">
                 <a:solidFill>
                   <a:srgbClr val="253650"/>
@@ -6767,6 +7059,7 @@
               </a:defRPr>
             </a:lvl6pPr>
             <a:lvl7pPr>
+              <a:buNone/>
               <a:defRPr sz="1800" b="0">
                 <a:solidFill>
                   <a:srgbClr val="253650"/>
@@ -6777,6 +7070,7 @@
               </a:defRPr>
             </a:lvl7pPr>
             <a:lvl8pPr>
+              <a:buNone/>
               <a:defRPr sz="1800" b="0">
                 <a:solidFill>
                   <a:srgbClr val="253650"/>
@@ -6787,6 +7081,7 @@
               </a:defRPr>
             </a:lvl8pPr>
             <a:lvl9pPr>
+              <a:buNone/>
               <a:defRPr sz="1800" b="0">
                 <a:solidFill>
                   <a:srgbClr val="253650"/>
@@ -6799,6 +7094,7 @@
           </a:lstStyle>
           <a:p xmlns:a="http://schemas.openxmlformats.org/drawingml/2006/main">
             <a:pPr>
+              <a:buNone/>
               <a:defRPr sz="1800" b="0">
                 <a:solidFill>
                   <a:srgbClr val="253650"/>
@@ -6822,6 +7118,7 @@
           </a:p>
           <a:p xmlns:a="http://schemas.openxmlformats.org/drawingml/2006/main">
             <a:pPr>
+              <a:buNone/>
               <a:defRPr sz="1800" b="0">
                 <a:solidFill>
                   <a:srgbClr val="253650"/>
@@ -6946,6 +7243,7 @@
               </a:defRPr>
             </a:defPPr>
             <a:lvl1pPr>
+              <a:buNone/>
               <a:defRPr sz="2100" b="1">
                 <a:solidFill>
                   <a:srgbClr val="172B4D"/>
@@ -6956,6 +7254,7 @@
               </a:defRPr>
             </a:lvl1pPr>
             <a:lvl2pPr>
+              <a:buNone/>
               <a:defRPr sz="2100" b="1">
                 <a:solidFill>
                   <a:srgbClr val="172B4D"/>
@@ -6966,6 +7265,7 @@
               </a:defRPr>
             </a:lvl2pPr>
             <a:lvl3pPr>
+              <a:buNone/>
               <a:defRPr sz="2100" b="1">
                 <a:solidFill>
                   <a:srgbClr val="172B4D"/>
@@ -6976,6 +7276,7 @@
               </a:defRPr>
             </a:lvl3pPr>
             <a:lvl4pPr>
+              <a:buNone/>
               <a:defRPr sz="2100" b="1">
                 <a:solidFill>
                   <a:srgbClr val="172B4D"/>
@@ -6986,6 +7287,7 @@
               </a:defRPr>
             </a:lvl4pPr>
             <a:lvl5pPr>
+              <a:buNone/>
               <a:defRPr sz="2100" b="1">
                 <a:solidFill>
                   <a:srgbClr val="172B4D"/>
@@ -6996,6 +7298,7 @@
               </a:defRPr>
             </a:lvl5pPr>
             <a:lvl6pPr>
+              <a:buNone/>
               <a:defRPr sz="2100" b="1">
                 <a:solidFill>
                   <a:srgbClr val="172B4D"/>
@@ -7006,6 +7309,7 @@
               </a:defRPr>
             </a:lvl6pPr>
             <a:lvl7pPr>
+              <a:buNone/>
               <a:defRPr sz="2100" b="1">
                 <a:solidFill>
                   <a:srgbClr val="172B4D"/>
@@ -7016,6 +7320,7 @@
               </a:defRPr>
             </a:lvl7pPr>
             <a:lvl8pPr>
+              <a:buNone/>
               <a:defRPr sz="2100" b="1">
                 <a:solidFill>
                   <a:srgbClr val="172B4D"/>
@@ -7026,6 +7331,7 @@
               </a:defRPr>
             </a:lvl8pPr>
             <a:lvl9pPr>
+              <a:buNone/>
               <a:defRPr sz="2100" b="1">
                 <a:solidFill>
                   <a:srgbClr val="172B4D"/>
@@ -7038,6 +7344,7 @@
           </a:lstStyle>
           <a:p xmlns:a="http://schemas.openxmlformats.org/drawingml/2006/main">
             <a:pPr>
+              <a:buNone/>
               <a:defRPr sz="2100" b="1">
                 <a:solidFill>
                   <a:srgbClr val="172B4D"/>
@@ -7102,6 +7409,7 @@
               </a:defRPr>
             </a:defPPr>
             <a:lvl1pPr>
+              <a:buNone/>
               <a:defRPr sz="1800" b="0">
                 <a:solidFill>
                   <a:srgbClr val="253650"/>
@@ -7112,6 +7420,7 @@
               </a:defRPr>
             </a:lvl1pPr>
             <a:lvl2pPr>
+              <a:buNone/>
               <a:defRPr sz="1800" b="0">
                 <a:solidFill>
                   <a:srgbClr val="253650"/>
@@ -7122,6 +7431,7 @@
               </a:defRPr>
             </a:lvl2pPr>
             <a:lvl3pPr>
+              <a:buNone/>
               <a:defRPr sz="1800" b="0">
                 <a:solidFill>
                   <a:srgbClr val="253650"/>
@@ -7132,6 +7442,7 @@
               </a:defRPr>
             </a:lvl3pPr>
             <a:lvl4pPr>
+              <a:buNone/>
               <a:defRPr sz="1800" b="0">
                 <a:solidFill>
                   <a:srgbClr val="253650"/>
@@ -7142,6 +7453,7 @@
               </a:defRPr>
             </a:lvl4pPr>
             <a:lvl5pPr>
+              <a:buNone/>
               <a:defRPr sz="1800" b="0">
                 <a:solidFill>
                   <a:srgbClr val="253650"/>
@@ -7152,6 +7464,7 @@
               </a:defRPr>
             </a:lvl5pPr>
             <a:lvl6pPr>
+              <a:buNone/>
               <a:defRPr sz="1800" b="0">
                 <a:solidFill>
                   <a:srgbClr val="253650"/>
@@ -7162,6 +7475,7 @@
               </a:defRPr>
             </a:lvl6pPr>
             <a:lvl7pPr>
+              <a:buNone/>
               <a:defRPr sz="1800" b="0">
                 <a:solidFill>
                   <a:srgbClr val="253650"/>
@@ -7172,6 +7486,7 @@
               </a:defRPr>
             </a:lvl7pPr>
             <a:lvl8pPr>
+              <a:buNone/>
               <a:defRPr sz="1800" b="0">
                 <a:solidFill>
                   <a:srgbClr val="253650"/>
@@ -7182,6 +7497,7 @@
               </a:defRPr>
             </a:lvl8pPr>
             <a:lvl9pPr>
+              <a:buNone/>
               <a:defRPr sz="1800" b="0">
                 <a:solidFill>
                   <a:srgbClr val="253650"/>
@@ -7194,6 +7510,7 @@
           </a:lstStyle>
           <a:p xmlns:a="http://schemas.openxmlformats.org/drawingml/2006/main">
             <a:pPr>
+              <a:buNone/>
               <a:defRPr sz="1800" b="0">
                 <a:solidFill>
                   <a:srgbClr val="253650"/>
@@ -7217,6 +7534,7 @@
           </a:p>
           <a:p xmlns:a="http://schemas.openxmlformats.org/drawingml/2006/main">
             <a:pPr>
+              <a:buNone/>
               <a:defRPr sz="1800" b="0">
                 <a:solidFill>
                   <a:srgbClr val="253650"/>
@@ -7340,6 +7658,7 @@
               </a:defRPr>
             </a:defPPr>
             <a:lvl1pPr>
+              <a:buNone/>
               <a:defRPr sz="1275" b="1">
                 <a:solidFill>
                   <a:srgbClr val="235ECB"/>
@@ -7350,6 +7669,7 @@
               </a:defRPr>
             </a:lvl1pPr>
             <a:lvl2pPr>
+              <a:buNone/>
               <a:defRPr sz="1275" b="1">
                 <a:solidFill>
                   <a:srgbClr val="235ECB"/>
@@ -7360,6 +7680,7 @@
               </a:defRPr>
             </a:lvl2pPr>
             <a:lvl3pPr>
+              <a:buNone/>
               <a:defRPr sz="1275" b="1">
                 <a:solidFill>
                   <a:srgbClr val="235ECB"/>
@@ -7370,6 +7691,7 @@
               </a:defRPr>
             </a:lvl3pPr>
             <a:lvl4pPr>
+              <a:buNone/>
               <a:defRPr sz="1275" b="1">
                 <a:solidFill>
                   <a:srgbClr val="235ECB"/>
@@ -7380,6 +7702,7 @@
               </a:defRPr>
             </a:lvl4pPr>
             <a:lvl5pPr>
+              <a:buNone/>
               <a:defRPr sz="1275" b="1">
                 <a:solidFill>
                   <a:srgbClr val="235ECB"/>
@@ -7390,6 +7713,7 @@
               </a:defRPr>
             </a:lvl5pPr>
             <a:lvl6pPr>
+              <a:buNone/>
               <a:defRPr sz="1275" b="1">
                 <a:solidFill>
                   <a:srgbClr val="235ECB"/>
@@ -7400,6 +7724,7 @@
               </a:defRPr>
             </a:lvl6pPr>
             <a:lvl7pPr>
+              <a:buNone/>
               <a:defRPr sz="1275" b="1">
                 <a:solidFill>
                   <a:srgbClr val="235ECB"/>
@@ -7410,6 +7735,7 @@
               </a:defRPr>
             </a:lvl7pPr>
             <a:lvl8pPr>
+              <a:buNone/>
               <a:defRPr sz="1275" b="1">
                 <a:solidFill>
                   <a:srgbClr val="235ECB"/>
@@ -7420,6 +7746,7 @@
               </a:defRPr>
             </a:lvl8pPr>
             <a:lvl9pPr>
+              <a:buNone/>
               <a:defRPr sz="1275" b="1">
                 <a:solidFill>
                   <a:srgbClr val="235ECB"/>
@@ -7432,6 +7759,7 @@
           </a:lstStyle>
           <a:p xmlns:a="http://schemas.openxmlformats.org/drawingml/2006/main">
             <a:pPr>
+              <a:buNone/>
               <a:defRPr sz="1275" b="1">
                 <a:solidFill>
                   <a:srgbClr val="235ECB"/>
@@ -7496,6 +7824,7 @@
               </a:defRPr>
             </a:defPPr>
             <a:lvl1pPr>
+              <a:buNone/>
               <a:defRPr sz="2850" b="1">
                 <a:solidFill>
                   <a:srgbClr val="172B4D"/>
@@ -7506,6 +7835,7 @@
               </a:defRPr>
             </a:lvl1pPr>
             <a:lvl2pPr>
+              <a:buNone/>
               <a:defRPr sz="2850" b="1">
                 <a:solidFill>
                   <a:srgbClr val="172B4D"/>
@@ -7516,6 +7846,7 @@
               </a:defRPr>
             </a:lvl2pPr>
             <a:lvl3pPr>
+              <a:buNone/>
               <a:defRPr sz="2850" b="1">
                 <a:solidFill>
                   <a:srgbClr val="172B4D"/>
@@ -7526,6 +7857,7 @@
               </a:defRPr>
             </a:lvl3pPr>
             <a:lvl4pPr>
+              <a:buNone/>
               <a:defRPr sz="2850" b="1">
                 <a:solidFill>
                   <a:srgbClr val="172B4D"/>
@@ -7536,6 +7868,7 @@
               </a:defRPr>
             </a:lvl4pPr>
             <a:lvl5pPr>
+              <a:buNone/>
               <a:defRPr sz="2850" b="1">
                 <a:solidFill>
                   <a:srgbClr val="172B4D"/>
@@ -7546,6 +7879,7 @@
               </a:defRPr>
             </a:lvl5pPr>
             <a:lvl6pPr>
+              <a:buNone/>
               <a:defRPr sz="2850" b="1">
                 <a:solidFill>
                   <a:srgbClr val="172B4D"/>
@@ -7556,6 +7890,7 @@
               </a:defRPr>
             </a:lvl6pPr>
             <a:lvl7pPr>
+              <a:buNone/>
               <a:defRPr sz="2850" b="1">
                 <a:solidFill>
                   <a:srgbClr val="172B4D"/>
@@ -7566,6 +7901,7 @@
               </a:defRPr>
             </a:lvl7pPr>
             <a:lvl8pPr>
+              <a:buNone/>
               <a:defRPr sz="2850" b="1">
                 <a:solidFill>
                   <a:srgbClr val="172B4D"/>
@@ -7576,6 +7912,7 @@
               </a:defRPr>
             </a:lvl8pPr>
             <a:lvl9pPr>
+              <a:buNone/>
               <a:defRPr sz="2850" b="1">
                 <a:solidFill>
                   <a:srgbClr val="172B4D"/>
@@ -7588,6 +7925,7 @@
           </a:lstStyle>
           <a:p xmlns:a="http://schemas.openxmlformats.org/drawingml/2006/main">
             <a:pPr>
+              <a:buNone/>
               <a:defRPr sz="2850" b="1">
                 <a:solidFill>
                   <a:srgbClr val="172B4D"/>
@@ -7606,7 +7944,7 @@
                 <a:ea typeface="Apple SD Gothic Neo"/>
                 <a:cs typeface="Apple SD Gothic Neo"/>
               </a:rPr>
-              <a:t>기존 흐름에 대상 연결·검색·검수를 보완했습니다</a:t>
+              <a:t>기존 기반을 유지하고 검사 단계를 강화했습니다</a:t>
             </a:r>
           </a:p>
         </p:txBody>
@@ -7682,6 +8020,7 @@
               </a:defRPr>
             </a:defPPr>
             <a:lvl1pPr>
+              <a:buNone/>
               <a:defRPr sz="975" b="0">
                 <a:solidFill>
                   <a:srgbClr val="5D6D84"/>
@@ -7692,6 +8031,7 @@
               </a:defRPr>
             </a:lvl1pPr>
             <a:lvl2pPr>
+              <a:buNone/>
               <a:defRPr sz="975" b="0">
                 <a:solidFill>
                   <a:srgbClr val="5D6D84"/>
@@ -7702,6 +8042,7 @@
               </a:defRPr>
             </a:lvl2pPr>
             <a:lvl3pPr>
+              <a:buNone/>
               <a:defRPr sz="975" b="0">
                 <a:solidFill>
                   <a:srgbClr val="5D6D84"/>
@@ -7712,6 +8053,7 @@
               </a:defRPr>
             </a:lvl3pPr>
             <a:lvl4pPr>
+              <a:buNone/>
               <a:defRPr sz="975" b="0">
                 <a:solidFill>
                   <a:srgbClr val="5D6D84"/>
@@ -7722,6 +8064,7 @@
               </a:defRPr>
             </a:lvl4pPr>
             <a:lvl5pPr>
+              <a:buNone/>
               <a:defRPr sz="975" b="0">
                 <a:solidFill>
                   <a:srgbClr val="5D6D84"/>
@@ -7732,6 +8075,7 @@
               </a:defRPr>
             </a:lvl5pPr>
             <a:lvl6pPr>
+              <a:buNone/>
               <a:defRPr sz="975" b="0">
                 <a:solidFill>
                   <a:srgbClr val="5D6D84"/>
@@ -7742,6 +8086,7 @@
               </a:defRPr>
             </a:lvl6pPr>
             <a:lvl7pPr>
+              <a:buNone/>
               <a:defRPr sz="975" b="0">
                 <a:solidFill>
                   <a:srgbClr val="5D6D84"/>
@@ -7752,6 +8097,7 @@
               </a:defRPr>
             </a:lvl7pPr>
             <a:lvl8pPr>
+              <a:buNone/>
               <a:defRPr sz="975" b="0">
                 <a:solidFill>
                   <a:srgbClr val="5D6D84"/>
@@ -7762,6 +8108,7 @@
               </a:defRPr>
             </a:lvl8pPr>
             <a:lvl9pPr>
+              <a:buNone/>
               <a:defRPr sz="975" b="0">
                 <a:solidFill>
                   <a:srgbClr val="5D6D84"/>
@@ -7774,6 +8121,7 @@
           </a:lstStyle>
           <a:p xmlns:a="http://schemas.openxmlformats.org/drawingml/2006/main">
             <a:pPr>
+              <a:buNone/>
               <a:defRPr sz="975" b="0">
                 <a:solidFill>
                   <a:srgbClr val="5D6D84"/>
@@ -7838,6 +8186,7 @@
               </a:defRPr>
             </a:defPPr>
             <a:lvl1pPr>
+              <a:buNone/>
               <a:defRPr sz="1125" b="1">
                 <a:solidFill>
                   <a:srgbClr val="5D6D84"/>
@@ -7848,6 +8197,7 @@
               </a:defRPr>
             </a:lvl1pPr>
             <a:lvl2pPr>
+              <a:buNone/>
               <a:defRPr sz="1125" b="1">
                 <a:solidFill>
                   <a:srgbClr val="5D6D84"/>
@@ -7858,6 +8208,7 @@
               </a:defRPr>
             </a:lvl2pPr>
             <a:lvl3pPr>
+              <a:buNone/>
               <a:defRPr sz="1125" b="1">
                 <a:solidFill>
                   <a:srgbClr val="5D6D84"/>
@@ -7868,6 +8219,7 @@
               </a:defRPr>
             </a:lvl3pPr>
             <a:lvl4pPr>
+              <a:buNone/>
               <a:defRPr sz="1125" b="1">
                 <a:solidFill>
                   <a:srgbClr val="5D6D84"/>
@@ -7878,6 +8230,7 @@
               </a:defRPr>
             </a:lvl4pPr>
             <a:lvl5pPr>
+              <a:buNone/>
               <a:defRPr sz="1125" b="1">
                 <a:solidFill>
                   <a:srgbClr val="5D6D84"/>
@@ -7888,6 +8241,7 @@
               </a:defRPr>
             </a:lvl5pPr>
             <a:lvl6pPr>
+              <a:buNone/>
               <a:defRPr sz="1125" b="1">
                 <a:solidFill>
                   <a:srgbClr val="5D6D84"/>
@@ -7898,6 +8252,7 @@
               </a:defRPr>
             </a:lvl6pPr>
             <a:lvl7pPr>
+              <a:buNone/>
               <a:defRPr sz="1125" b="1">
                 <a:solidFill>
                   <a:srgbClr val="5D6D84"/>
@@ -7908,6 +8263,7 @@
               </a:defRPr>
             </a:lvl7pPr>
             <a:lvl8pPr>
+              <a:buNone/>
               <a:defRPr sz="1125" b="1">
                 <a:solidFill>
                   <a:srgbClr val="5D6D84"/>
@@ -7918,6 +8274,7 @@
               </a:defRPr>
             </a:lvl8pPr>
             <a:lvl9pPr>
+              <a:buNone/>
               <a:defRPr sz="1125" b="1">
                 <a:solidFill>
                   <a:srgbClr val="5D6D84"/>
@@ -7930,6 +8287,7 @@
           </a:lstStyle>
           <a:p xmlns:a="http://schemas.openxmlformats.org/drawingml/2006/main">
             <a:pPr>
+              <a:buNone/>
               <a:defRPr sz="1125" b="1">
                 <a:solidFill>
                   <a:srgbClr val="5D6D84"/>
@@ -8024,6 +8382,7 @@
               </a:defRPr>
             </a:defPPr>
             <a:lvl1pPr>
+              <a:buNone/>
               <a:defRPr sz="2100" b="1">
                 <a:solidFill>
                   <a:srgbClr val="235ECB"/>
@@ -8034,6 +8393,7 @@
               </a:defRPr>
             </a:lvl1pPr>
             <a:lvl2pPr>
+              <a:buNone/>
               <a:defRPr sz="2100" b="1">
                 <a:solidFill>
                   <a:srgbClr val="235ECB"/>
@@ -8044,6 +8404,7 @@
               </a:defRPr>
             </a:lvl2pPr>
             <a:lvl3pPr>
+              <a:buNone/>
               <a:defRPr sz="2100" b="1">
                 <a:solidFill>
                   <a:srgbClr val="235ECB"/>
@@ -8054,6 +8415,7 @@
               </a:defRPr>
             </a:lvl3pPr>
             <a:lvl4pPr>
+              <a:buNone/>
               <a:defRPr sz="2100" b="1">
                 <a:solidFill>
                   <a:srgbClr val="235ECB"/>
@@ -8064,6 +8426,7 @@
               </a:defRPr>
             </a:lvl4pPr>
             <a:lvl5pPr>
+              <a:buNone/>
               <a:defRPr sz="2100" b="1">
                 <a:solidFill>
                   <a:srgbClr val="235ECB"/>
@@ -8074,6 +8437,7 @@
               </a:defRPr>
             </a:lvl5pPr>
             <a:lvl6pPr>
+              <a:buNone/>
               <a:defRPr sz="2100" b="1">
                 <a:solidFill>
                   <a:srgbClr val="235ECB"/>
@@ -8084,6 +8448,7 @@
               </a:defRPr>
             </a:lvl6pPr>
             <a:lvl7pPr>
+              <a:buNone/>
               <a:defRPr sz="2100" b="1">
                 <a:solidFill>
                   <a:srgbClr val="235ECB"/>
@@ -8094,6 +8459,7 @@
               </a:defRPr>
             </a:lvl7pPr>
             <a:lvl8pPr>
+              <a:buNone/>
               <a:defRPr sz="2100" b="1">
                 <a:solidFill>
                   <a:srgbClr val="235ECB"/>
@@ -8104,6 +8470,7 @@
               </a:defRPr>
             </a:lvl8pPr>
             <a:lvl9pPr>
+              <a:buNone/>
               <a:defRPr sz="2100" b="1">
                 <a:solidFill>
                   <a:srgbClr val="235ECB"/>
@@ -8116,6 +8483,7 @@
           </a:lstStyle>
           <a:p xmlns:a="http://schemas.openxmlformats.org/drawingml/2006/main">
             <a:pPr>
+              <a:buNone/>
               <a:defRPr sz="2100" b="1">
                 <a:solidFill>
                   <a:srgbClr val="235ECB"/>
@@ -8180,6 +8548,7 @@
               </a:defRPr>
             </a:defPPr>
             <a:lvl1pPr>
+              <a:buNone/>
               <a:defRPr sz="1875" b="1">
                 <a:solidFill>
                   <a:srgbClr val="172B4D"/>
@@ -8190,6 +8559,7 @@
               </a:defRPr>
             </a:lvl1pPr>
             <a:lvl2pPr>
+              <a:buNone/>
               <a:defRPr sz="1875" b="1">
                 <a:solidFill>
                   <a:srgbClr val="172B4D"/>
@@ -8200,6 +8570,7 @@
               </a:defRPr>
             </a:lvl2pPr>
             <a:lvl3pPr>
+              <a:buNone/>
               <a:defRPr sz="1875" b="1">
                 <a:solidFill>
                   <a:srgbClr val="172B4D"/>
@@ -8210,6 +8581,7 @@
               </a:defRPr>
             </a:lvl3pPr>
             <a:lvl4pPr>
+              <a:buNone/>
               <a:defRPr sz="1875" b="1">
                 <a:solidFill>
                   <a:srgbClr val="172B4D"/>
@@ -8220,6 +8592,7 @@
               </a:defRPr>
             </a:lvl4pPr>
             <a:lvl5pPr>
+              <a:buNone/>
               <a:defRPr sz="1875" b="1">
                 <a:solidFill>
                   <a:srgbClr val="172B4D"/>
@@ -8230,6 +8603,7 @@
               </a:defRPr>
             </a:lvl5pPr>
             <a:lvl6pPr>
+              <a:buNone/>
               <a:defRPr sz="1875" b="1">
                 <a:solidFill>
                   <a:srgbClr val="172B4D"/>
@@ -8240,6 +8614,7 @@
               </a:defRPr>
             </a:lvl6pPr>
             <a:lvl7pPr>
+              <a:buNone/>
               <a:defRPr sz="1875" b="1">
                 <a:solidFill>
                   <a:srgbClr val="172B4D"/>
@@ -8250,6 +8625,7 @@
               </a:defRPr>
             </a:lvl7pPr>
             <a:lvl8pPr>
+              <a:buNone/>
               <a:defRPr sz="1875" b="1">
                 <a:solidFill>
                   <a:srgbClr val="172B4D"/>
@@ -8260,6 +8636,7 @@
               </a:defRPr>
             </a:lvl8pPr>
             <a:lvl9pPr>
+              <a:buNone/>
               <a:defRPr sz="1875" b="1">
                 <a:solidFill>
                   <a:srgbClr val="172B4D"/>
@@ -8272,6 +8649,7 @@
           </a:lstStyle>
           <a:p xmlns:a="http://schemas.openxmlformats.org/drawingml/2006/main">
             <a:pPr>
+              <a:buNone/>
               <a:defRPr sz="1875" b="1">
                 <a:solidFill>
                   <a:srgbClr val="172B4D"/>
@@ -8336,6 +8714,7 @@
               </a:defRPr>
             </a:defPPr>
             <a:lvl1pPr>
+              <a:buNone/>
               <a:defRPr sz="1425" b="0">
                 <a:solidFill>
                   <a:srgbClr val="5D6D84"/>
@@ -8346,6 +8725,7 @@
               </a:defRPr>
             </a:lvl1pPr>
             <a:lvl2pPr>
+              <a:buNone/>
               <a:defRPr sz="1425" b="0">
                 <a:solidFill>
                   <a:srgbClr val="5D6D84"/>
@@ -8356,6 +8736,7 @@
               </a:defRPr>
             </a:lvl2pPr>
             <a:lvl3pPr>
+              <a:buNone/>
               <a:defRPr sz="1425" b="0">
                 <a:solidFill>
                   <a:srgbClr val="5D6D84"/>
@@ -8366,6 +8747,7 @@
               </a:defRPr>
             </a:lvl3pPr>
             <a:lvl4pPr>
+              <a:buNone/>
               <a:defRPr sz="1425" b="0">
                 <a:solidFill>
                   <a:srgbClr val="5D6D84"/>
@@ -8376,6 +8758,7 @@
               </a:defRPr>
             </a:lvl4pPr>
             <a:lvl5pPr>
+              <a:buNone/>
               <a:defRPr sz="1425" b="0">
                 <a:solidFill>
                   <a:srgbClr val="5D6D84"/>
@@ -8386,6 +8769,7 @@
               </a:defRPr>
             </a:lvl5pPr>
             <a:lvl6pPr>
+              <a:buNone/>
               <a:defRPr sz="1425" b="0">
                 <a:solidFill>
                   <a:srgbClr val="5D6D84"/>
@@ -8396,6 +8780,7 @@
               </a:defRPr>
             </a:lvl6pPr>
             <a:lvl7pPr>
+              <a:buNone/>
               <a:defRPr sz="1425" b="0">
                 <a:solidFill>
                   <a:srgbClr val="5D6D84"/>
@@ -8406,6 +8791,7 @@
               </a:defRPr>
             </a:lvl7pPr>
             <a:lvl8pPr>
+              <a:buNone/>
               <a:defRPr sz="1425" b="0">
                 <a:solidFill>
                   <a:srgbClr val="5D6D84"/>
@@ -8416,6 +8802,7 @@
               </a:defRPr>
             </a:lvl8pPr>
             <a:lvl9pPr>
+              <a:buNone/>
               <a:defRPr sz="1425" b="0">
                 <a:solidFill>
                   <a:srgbClr val="5D6D84"/>
@@ -8428,6 +8815,7 @@
           </a:lstStyle>
           <a:p xmlns:a="http://schemas.openxmlformats.org/drawingml/2006/main">
             <a:pPr>
+              <a:buNone/>
               <a:defRPr sz="1425" b="0">
                 <a:solidFill>
                   <a:srgbClr val="5D6D84"/>
@@ -8522,6 +8910,7 @@
               </a:defRPr>
             </a:defPPr>
             <a:lvl1pPr>
+              <a:buNone/>
               <a:defRPr sz="2100" b="1">
                 <a:solidFill>
                   <a:srgbClr val="235ECB"/>
@@ -8532,6 +8921,7 @@
               </a:defRPr>
             </a:lvl1pPr>
             <a:lvl2pPr>
+              <a:buNone/>
               <a:defRPr sz="2100" b="1">
                 <a:solidFill>
                   <a:srgbClr val="235ECB"/>
@@ -8542,6 +8932,7 @@
               </a:defRPr>
             </a:lvl2pPr>
             <a:lvl3pPr>
+              <a:buNone/>
               <a:defRPr sz="2100" b="1">
                 <a:solidFill>
                   <a:srgbClr val="235ECB"/>
@@ -8552,6 +8943,7 @@
               </a:defRPr>
             </a:lvl3pPr>
             <a:lvl4pPr>
+              <a:buNone/>
               <a:defRPr sz="2100" b="1">
                 <a:solidFill>
                   <a:srgbClr val="235ECB"/>
@@ -8562,6 +8954,7 @@
               </a:defRPr>
             </a:lvl4pPr>
             <a:lvl5pPr>
+              <a:buNone/>
               <a:defRPr sz="2100" b="1">
                 <a:solidFill>
                   <a:srgbClr val="235ECB"/>
@@ -8572,6 +8965,7 @@
               </a:defRPr>
             </a:lvl5pPr>
             <a:lvl6pPr>
+              <a:buNone/>
               <a:defRPr sz="2100" b="1">
                 <a:solidFill>
                   <a:srgbClr val="235ECB"/>
@@ -8582,6 +8976,7 @@
               </a:defRPr>
             </a:lvl6pPr>
             <a:lvl7pPr>
+              <a:buNone/>
               <a:defRPr sz="2100" b="1">
                 <a:solidFill>
                   <a:srgbClr val="235ECB"/>
@@ -8592,6 +8987,7 @@
               </a:defRPr>
             </a:lvl7pPr>
             <a:lvl8pPr>
+              <a:buNone/>
               <a:defRPr sz="2100" b="1">
                 <a:solidFill>
                   <a:srgbClr val="235ECB"/>
@@ -8602,6 +8998,7 @@
               </a:defRPr>
             </a:lvl8pPr>
             <a:lvl9pPr>
+              <a:buNone/>
               <a:defRPr sz="2100" b="1">
                 <a:solidFill>
                   <a:srgbClr val="235ECB"/>
@@ -8614,6 +9011,7 @@
           </a:lstStyle>
           <a:p xmlns:a="http://schemas.openxmlformats.org/drawingml/2006/main">
             <a:pPr>
+              <a:buNone/>
               <a:defRPr sz="2100" b="1">
                 <a:solidFill>
                   <a:srgbClr val="235ECB"/>
@@ -8678,6 +9076,7 @@
               </a:defRPr>
             </a:defPPr>
             <a:lvl1pPr>
+              <a:buNone/>
               <a:defRPr sz="1875" b="1">
                 <a:solidFill>
                   <a:srgbClr val="172B4D"/>
@@ -8688,6 +9087,7 @@
               </a:defRPr>
             </a:lvl1pPr>
             <a:lvl2pPr>
+              <a:buNone/>
               <a:defRPr sz="1875" b="1">
                 <a:solidFill>
                   <a:srgbClr val="172B4D"/>
@@ -8698,6 +9098,7 @@
               </a:defRPr>
             </a:lvl2pPr>
             <a:lvl3pPr>
+              <a:buNone/>
               <a:defRPr sz="1875" b="1">
                 <a:solidFill>
                   <a:srgbClr val="172B4D"/>
@@ -8708,6 +9109,7 @@
               </a:defRPr>
             </a:lvl3pPr>
             <a:lvl4pPr>
+              <a:buNone/>
               <a:defRPr sz="1875" b="1">
                 <a:solidFill>
                   <a:srgbClr val="172B4D"/>
@@ -8718,6 +9120,7 @@
               </a:defRPr>
             </a:lvl4pPr>
             <a:lvl5pPr>
+              <a:buNone/>
               <a:defRPr sz="1875" b="1">
                 <a:solidFill>
                   <a:srgbClr val="172B4D"/>
@@ -8728,6 +9131,7 @@
               </a:defRPr>
             </a:lvl5pPr>
             <a:lvl6pPr>
+              <a:buNone/>
               <a:defRPr sz="1875" b="1">
                 <a:solidFill>
                   <a:srgbClr val="172B4D"/>
@@ -8738,6 +9142,7 @@
               </a:defRPr>
             </a:lvl6pPr>
             <a:lvl7pPr>
+              <a:buNone/>
               <a:defRPr sz="1875" b="1">
                 <a:solidFill>
                   <a:srgbClr val="172B4D"/>
@@ -8748,6 +9153,7 @@
               </a:defRPr>
             </a:lvl7pPr>
             <a:lvl8pPr>
+              <a:buNone/>
               <a:defRPr sz="1875" b="1">
                 <a:solidFill>
                   <a:srgbClr val="172B4D"/>
@@ -8758,6 +9164,7 @@
               </a:defRPr>
             </a:lvl8pPr>
             <a:lvl9pPr>
+              <a:buNone/>
               <a:defRPr sz="1875" b="1">
                 <a:solidFill>
                   <a:srgbClr val="172B4D"/>
@@ -8770,6 +9177,7 @@
           </a:lstStyle>
           <a:p xmlns:a="http://schemas.openxmlformats.org/drawingml/2006/main">
             <a:pPr>
+              <a:buNone/>
               <a:defRPr sz="1875" b="1">
                 <a:solidFill>
                   <a:srgbClr val="172B4D"/>
@@ -8834,6 +9242,7 @@
               </a:defRPr>
             </a:defPPr>
             <a:lvl1pPr>
+              <a:buNone/>
               <a:defRPr sz="1425" b="0">
                 <a:solidFill>
                   <a:srgbClr val="5D6D84"/>
@@ -8844,6 +9253,7 @@
               </a:defRPr>
             </a:lvl1pPr>
             <a:lvl2pPr>
+              <a:buNone/>
               <a:defRPr sz="1425" b="0">
                 <a:solidFill>
                   <a:srgbClr val="5D6D84"/>
@@ -8854,6 +9264,7 @@
               </a:defRPr>
             </a:lvl2pPr>
             <a:lvl3pPr>
+              <a:buNone/>
               <a:defRPr sz="1425" b="0">
                 <a:solidFill>
                   <a:srgbClr val="5D6D84"/>
@@ -8864,6 +9275,7 @@
               </a:defRPr>
             </a:lvl3pPr>
             <a:lvl4pPr>
+              <a:buNone/>
               <a:defRPr sz="1425" b="0">
                 <a:solidFill>
                   <a:srgbClr val="5D6D84"/>
@@ -8874,6 +9286,7 @@
               </a:defRPr>
             </a:lvl4pPr>
             <a:lvl5pPr>
+              <a:buNone/>
               <a:defRPr sz="1425" b="0">
                 <a:solidFill>
                   <a:srgbClr val="5D6D84"/>
@@ -8884,6 +9297,7 @@
               </a:defRPr>
             </a:lvl5pPr>
             <a:lvl6pPr>
+              <a:buNone/>
               <a:defRPr sz="1425" b="0">
                 <a:solidFill>
                   <a:srgbClr val="5D6D84"/>
@@ -8894,6 +9308,7 @@
               </a:defRPr>
             </a:lvl6pPr>
             <a:lvl7pPr>
+              <a:buNone/>
               <a:defRPr sz="1425" b="0">
                 <a:solidFill>
                   <a:srgbClr val="5D6D84"/>
@@ -8904,6 +9319,7 @@
               </a:defRPr>
             </a:lvl7pPr>
             <a:lvl8pPr>
+              <a:buNone/>
               <a:defRPr sz="1425" b="0">
                 <a:solidFill>
                   <a:srgbClr val="5D6D84"/>
@@ -8914,6 +9330,7 @@
               </a:defRPr>
             </a:lvl8pPr>
             <a:lvl9pPr>
+              <a:buNone/>
               <a:defRPr sz="1425" b="0">
                 <a:solidFill>
                   <a:srgbClr val="5D6D84"/>
@@ -8926,6 +9343,7 @@
           </a:lstStyle>
           <a:p xmlns:a="http://schemas.openxmlformats.org/drawingml/2006/main">
             <a:pPr>
+              <a:buNone/>
               <a:defRPr sz="1425" b="0">
                 <a:solidFill>
                   <a:srgbClr val="5D6D84"/>
@@ -9020,6 +9438,7 @@
               </a:defRPr>
             </a:defPPr>
             <a:lvl1pPr>
+              <a:buNone/>
               <a:defRPr sz="2100" b="1">
                 <a:solidFill>
                   <a:srgbClr val="235ECB"/>
@@ -9030,6 +9449,7 @@
               </a:defRPr>
             </a:lvl1pPr>
             <a:lvl2pPr>
+              <a:buNone/>
               <a:defRPr sz="2100" b="1">
                 <a:solidFill>
                   <a:srgbClr val="235ECB"/>
@@ -9040,6 +9460,7 @@
               </a:defRPr>
             </a:lvl2pPr>
             <a:lvl3pPr>
+              <a:buNone/>
               <a:defRPr sz="2100" b="1">
                 <a:solidFill>
                   <a:srgbClr val="235ECB"/>
@@ -9050,6 +9471,7 @@
               </a:defRPr>
             </a:lvl3pPr>
             <a:lvl4pPr>
+              <a:buNone/>
               <a:defRPr sz="2100" b="1">
                 <a:solidFill>
                   <a:srgbClr val="235ECB"/>
@@ -9060,6 +9482,7 @@
               </a:defRPr>
             </a:lvl4pPr>
             <a:lvl5pPr>
+              <a:buNone/>
               <a:defRPr sz="2100" b="1">
                 <a:solidFill>
                   <a:srgbClr val="235ECB"/>
@@ -9070,6 +9493,7 @@
               </a:defRPr>
             </a:lvl5pPr>
             <a:lvl6pPr>
+              <a:buNone/>
               <a:defRPr sz="2100" b="1">
                 <a:solidFill>
                   <a:srgbClr val="235ECB"/>
@@ -9080,6 +9504,7 @@
               </a:defRPr>
             </a:lvl6pPr>
             <a:lvl7pPr>
+              <a:buNone/>
               <a:defRPr sz="2100" b="1">
                 <a:solidFill>
                   <a:srgbClr val="235ECB"/>
@@ -9090,6 +9515,7 @@
               </a:defRPr>
             </a:lvl7pPr>
             <a:lvl8pPr>
+              <a:buNone/>
               <a:defRPr sz="2100" b="1">
                 <a:solidFill>
                   <a:srgbClr val="235ECB"/>
@@ -9100,6 +9526,7 @@
               </a:defRPr>
             </a:lvl8pPr>
             <a:lvl9pPr>
+              <a:buNone/>
               <a:defRPr sz="2100" b="1">
                 <a:solidFill>
                   <a:srgbClr val="235ECB"/>
@@ -9112,6 +9539,7 @@
           </a:lstStyle>
           <a:p xmlns:a="http://schemas.openxmlformats.org/drawingml/2006/main">
             <a:pPr>
+              <a:buNone/>
               <a:defRPr sz="2100" b="1">
                 <a:solidFill>
                   <a:srgbClr val="235ECB"/>
@@ -9176,6 +9604,7 @@
               </a:defRPr>
             </a:defPPr>
             <a:lvl1pPr>
+              <a:buNone/>
               <a:defRPr sz="1875" b="1">
                 <a:solidFill>
                   <a:srgbClr val="172B4D"/>
@@ -9186,6 +9615,7 @@
               </a:defRPr>
             </a:lvl1pPr>
             <a:lvl2pPr>
+              <a:buNone/>
               <a:defRPr sz="1875" b="1">
                 <a:solidFill>
                   <a:srgbClr val="172B4D"/>
@@ -9196,6 +9626,7 @@
               </a:defRPr>
             </a:lvl2pPr>
             <a:lvl3pPr>
+              <a:buNone/>
               <a:defRPr sz="1875" b="1">
                 <a:solidFill>
                   <a:srgbClr val="172B4D"/>
@@ -9206,6 +9637,7 @@
               </a:defRPr>
             </a:lvl3pPr>
             <a:lvl4pPr>
+              <a:buNone/>
               <a:defRPr sz="1875" b="1">
                 <a:solidFill>
                   <a:srgbClr val="172B4D"/>
@@ -9216,6 +9648,7 @@
               </a:defRPr>
             </a:lvl4pPr>
             <a:lvl5pPr>
+              <a:buNone/>
               <a:defRPr sz="1875" b="1">
                 <a:solidFill>
                   <a:srgbClr val="172B4D"/>
@@ -9226,6 +9659,7 @@
               </a:defRPr>
             </a:lvl5pPr>
             <a:lvl6pPr>
+              <a:buNone/>
               <a:defRPr sz="1875" b="1">
                 <a:solidFill>
                   <a:srgbClr val="172B4D"/>
@@ -9236,6 +9670,7 @@
               </a:defRPr>
             </a:lvl6pPr>
             <a:lvl7pPr>
+              <a:buNone/>
               <a:defRPr sz="1875" b="1">
                 <a:solidFill>
                   <a:srgbClr val="172B4D"/>
@@ -9246,6 +9681,7 @@
               </a:defRPr>
             </a:lvl7pPr>
             <a:lvl8pPr>
+              <a:buNone/>
               <a:defRPr sz="1875" b="1">
                 <a:solidFill>
                   <a:srgbClr val="172B4D"/>
@@ -9256,6 +9692,7 @@
               </a:defRPr>
             </a:lvl8pPr>
             <a:lvl9pPr>
+              <a:buNone/>
               <a:defRPr sz="1875" b="1">
                 <a:solidFill>
                   <a:srgbClr val="172B4D"/>
@@ -9268,6 +9705,7 @@
           </a:lstStyle>
           <a:p xmlns:a="http://schemas.openxmlformats.org/drawingml/2006/main">
             <a:pPr>
+              <a:buNone/>
               <a:defRPr sz="1875" b="1">
                 <a:solidFill>
                   <a:srgbClr val="172B4D"/>
@@ -9332,6 +9770,7 @@
               </a:defRPr>
             </a:defPPr>
             <a:lvl1pPr>
+              <a:buNone/>
               <a:defRPr sz="1425" b="0">
                 <a:solidFill>
                   <a:srgbClr val="5D6D84"/>
@@ -9342,6 +9781,7 @@
               </a:defRPr>
             </a:lvl1pPr>
             <a:lvl2pPr>
+              <a:buNone/>
               <a:defRPr sz="1425" b="0">
                 <a:solidFill>
                   <a:srgbClr val="5D6D84"/>
@@ -9352,6 +9792,7 @@
               </a:defRPr>
             </a:lvl2pPr>
             <a:lvl3pPr>
+              <a:buNone/>
               <a:defRPr sz="1425" b="0">
                 <a:solidFill>
                   <a:srgbClr val="5D6D84"/>
@@ -9362,6 +9803,7 @@
               </a:defRPr>
             </a:lvl3pPr>
             <a:lvl4pPr>
+              <a:buNone/>
               <a:defRPr sz="1425" b="0">
                 <a:solidFill>
                   <a:srgbClr val="5D6D84"/>
@@ -9372,6 +9814,7 @@
               </a:defRPr>
             </a:lvl4pPr>
             <a:lvl5pPr>
+              <a:buNone/>
               <a:defRPr sz="1425" b="0">
                 <a:solidFill>
                   <a:srgbClr val="5D6D84"/>
@@ -9382,6 +9825,7 @@
               </a:defRPr>
             </a:lvl5pPr>
             <a:lvl6pPr>
+              <a:buNone/>
               <a:defRPr sz="1425" b="0">
                 <a:solidFill>
                   <a:srgbClr val="5D6D84"/>
@@ -9392,6 +9836,7 @@
               </a:defRPr>
             </a:lvl6pPr>
             <a:lvl7pPr>
+              <a:buNone/>
               <a:defRPr sz="1425" b="0">
                 <a:solidFill>
                   <a:srgbClr val="5D6D84"/>
@@ -9402,6 +9847,7 @@
               </a:defRPr>
             </a:lvl7pPr>
             <a:lvl8pPr>
+              <a:buNone/>
               <a:defRPr sz="1425" b="0">
                 <a:solidFill>
                   <a:srgbClr val="5D6D84"/>
@@ -9412,6 +9858,7 @@
               </a:defRPr>
             </a:lvl8pPr>
             <a:lvl9pPr>
+              <a:buNone/>
               <a:defRPr sz="1425" b="0">
                 <a:solidFill>
                   <a:srgbClr val="5D6D84"/>
@@ -9424,6 +9871,7 @@
           </a:lstStyle>
           <a:p xmlns:a="http://schemas.openxmlformats.org/drawingml/2006/main">
             <a:pPr>
+              <a:buNone/>
               <a:defRPr sz="1425" b="0">
                 <a:solidFill>
                   <a:srgbClr val="5D6D84"/>
@@ -9518,6 +9966,7 @@
               </a:defRPr>
             </a:defPPr>
             <a:lvl1pPr>
+              <a:buNone/>
               <a:defRPr sz="2100" b="1">
                 <a:solidFill>
                   <a:srgbClr val="235ECB"/>
@@ -9528,6 +9977,7 @@
               </a:defRPr>
             </a:lvl1pPr>
             <a:lvl2pPr>
+              <a:buNone/>
               <a:defRPr sz="2100" b="1">
                 <a:solidFill>
                   <a:srgbClr val="235ECB"/>
@@ -9538,6 +9988,7 @@
               </a:defRPr>
             </a:lvl2pPr>
             <a:lvl3pPr>
+              <a:buNone/>
               <a:defRPr sz="2100" b="1">
                 <a:solidFill>
                   <a:srgbClr val="235ECB"/>
@@ -9548,6 +9999,7 @@
               </a:defRPr>
             </a:lvl3pPr>
             <a:lvl4pPr>
+              <a:buNone/>
               <a:defRPr sz="2100" b="1">
                 <a:solidFill>
                   <a:srgbClr val="235ECB"/>
@@ -9558,6 +10010,7 @@
               </a:defRPr>
             </a:lvl4pPr>
             <a:lvl5pPr>
+              <a:buNone/>
               <a:defRPr sz="2100" b="1">
                 <a:solidFill>
                   <a:srgbClr val="235ECB"/>
@@ -9568,6 +10021,7 @@
               </a:defRPr>
             </a:lvl5pPr>
             <a:lvl6pPr>
+              <a:buNone/>
               <a:defRPr sz="2100" b="1">
                 <a:solidFill>
                   <a:srgbClr val="235ECB"/>
@@ -9578,6 +10032,7 @@
               </a:defRPr>
             </a:lvl6pPr>
             <a:lvl7pPr>
+              <a:buNone/>
               <a:defRPr sz="2100" b="1">
                 <a:solidFill>
                   <a:srgbClr val="235ECB"/>
@@ -9588,6 +10043,7 @@
               </a:defRPr>
             </a:lvl7pPr>
             <a:lvl8pPr>
+              <a:buNone/>
               <a:defRPr sz="2100" b="1">
                 <a:solidFill>
                   <a:srgbClr val="235ECB"/>
@@ -9598,6 +10054,7 @@
               </a:defRPr>
             </a:lvl8pPr>
             <a:lvl9pPr>
+              <a:buNone/>
               <a:defRPr sz="2100" b="1">
                 <a:solidFill>
                   <a:srgbClr val="235ECB"/>
@@ -9610,6 +10067,7 @@
           </a:lstStyle>
           <a:p xmlns:a="http://schemas.openxmlformats.org/drawingml/2006/main">
             <a:pPr>
+              <a:buNone/>
               <a:defRPr sz="2100" b="1">
                 <a:solidFill>
                   <a:srgbClr val="235ECB"/>
@@ -9674,6 +10132,7 @@
               </a:defRPr>
             </a:defPPr>
             <a:lvl1pPr>
+              <a:buNone/>
               <a:defRPr sz="1875" b="1">
                 <a:solidFill>
                   <a:srgbClr val="172B4D"/>
@@ -9684,6 +10143,7 @@
               </a:defRPr>
             </a:lvl1pPr>
             <a:lvl2pPr>
+              <a:buNone/>
               <a:defRPr sz="1875" b="1">
                 <a:solidFill>
                   <a:srgbClr val="172B4D"/>
@@ -9694,6 +10154,7 @@
               </a:defRPr>
             </a:lvl2pPr>
             <a:lvl3pPr>
+              <a:buNone/>
               <a:defRPr sz="1875" b="1">
                 <a:solidFill>
                   <a:srgbClr val="172B4D"/>
@@ -9704,6 +10165,7 @@
               </a:defRPr>
             </a:lvl3pPr>
             <a:lvl4pPr>
+              <a:buNone/>
               <a:defRPr sz="1875" b="1">
                 <a:solidFill>
                   <a:srgbClr val="172B4D"/>
@@ -9714,6 +10176,7 @@
               </a:defRPr>
             </a:lvl4pPr>
             <a:lvl5pPr>
+              <a:buNone/>
               <a:defRPr sz="1875" b="1">
                 <a:solidFill>
                   <a:srgbClr val="172B4D"/>
@@ -9724,6 +10187,7 @@
               </a:defRPr>
             </a:lvl5pPr>
             <a:lvl6pPr>
+              <a:buNone/>
               <a:defRPr sz="1875" b="1">
                 <a:solidFill>
                   <a:srgbClr val="172B4D"/>
@@ -9734,6 +10198,7 @@
               </a:defRPr>
             </a:lvl6pPr>
             <a:lvl7pPr>
+              <a:buNone/>
               <a:defRPr sz="1875" b="1">
                 <a:solidFill>
                   <a:srgbClr val="172B4D"/>
@@ -9744,6 +10209,7 @@
               </a:defRPr>
             </a:lvl7pPr>
             <a:lvl8pPr>
+              <a:buNone/>
               <a:defRPr sz="1875" b="1">
                 <a:solidFill>
                   <a:srgbClr val="172B4D"/>
@@ -9754,6 +10220,7 @@
               </a:defRPr>
             </a:lvl8pPr>
             <a:lvl9pPr>
+              <a:buNone/>
               <a:defRPr sz="1875" b="1">
                 <a:solidFill>
                   <a:srgbClr val="172B4D"/>
@@ -9766,6 +10233,7 @@
           </a:lstStyle>
           <a:p xmlns:a="http://schemas.openxmlformats.org/drawingml/2006/main">
             <a:pPr>
+              <a:buNone/>
               <a:defRPr sz="1875" b="1">
                 <a:solidFill>
                   <a:srgbClr val="172B4D"/>
@@ -9830,6 +10298,7 @@
               </a:defRPr>
             </a:defPPr>
             <a:lvl1pPr>
+              <a:buNone/>
               <a:defRPr sz="1425" b="0">
                 <a:solidFill>
                   <a:srgbClr val="5D6D84"/>
@@ -9840,6 +10309,7 @@
               </a:defRPr>
             </a:lvl1pPr>
             <a:lvl2pPr>
+              <a:buNone/>
               <a:defRPr sz="1425" b="0">
                 <a:solidFill>
                   <a:srgbClr val="5D6D84"/>
@@ -9850,6 +10320,7 @@
               </a:defRPr>
             </a:lvl2pPr>
             <a:lvl3pPr>
+              <a:buNone/>
               <a:defRPr sz="1425" b="0">
                 <a:solidFill>
                   <a:srgbClr val="5D6D84"/>
@@ -9860,6 +10331,7 @@
               </a:defRPr>
             </a:lvl3pPr>
             <a:lvl4pPr>
+              <a:buNone/>
               <a:defRPr sz="1425" b="0">
                 <a:solidFill>
                   <a:srgbClr val="5D6D84"/>
@@ -9870,6 +10342,7 @@
               </a:defRPr>
             </a:lvl4pPr>
             <a:lvl5pPr>
+              <a:buNone/>
               <a:defRPr sz="1425" b="0">
                 <a:solidFill>
                   <a:srgbClr val="5D6D84"/>
@@ -9880,6 +10353,7 @@
               </a:defRPr>
             </a:lvl5pPr>
             <a:lvl6pPr>
+              <a:buNone/>
               <a:defRPr sz="1425" b="0">
                 <a:solidFill>
                   <a:srgbClr val="5D6D84"/>
@@ -9890,6 +10364,7 @@
               </a:defRPr>
             </a:lvl6pPr>
             <a:lvl7pPr>
+              <a:buNone/>
               <a:defRPr sz="1425" b="0">
                 <a:solidFill>
                   <a:srgbClr val="5D6D84"/>
@@ -9900,6 +10375,7 @@
               </a:defRPr>
             </a:lvl7pPr>
             <a:lvl8pPr>
+              <a:buNone/>
               <a:defRPr sz="1425" b="0">
                 <a:solidFill>
                   <a:srgbClr val="5D6D84"/>
@@ -9910,6 +10386,7 @@
               </a:defRPr>
             </a:lvl8pPr>
             <a:lvl9pPr>
+              <a:buNone/>
               <a:defRPr sz="1425" b="0">
                 <a:solidFill>
                   <a:srgbClr val="5D6D84"/>
@@ -9922,6 +10399,7 @@
           </a:lstStyle>
           <a:p xmlns:a="http://schemas.openxmlformats.org/drawingml/2006/main">
             <a:pPr>
+              <a:buNone/>
               <a:defRPr sz="1425" b="0">
                 <a:solidFill>
                   <a:srgbClr val="5D6D84"/>
@@ -10016,6 +10494,7 @@
               </a:defRPr>
             </a:defPPr>
             <a:lvl1pPr>
+              <a:buNone/>
               <a:defRPr sz="2100" b="1">
                 <a:solidFill>
                   <a:srgbClr val="235ECB"/>
@@ -10026,6 +10505,7 @@
               </a:defRPr>
             </a:lvl1pPr>
             <a:lvl2pPr>
+              <a:buNone/>
               <a:defRPr sz="2100" b="1">
                 <a:solidFill>
                   <a:srgbClr val="235ECB"/>
@@ -10036,6 +10516,7 @@
               </a:defRPr>
             </a:lvl2pPr>
             <a:lvl3pPr>
+              <a:buNone/>
               <a:defRPr sz="2100" b="1">
                 <a:solidFill>
                   <a:srgbClr val="235ECB"/>
@@ -10046,6 +10527,7 @@
               </a:defRPr>
             </a:lvl3pPr>
             <a:lvl4pPr>
+              <a:buNone/>
               <a:defRPr sz="2100" b="1">
                 <a:solidFill>
                   <a:srgbClr val="235ECB"/>
@@ -10056,6 +10538,7 @@
               </a:defRPr>
             </a:lvl4pPr>
             <a:lvl5pPr>
+              <a:buNone/>
               <a:defRPr sz="2100" b="1">
                 <a:solidFill>
                   <a:srgbClr val="235ECB"/>
@@ -10066,6 +10549,7 @@
               </a:defRPr>
             </a:lvl5pPr>
             <a:lvl6pPr>
+              <a:buNone/>
               <a:defRPr sz="2100" b="1">
                 <a:solidFill>
                   <a:srgbClr val="235ECB"/>
@@ -10076,6 +10560,7 @@
               </a:defRPr>
             </a:lvl6pPr>
             <a:lvl7pPr>
+              <a:buNone/>
               <a:defRPr sz="2100" b="1">
                 <a:solidFill>
                   <a:srgbClr val="235ECB"/>
@@ -10086,6 +10571,7 @@
               </a:defRPr>
             </a:lvl7pPr>
             <a:lvl8pPr>
+              <a:buNone/>
               <a:defRPr sz="2100" b="1">
                 <a:solidFill>
                   <a:srgbClr val="235ECB"/>
@@ -10096,6 +10582,7 @@
               </a:defRPr>
             </a:lvl8pPr>
             <a:lvl9pPr>
+              <a:buNone/>
               <a:defRPr sz="2100" b="1">
                 <a:solidFill>
                   <a:srgbClr val="235ECB"/>
@@ -10108,6 +10595,7 @@
           </a:lstStyle>
           <a:p xmlns:a="http://schemas.openxmlformats.org/drawingml/2006/main">
             <a:pPr>
+              <a:buNone/>
               <a:defRPr sz="2100" b="1">
                 <a:solidFill>
                   <a:srgbClr val="235ECB"/>
@@ -10172,6 +10660,7 @@
               </a:defRPr>
             </a:defPPr>
             <a:lvl1pPr>
+              <a:buNone/>
               <a:defRPr sz="1875" b="1">
                 <a:solidFill>
                   <a:srgbClr val="172B4D"/>
@@ -10182,6 +10671,7 @@
               </a:defRPr>
             </a:lvl1pPr>
             <a:lvl2pPr>
+              <a:buNone/>
               <a:defRPr sz="1875" b="1">
                 <a:solidFill>
                   <a:srgbClr val="172B4D"/>
@@ -10192,6 +10682,7 @@
               </a:defRPr>
             </a:lvl2pPr>
             <a:lvl3pPr>
+              <a:buNone/>
               <a:defRPr sz="1875" b="1">
                 <a:solidFill>
                   <a:srgbClr val="172B4D"/>
@@ -10202,6 +10693,7 @@
               </a:defRPr>
             </a:lvl3pPr>
             <a:lvl4pPr>
+              <a:buNone/>
               <a:defRPr sz="1875" b="1">
                 <a:solidFill>
                   <a:srgbClr val="172B4D"/>
@@ -10212,6 +10704,7 @@
               </a:defRPr>
             </a:lvl4pPr>
             <a:lvl5pPr>
+              <a:buNone/>
               <a:defRPr sz="1875" b="1">
                 <a:solidFill>
                   <a:srgbClr val="172B4D"/>
@@ -10222,6 +10715,7 @@
               </a:defRPr>
             </a:lvl5pPr>
             <a:lvl6pPr>
+              <a:buNone/>
               <a:defRPr sz="1875" b="1">
                 <a:solidFill>
                   <a:srgbClr val="172B4D"/>
@@ -10232,6 +10726,7 @@
               </a:defRPr>
             </a:lvl6pPr>
             <a:lvl7pPr>
+              <a:buNone/>
               <a:defRPr sz="1875" b="1">
                 <a:solidFill>
                   <a:srgbClr val="172B4D"/>
@@ -10242,6 +10737,7 @@
               </a:defRPr>
             </a:lvl7pPr>
             <a:lvl8pPr>
+              <a:buNone/>
               <a:defRPr sz="1875" b="1">
                 <a:solidFill>
                   <a:srgbClr val="172B4D"/>
@@ -10252,6 +10748,7 @@
               </a:defRPr>
             </a:lvl8pPr>
             <a:lvl9pPr>
+              <a:buNone/>
               <a:defRPr sz="1875" b="1">
                 <a:solidFill>
                   <a:srgbClr val="172B4D"/>
@@ -10264,6 +10761,7 @@
           </a:lstStyle>
           <a:p xmlns:a="http://schemas.openxmlformats.org/drawingml/2006/main">
             <a:pPr>
+              <a:buNone/>
               <a:defRPr sz="1875" b="1">
                 <a:solidFill>
                   <a:srgbClr val="172B4D"/>
@@ -10328,6 +10826,7 @@
               </a:defRPr>
             </a:defPPr>
             <a:lvl1pPr>
+              <a:buNone/>
               <a:defRPr sz="1425" b="0">
                 <a:solidFill>
                   <a:srgbClr val="5D6D84"/>
@@ -10338,6 +10837,7 @@
               </a:defRPr>
             </a:lvl1pPr>
             <a:lvl2pPr>
+              <a:buNone/>
               <a:defRPr sz="1425" b="0">
                 <a:solidFill>
                   <a:srgbClr val="5D6D84"/>
@@ -10348,6 +10848,7 @@
               </a:defRPr>
             </a:lvl2pPr>
             <a:lvl3pPr>
+              <a:buNone/>
               <a:defRPr sz="1425" b="0">
                 <a:solidFill>
                   <a:srgbClr val="5D6D84"/>
@@ -10358,6 +10859,7 @@
               </a:defRPr>
             </a:lvl3pPr>
             <a:lvl4pPr>
+              <a:buNone/>
               <a:defRPr sz="1425" b="0">
                 <a:solidFill>
                   <a:srgbClr val="5D6D84"/>
@@ -10368,6 +10870,7 @@
               </a:defRPr>
             </a:lvl4pPr>
             <a:lvl5pPr>
+              <a:buNone/>
               <a:defRPr sz="1425" b="0">
                 <a:solidFill>
                   <a:srgbClr val="5D6D84"/>
@@ -10378,6 +10881,7 @@
               </a:defRPr>
             </a:lvl5pPr>
             <a:lvl6pPr>
+              <a:buNone/>
               <a:defRPr sz="1425" b="0">
                 <a:solidFill>
                   <a:srgbClr val="5D6D84"/>
@@ -10388,6 +10892,7 @@
               </a:defRPr>
             </a:lvl6pPr>
             <a:lvl7pPr>
+              <a:buNone/>
               <a:defRPr sz="1425" b="0">
                 <a:solidFill>
                   <a:srgbClr val="5D6D84"/>
@@ -10398,6 +10903,7 @@
               </a:defRPr>
             </a:lvl7pPr>
             <a:lvl8pPr>
+              <a:buNone/>
               <a:defRPr sz="1425" b="0">
                 <a:solidFill>
                   <a:srgbClr val="5D6D84"/>
@@ -10408,6 +10914,7 @@
               </a:defRPr>
             </a:lvl8pPr>
             <a:lvl9pPr>
+              <a:buNone/>
               <a:defRPr sz="1425" b="0">
                 <a:solidFill>
                   <a:srgbClr val="5D6D84"/>
@@ -10420,6 +10927,7 @@
           </a:lstStyle>
           <a:p xmlns:a="http://schemas.openxmlformats.org/drawingml/2006/main">
             <a:pPr>
+              <a:buNone/>
               <a:defRPr sz="1425" b="0">
                 <a:solidFill>
                   <a:srgbClr val="5D6D84"/>
@@ -10514,6 +11022,7 @@
               </a:defRPr>
             </a:defPPr>
             <a:lvl1pPr>
+              <a:buNone/>
               <a:defRPr sz="1875" b="1">
                 <a:solidFill>
                   <a:srgbClr val="0E7267"/>
@@ -10524,6 +11033,7 @@
               </a:defRPr>
             </a:lvl1pPr>
             <a:lvl2pPr>
+              <a:buNone/>
               <a:defRPr sz="1875" b="1">
                 <a:solidFill>
                   <a:srgbClr val="0E7267"/>
@@ -10534,6 +11044,7 @@
               </a:defRPr>
             </a:lvl2pPr>
             <a:lvl3pPr>
+              <a:buNone/>
               <a:defRPr sz="1875" b="1">
                 <a:solidFill>
                   <a:srgbClr val="0E7267"/>
@@ -10544,6 +11055,7 @@
               </a:defRPr>
             </a:lvl3pPr>
             <a:lvl4pPr>
+              <a:buNone/>
               <a:defRPr sz="1875" b="1">
                 <a:solidFill>
                   <a:srgbClr val="0E7267"/>
@@ -10554,6 +11066,7 @@
               </a:defRPr>
             </a:lvl4pPr>
             <a:lvl5pPr>
+              <a:buNone/>
               <a:defRPr sz="1875" b="1">
                 <a:solidFill>
                   <a:srgbClr val="0E7267"/>
@@ -10564,6 +11077,7 @@
               </a:defRPr>
             </a:lvl5pPr>
             <a:lvl6pPr>
+              <a:buNone/>
               <a:defRPr sz="1875" b="1">
                 <a:solidFill>
                   <a:srgbClr val="0E7267"/>
@@ -10574,6 +11088,7 @@
               </a:defRPr>
             </a:lvl6pPr>
             <a:lvl7pPr>
+              <a:buNone/>
               <a:defRPr sz="1875" b="1">
                 <a:solidFill>
                   <a:srgbClr val="0E7267"/>
@@ -10584,6 +11099,7 @@
               </a:defRPr>
             </a:lvl7pPr>
             <a:lvl8pPr>
+              <a:buNone/>
               <a:defRPr sz="1875" b="1">
                 <a:solidFill>
                   <a:srgbClr val="0E7267"/>
@@ -10594,6 +11110,7 @@
               </a:defRPr>
             </a:lvl8pPr>
             <a:lvl9pPr>
+              <a:buNone/>
               <a:defRPr sz="1875" b="1">
                 <a:solidFill>
                   <a:srgbClr val="0E7267"/>
@@ -10606,6 +11123,7 @@
           </a:lstStyle>
           <a:p xmlns:a="http://schemas.openxmlformats.org/drawingml/2006/main">
             <a:pPr>
+              <a:buNone/>
               <a:defRPr sz="1875" b="1">
                 <a:solidFill>
                   <a:srgbClr val="0E7267"/>
@@ -10624,7 +11142,7 @@
                 <a:ea typeface="Apple SD Gothic Neo"/>
                 <a:cs typeface="Apple SD Gothic Neo"/>
               </a:rPr>
-              <a:t>유지한 기반: FastAPI lifespan, MCP, DI, SQLite 세션, LangGraph</a:t>
+              <a:t>기존 기반 유지: FastAPI lifespan, MCP, DI, SQLite, LangGraph, LangSmith</a:t>
             </a:r>
           </a:p>
         </p:txBody>
@@ -10729,6 +11247,7 @@
               </a:defRPr>
             </a:defPPr>
             <a:lvl1pPr>
+              <a:buNone/>
               <a:defRPr sz="1275" b="1">
                 <a:solidFill>
                   <a:srgbClr val="235ECB"/>
@@ -10739,6 +11258,7 @@
               </a:defRPr>
             </a:lvl1pPr>
             <a:lvl2pPr>
+              <a:buNone/>
               <a:defRPr sz="1275" b="1">
                 <a:solidFill>
                   <a:srgbClr val="235ECB"/>
@@ -10749,6 +11269,7 @@
               </a:defRPr>
             </a:lvl2pPr>
             <a:lvl3pPr>
+              <a:buNone/>
               <a:defRPr sz="1275" b="1">
                 <a:solidFill>
                   <a:srgbClr val="235ECB"/>
@@ -10759,6 +11280,7 @@
               </a:defRPr>
             </a:lvl3pPr>
             <a:lvl4pPr>
+              <a:buNone/>
               <a:defRPr sz="1275" b="1">
                 <a:solidFill>
                   <a:srgbClr val="235ECB"/>
@@ -10769,6 +11291,7 @@
               </a:defRPr>
             </a:lvl4pPr>
             <a:lvl5pPr>
+              <a:buNone/>
               <a:defRPr sz="1275" b="1">
                 <a:solidFill>
                   <a:srgbClr val="235ECB"/>
@@ -10779,6 +11302,7 @@
               </a:defRPr>
             </a:lvl5pPr>
             <a:lvl6pPr>
+              <a:buNone/>
               <a:defRPr sz="1275" b="1">
                 <a:solidFill>
                   <a:srgbClr val="235ECB"/>
@@ -10789,6 +11313,7 @@
               </a:defRPr>
             </a:lvl6pPr>
             <a:lvl7pPr>
+              <a:buNone/>
               <a:defRPr sz="1275" b="1">
                 <a:solidFill>
                   <a:srgbClr val="235ECB"/>
@@ -10799,6 +11324,7 @@
               </a:defRPr>
             </a:lvl7pPr>
             <a:lvl8pPr>
+              <a:buNone/>
               <a:defRPr sz="1275" b="1">
                 <a:solidFill>
                   <a:srgbClr val="235ECB"/>
@@ -10809,6 +11335,7 @@
               </a:defRPr>
             </a:lvl8pPr>
             <a:lvl9pPr>
+              <a:buNone/>
               <a:defRPr sz="1275" b="1">
                 <a:solidFill>
                   <a:srgbClr val="235ECB"/>
@@ -10821,6 +11348,7 @@
           </a:lstStyle>
           <a:p xmlns:a="http://schemas.openxmlformats.org/drawingml/2006/main">
             <a:pPr>
+              <a:buNone/>
               <a:defRPr sz="1275" b="1">
                 <a:solidFill>
                   <a:srgbClr val="235ECB"/>
@@ -10885,6 +11413,7 @@
               </a:defRPr>
             </a:defPPr>
             <a:lvl1pPr>
+              <a:buNone/>
               <a:defRPr sz="2850" b="1">
                 <a:solidFill>
                   <a:srgbClr val="172B4D"/>
@@ -10895,6 +11424,7 @@
               </a:defRPr>
             </a:lvl1pPr>
             <a:lvl2pPr>
+              <a:buNone/>
               <a:defRPr sz="2850" b="1">
                 <a:solidFill>
                   <a:srgbClr val="172B4D"/>
@@ -10905,6 +11435,7 @@
               </a:defRPr>
             </a:lvl2pPr>
             <a:lvl3pPr>
+              <a:buNone/>
               <a:defRPr sz="2850" b="1">
                 <a:solidFill>
                   <a:srgbClr val="172B4D"/>
@@ -10915,6 +11446,7 @@
               </a:defRPr>
             </a:lvl3pPr>
             <a:lvl4pPr>
+              <a:buNone/>
               <a:defRPr sz="2850" b="1">
                 <a:solidFill>
                   <a:srgbClr val="172B4D"/>
@@ -10925,6 +11457,7 @@
               </a:defRPr>
             </a:lvl4pPr>
             <a:lvl5pPr>
+              <a:buNone/>
               <a:defRPr sz="2850" b="1">
                 <a:solidFill>
                   <a:srgbClr val="172B4D"/>
@@ -10935,6 +11468,7 @@
               </a:defRPr>
             </a:lvl5pPr>
             <a:lvl6pPr>
+              <a:buNone/>
               <a:defRPr sz="2850" b="1">
                 <a:solidFill>
                   <a:srgbClr val="172B4D"/>
@@ -10945,6 +11479,7 @@
               </a:defRPr>
             </a:lvl6pPr>
             <a:lvl7pPr>
+              <a:buNone/>
               <a:defRPr sz="2850" b="1">
                 <a:solidFill>
                   <a:srgbClr val="172B4D"/>
@@ -10955,6 +11490,7 @@
               </a:defRPr>
             </a:lvl7pPr>
             <a:lvl8pPr>
+              <a:buNone/>
               <a:defRPr sz="2850" b="1">
                 <a:solidFill>
                   <a:srgbClr val="172B4D"/>
@@ -10965,6 +11501,7 @@
               </a:defRPr>
             </a:lvl8pPr>
             <a:lvl9pPr>
+              <a:buNone/>
               <a:defRPr sz="2850" b="1">
                 <a:solidFill>
                   <a:srgbClr val="172B4D"/>
@@ -10977,6 +11514,7 @@
           </a:lstStyle>
           <a:p xmlns:a="http://schemas.openxmlformats.org/drawingml/2006/main">
             <a:pPr>
+              <a:buNone/>
               <a:defRPr sz="2850" b="1">
                 <a:solidFill>
                   <a:srgbClr val="172B4D"/>
@@ -10995,7 +11533,7 @@
                 <a:ea typeface="Apple SD Gothic Neo"/>
                 <a:cs typeface="Apple SD Gothic Neo"/>
               </a:rPr>
-              <a:t>관련된 런북을 두 개에서 자르지 않습니다</a:t>
+              <a:t>키워드 선택을 복합 증상 RAG로 바꿨습니다</a:t>
             </a:r>
           </a:p>
         </p:txBody>
@@ -11071,6 +11609,7 @@
               </a:defRPr>
             </a:defPPr>
             <a:lvl1pPr>
+              <a:buNone/>
               <a:defRPr sz="975" b="0">
                 <a:solidFill>
                   <a:srgbClr val="5D6D84"/>
@@ -11081,6 +11620,7 @@
               </a:defRPr>
             </a:lvl1pPr>
             <a:lvl2pPr>
+              <a:buNone/>
               <a:defRPr sz="975" b="0">
                 <a:solidFill>
                   <a:srgbClr val="5D6D84"/>
@@ -11091,6 +11631,7 @@
               </a:defRPr>
             </a:lvl2pPr>
             <a:lvl3pPr>
+              <a:buNone/>
               <a:defRPr sz="975" b="0">
                 <a:solidFill>
                   <a:srgbClr val="5D6D84"/>
@@ -11101,6 +11642,7 @@
               </a:defRPr>
             </a:lvl3pPr>
             <a:lvl4pPr>
+              <a:buNone/>
               <a:defRPr sz="975" b="0">
                 <a:solidFill>
                   <a:srgbClr val="5D6D84"/>
@@ -11111,6 +11653,7 @@
               </a:defRPr>
             </a:lvl4pPr>
             <a:lvl5pPr>
+              <a:buNone/>
               <a:defRPr sz="975" b="0">
                 <a:solidFill>
                   <a:srgbClr val="5D6D84"/>
@@ -11121,6 +11664,7 @@
               </a:defRPr>
             </a:lvl5pPr>
             <a:lvl6pPr>
+              <a:buNone/>
               <a:defRPr sz="975" b="0">
                 <a:solidFill>
                   <a:srgbClr val="5D6D84"/>
@@ -11131,6 +11675,7 @@
               </a:defRPr>
             </a:lvl6pPr>
             <a:lvl7pPr>
+              <a:buNone/>
               <a:defRPr sz="975" b="0">
                 <a:solidFill>
                   <a:srgbClr val="5D6D84"/>
@@ -11141,6 +11686,7 @@
               </a:defRPr>
             </a:lvl7pPr>
             <a:lvl8pPr>
+              <a:buNone/>
               <a:defRPr sz="975" b="0">
                 <a:solidFill>
                   <a:srgbClr val="5D6D84"/>
@@ -11151,6 +11697,7 @@
               </a:defRPr>
             </a:lvl8pPr>
             <a:lvl9pPr>
+              <a:buNone/>
               <a:defRPr sz="975" b="0">
                 <a:solidFill>
                   <a:srgbClr val="5D6D84"/>
@@ -11163,6 +11710,7 @@
           </a:lstStyle>
           <a:p xmlns:a="http://schemas.openxmlformats.org/drawingml/2006/main">
             <a:pPr>
+              <a:buNone/>
               <a:defRPr sz="975" b="0">
                 <a:solidFill>
                   <a:srgbClr val="5D6D84"/>
@@ -11227,6 +11775,7 @@
               </a:defRPr>
             </a:defPPr>
             <a:lvl1pPr>
+              <a:buNone/>
               <a:defRPr sz="1125" b="1">
                 <a:solidFill>
                   <a:srgbClr val="5D6D84"/>
@@ -11237,6 +11786,7 @@
               </a:defRPr>
             </a:lvl1pPr>
             <a:lvl2pPr>
+              <a:buNone/>
               <a:defRPr sz="1125" b="1">
                 <a:solidFill>
                   <a:srgbClr val="5D6D84"/>
@@ -11247,6 +11797,7 @@
               </a:defRPr>
             </a:lvl2pPr>
             <a:lvl3pPr>
+              <a:buNone/>
               <a:defRPr sz="1125" b="1">
                 <a:solidFill>
                   <a:srgbClr val="5D6D84"/>
@@ -11257,6 +11808,7 @@
               </a:defRPr>
             </a:lvl3pPr>
             <a:lvl4pPr>
+              <a:buNone/>
               <a:defRPr sz="1125" b="1">
                 <a:solidFill>
                   <a:srgbClr val="5D6D84"/>
@@ -11267,6 +11819,7 @@
               </a:defRPr>
             </a:lvl4pPr>
             <a:lvl5pPr>
+              <a:buNone/>
               <a:defRPr sz="1125" b="1">
                 <a:solidFill>
                   <a:srgbClr val="5D6D84"/>
@@ -11277,6 +11830,7 @@
               </a:defRPr>
             </a:lvl5pPr>
             <a:lvl6pPr>
+              <a:buNone/>
               <a:defRPr sz="1125" b="1">
                 <a:solidFill>
                   <a:srgbClr val="5D6D84"/>
@@ -11287,6 +11841,7 @@
               </a:defRPr>
             </a:lvl6pPr>
             <a:lvl7pPr>
+              <a:buNone/>
               <a:defRPr sz="1125" b="1">
                 <a:solidFill>
                   <a:srgbClr val="5D6D84"/>
@@ -11297,6 +11852,7 @@
               </a:defRPr>
             </a:lvl7pPr>
             <a:lvl8pPr>
+              <a:buNone/>
               <a:defRPr sz="1125" b="1">
                 <a:solidFill>
                   <a:srgbClr val="5D6D84"/>
@@ -11307,6 +11863,7 @@
               </a:defRPr>
             </a:lvl8pPr>
             <a:lvl9pPr>
+              <a:buNone/>
               <a:defRPr sz="1125" b="1">
                 <a:solidFill>
                   <a:srgbClr val="5D6D84"/>
@@ -11319,6 +11876,7 @@
           </a:lstStyle>
           <a:p xmlns:a="http://schemas.openxmlformats.org/drawingml/2006/main">
             <a:pPr>
+              <a:buNone/>
               <a:defRPr sz="1125" b="1">
                 <a:solidFill>
                   <a:srgbClr val="5D6D84"/>
@@ -11413,6 +11971,7 @@
               </a:defRPr>
             </a:defPPr>
             <a:lvl1pPr>
+              <a:buNone/>
               <a:defRPr sz="1950" b="1">
                 <a:solidFill>
                   <a:srgbClr val="5D6D84"/>
@@ -11423,6 +11982,7 @@
               </a:defRPr>
             </a:lvl1pPr>
             <a:lvl2pPr>
+              <a:buNone/>
               <a:defRPr sz="1950" b="1">
                 <a:solidFill>
                   <a:srgbClr val="5D6D84"/>
@@ -11433,6 +11993,7 @@
               </a:defRPr>
             </a:lvl2pPr>
             <a:lvl3pPr>
+              <a:buNone/>
               <a:defRPr sz="1950" b="1">
                 <a:solidFill>
                   <a:srgbClr val="5D6D84"/>
@@ -11443,6 +12004,7 @@
               </a:defRPr>
             </a:lvl3pPr>
             <a:lvl4pPr>
+              <a:buNone/>
               <a:defRPr sz="1950" b="1">
                 <a:solidFill>
                   <a:srgbClr val="5D6D84"/>
@@ -11453,6 +12015,7 @@
               </a:defRPr>
             </a:lvl4pPr>
             <a:lvl5pPr>
+              <a:buNone/>
               <a:defRPr sz="1950" b="1">
                 <a:solidFill>
                   <a:srgbClr val="5D6D84"/>
@@ -11463,6 +12026,7 @@
               </a:defRPr>
             </a:lvl5pPr>
             <a:lvl6pPr>
+              <a:buNone/>
               <a:defRPr sz="1950" b="1">
                 <a:solidFill>
                   <a:srgbClr val="5D6D84"/>
@@ -11473,6 +12037,7 @@
               </a:defRPr>
             </a:lvl6pPr>
             <a:lvl7pPr>
+              <a:buNone/>
               <a:defRPr sz="1950" b="1">
                 <a:solidFill>
                   <a:srgbClr val="5D6D84"/>
@@ -11483,6 +12048,7 @@
               </a:defRPr>
             </a:lvl7pPr>
             <a:lvl8pPr>
+              <a:buNone/>
               <a:defRPr sz="1950" b="1">
                 <a:solidFill>
                   <a:srgbClr val="5D6D84"/>
@@ -11493,6 +12059,7 @@
               </a:defRPr>
             </a:lvl8pPr>
             <a:lvl9pPr>
+              <a:buNone/>
               <a:defRPr sz="1950" b="1">
                 <a:solidFill>
                   <a:srgbClr val="5D6D84"/>
@@ -11505,6 +12072,7 @@
           </a:lstStyle>
           <a:p xmlns:a="http://schemas.openxmlformats.org/drawingml/2006/main">
             <a:pPr>
+              <a:buNone/>
               <a:defRPr sz="1950" b="1">
                 <a:solidFill>
                   <a:srgbClr val="5D6D84"/>
@@ -11523,7 +12091,7 @@
                 <a:ea typeface="Apple SD Gothic Neo"/>
                 <a:cs typeface="Apple SD Gothic Neo"/>
               </a:rPr>
-              <a:t>직전 버전</a:t>
+              <a:t>기존 과제</a:t>
             </a:r>
           </a:p>
         </p:txBody>
@@ -11569,6 +12137,7 @@
               </a:defRPr>
             </a:defPPr>
             <a:lvl1pPr>
+              <a:buNone/>
               <a:defRPr sz="2475" b="1">
                 <a:solidFill>
                   <a:srgbClr val="172B4D"/>
@@ -11579,6 +12148,7 @@
               </a:defRPr>
             </a:lvl1pPr>
             <a:lvl2pPr>
+              <a:buNone/>
               <a:defRPr sz="2475" b="1">
                 <a:solidFill>
                   <a:srgbClr val="172B4D"/>
@@ -11589,6 +12159,7 @@
               </a:defRPr>
             </a:lvl2pPr>
             <a:lvl3pPr>
+              <a:buNone/>
               <a:defRPr sz="2475" b="1">
                 <a:solidFill>
                   <a:srgbClr val="172B4D"/>
@@ -11599,6 +12170,7 @@
               </a:defRPr>
             </a:lvl3pPr>
             <a:lvl4pPr>
+              <a:buNone/>
               <a:defRPr sz="2475" b="1">
                 <a:solidFill>
                   <a:srgbClr val="172B4D"/>
@@ -11609,6 +12181,7 @@
               </a:defRPr>
             </a:lvl4pPr>
             <a:lvl5pPr>
+              <a:buNone/>
               <a:defRPr sz="2475" b="1">
                 <a:solidFill>
                   <a:srgbClr val="172B4D"/>
@@ -11619,6 +12192,7 @@
               </a:defRPr>
             </a:lvl5pPr>
             <a:lvl6pPr>
+              <a:buNone/>
               <a:defRPr sz="2475" b="1">
                 <a:solidFill>
                   <a:srgbClr val="172B4D"/>
@@ -11629,6 +12203,7 @@
               </a:defRPr>
             </a:lvl6pPr>
             <a:lvl7pPr>
+              <a:buNone/>
               <a:defRPr sz="2475" b="1">
                 <a:solidFill>
                   <a:srgbClr val="172B4D"/>
@@ -11639,6 +12214,7 @@
               </a:defRPr>
             </a:lvl7pPr>
             <a:lvl8pPr>
+              <a:buNone/>
               <a:defRPr sz="2475" b="1">
                 <a:solidFill>
                   <a:srgbClr val="172B4D"/>
@@ -11649,6 +12225,7 @@
               </a:defRPr>
             </a:lvl8pPr>
             <a:lvl9pPr>
+              <a:buNone/>
               <a:defRPr sz="2475" b="1">
                 <a:solidFill>
                   <a:srgbClr val="172B4D"/>
@@ -11661,6 +12238,7 @@
           </a:lstStyle>
           <a:p xmlns:a="http://schemas.openxmlformats.org/drawingml/2006/main">
             <a:pPr>
+              <a:buNone/>
               <a:defRPr sz="2475" b="1">
                 <a:solidFill>
                   <a:srgbClr val="172B4D"/>
@@ -11679,7 +12257,7 @@
                 <a:ea typeface="Apple SD Gothic Neo"/>
                 <a:cs typeface="Apple SD Gothic Neo"/>
               </a:rPr>
-              <a:t>CPU / 메모리 / 디스크</a:t>
+              <a:t>첫 일치 유형 1개</a:t>
             </a:r>
           </a:p>
         </p:txBody>
@@ -11725,6 +12303,7 @@
               </a:defRPr>
             </a:defPPr>
             <a:lvl1pPr>
+              <a:buNone/>
               <a:defRPr sz="1875" b="0">
                 <a:solidFill>
                   <a:srgbClr val="253650"/>
@@ -11735,6 +12314,7 @@
               </a:defRPr>
             </a:lvl1pPr>
             <a:lvl2pPr>
+              <a:buNone/>
               <a:defRPr sz="1875" b="0">
                 <a:solidFill>
                   <a:srgbClr val="253650"/>
@@ -11745,6 +12325,7 @@
               </a:defRPr>
             </a:lvl2pPr>
             <a:lvl3pPr>
+              <a:buNone/>
               <a:defRPr sz="1875" b="0">
                 <a:solidFill>
                   <a:srgbClr val="253650"/>
@@ -11755,6 +12336,7 @@
               </a:defRPr>
             </a:lvl3pPr>
             <a:lvl4pPr>
+              <a:buNone/>
               <a:defRPr sz="1875" b="0">
                 <a:solidFill>
                   <a:srgbClr val="253650"/>
@@ -11765,6 +12347,7 @@
               </a:defRPr>
             </a:lvl4pPr>
             <a:lvl5pPr>
+              <a:buNone/>
               <a:defRPr sz="1875" b="0">
                 <a:solidFill>
                   <a:srgbClr val="253650"/>
@@ -11775,6 +12358,7 @@
               </a:defRPr>
             </a:lvl5pPr>
             <a:lvl6pPr>
+              <a:buNone/>
               <a:defRPr sz="1875" b="0">
                 <a:solidFill>
                   <a:srgbClr val="253650"/>
@@ -11785,6 +12369,7 @@
               </a:defRPr>
             </a:lvl6pPr>
             <a:lvl7pPr>
+              <a:buNone/>
               <a:defRPr sz="1875" b="0">
                 <a:solidFill>
                   <a:srgbClr val="253650"/>
@@ -11795,6 +12380,7 @@
               </a:defRPr>
             </a:lvl7pPr>
             <a:lvl8pPr>
+              <a:buNone/>
               <a:defRPr sz="1875" b="0">
                 <a:solidFill>
                   <a:srgbClr val="253650"/>
@@ -11805,6 +12391,7 @@
               </a:defRPr>
             </a:lvl8pPr>
             <a:lvl9pPr>
+              <a:buNone/>
               <a:defRPr sz="1875" b="0">
                 <a:solidFill>
                   <a:srgbClr val="253650"/>
@@ -11817,6 +12404,7 @@
           </a:lstStyle>
           <a:p xmlns:a="http://schemas.openxmlformats.org/drawingml/2006/main">
             <a:pPr>
+              <a:buNone/>
               <a:defRPr sz="1875" b="0">
                 <a:solidFill>
                   <a:srgbClr val="253650"/>
@@ -11835,11 +12423,12 @@
                 <a:ea typeface="Apple SD Gothic Neo"/>
                 <a:cs typeface="Apple SD Gothic Neo"/>
               </a:rPr>
-              <a:t>최대 두 문서에서 잘려</a:t>
+              <a:t>알림 키워드를 순서대로 검사해</a:t>
             </a:r>
           </a:p>
           <a:p xmlns:a="http://schemas.openxmlformats.org/drawingml/2006/main">
             <a:pPr>
+              <a:buNone/>
               <a:defRPr sz="1875" b="0">
                 <a:solidFill>
                   <a:srgbClr val="253650"/>
@@ -11858,7 +12447,7 @@
                 <a:ea typeface="Apple SD Gothic Neo"/>
                 <a:cs typeface="Apple SD Gothic Neo"/>
               </a:rPr>
-              <a:t>세 번째 증상의 근거가 누락될 수 있었습니다.</a:t>
+              <a:t>처음 일치한 유형의 런북을 조회했습니다.</a:t>
             </a:r>
           </a:p>
         </p:txBody>
@@ -11934,6 +12523,7 @@
               </a:defRPr>
             </a:defPPr>
             <a:lvl1pPr>
+              <a:buNone/>
               <a:defRPr sz="1950" b="1">
                 <a:solidFill>
                   <a:srgbClr val="0E7267"/>
@@ -11944,6 +12534,7 @@
               </a:defRPr>
             </a:lvl1pPr>
             <a:lvl2pPr>
+              <a:buNone/>
               <a:defRPr sz="1950" b="1">
                 <a:solidFill>
                   <a:srgbClr val="0E7267"/>
@@ -11954,6 +12545,7 @@
               </a:defRPr>
             </a:lvl2pPr>
             <a:lvl3pPr>
+              <a:buNone/>
               <a:defRPr sz="1950" b="1">
                 <a:solidFill>
                   <a:srgbClr val="0E7267"/>
@@ -11964,6 +12556,7 @@
               </a:defRPr>
             </a:lvl3pPr>
             <a:lvl4pPr>
+              <a:buNone/>
               <a:defRPr sz="1950" b="1">
                 <a:solidFill>
                   <a:srgbClr val="0E7267"/>
@@ -11974,6 +12567,7 @@
               </a:defRPr>
             </a:lvl4pPr>
             <a:lvl5pPr>
+              <a:buNone/>
               <a:defRPr sz="1950" b="1">
                 <a:solidFill>
                   <a:srgbClr val="0E7267"/>
@@ -11984,6 +12578,7 @@
               </a:defRPr>
             </a:lvl5pPr>
             <a:lvl6pPr>
+              <a:buNone/>
               <a:defRPr sz="1950" b="1">
                 <a:solidFill>
                   <a:srgbClr val="0E7267"/>
@@ -11994,6 +12589,7 @@
               </a:defRPr>
             </a:lvl6pPr>
             <a:lvl7pPr>
+              <a:buNone/>
               <a:defRPr sz="1950" b="1">
                 <a:solidFill>
                   <a:srgbClr val="0E7267"/>
@@ -12004,6 +12600,7 @@
               </a:defRPr>
             </a:lvl7pPr>
             <a:lvl8pPr>
+              <a:buNone/>
               <a:defRPr sz="1950" b="1">
                 <a:solidFill>
                   <a:srgbClr val="0E7267"/>
@@ -12014,6 +12611,7 @@
               </a:defRPr>
             </a:lvl8pPr>
             <a:lvl9pPr>
+              <a:buNone/>
               <a:defRPr sz="1950" b="1">
                 <a:solidFill>
                   <a:srgbClr val="0E7267"/>
@@ -12026,6 +12624,7 @@
           </a:lstStyle>
           <a:p xmlns:a="http://schemas.openxmlformats.org/drawingml/2006/main">
             <a:pPr>
+              <a:buNone/>
               <a:defRPr sz="1950" b="1">
                 <a:solidFill>
                   <a:srgbClr val="0E7267"/>
@@ -12044,7 +12643,7 @@
                 <a:ea typeface="Apple SD Gothic Neo"/>
                 <a:cs typeface="Apple SD Gothic Neo"/>
               </a:rPr>
-              <a:t>최종 수정본</a:t>
+              <a:t>최종 개선본</a:t>
             </a:r>
           </a:p>
         </p:txBody>
@@ -12090,6 +12689,7 @@
               </a:defRPr>
             </a:defPPr>
             <a:lvl1pPr>
+              <a:buNone/>
               <a:defRPr sz="2475" b="1">
                 <a:solidFill>
                   <a:srgbClr val="0E7267"/>
@@ -12100,6 +12700,7 @@
               </a:defRPr>
             </a:lvl1pPr>
             <a:lvl2pPr>
+              <a:buNone/>
               <a:defRPr sz="2475" b="1">
                 <a:solidFill>
                   <a:srgbClr val="0E7267"/>
@@ -12110,6 +12711,7 @@
               </a:defRPr>
             </a:lvl2pPr>
             <a:lvl3pPr>
+              <a:buNone/>
               <a:defRPr sz="2475" b="1">
                 <a:solidFill>
                   <a:srgbClr val="0E7267"/>
@@ -12120,6 +12722,7 @@
               </a:defRPr>
             </a:lvl3pPr>
             <a:lvl4pPr>
+              <a:buNone/>
               <a:defRPr sz="2475" b="1">
                 <a:solidFill>
                   <a:srgbClr val="0E7267"/>
@@ -12130,6 +12733,7 @@
               </a:defRPr>
             </a:lvl4pPr>
             <a:lvl5pPr>
+              <a:buNone/>
               <a:defRPr sz="2475" b="1">
                 <a:solidFill>
                   <a:srgbClr val="0E7267"/>
@@ -12140,6 +12744,7 @@
               </a:defRPr>
             </a:lvl5pPr>
             <a:lvl6pPr>
+              <a:buNone/>
               <a:defRPr sz="2475" b="1">
                 <a:solidFill>
                   <a:srgbClr val="0E7267"/>
@@ -12150,6 +12755,7 @@
               </a:defRPr>
             </a:lvl6pPr>
             <a:lvl7pPr>
+              <a:buNone/>
               <a:defRPr sz="2475" b="1">
                 <a:solidFill>
                   <a:srgbClr val="0E7267"/>
@@ -12160,6 +12766,7 @@
               </a:defRPr>
             </a:lvl7pPr>
             <a:lvl8pPr>
+              <a:buNone/>
               <a:defRPr sz="2475" b="1">
                 <a:solidFill>
                   <a:srgbClr val="0E7267"/>
@@ -12170,6 +12777,7 @@
               </a:defRPr>
             </a:lvl8pPr>
             <a:lvl9pPr>
+              <a:buNone/>
               <a:defRPr sz="2475" b="1">
                 <a:solidFill>
                   <a:srgbClr val="0E7267"/>
@@ -12182,6 +12790,7 @@
           </a:lstStyle>
           <a:p xmlns:a="http://schemas.openxmlformats.org/drawingml/2006/main">
             <a:pPr>
+              <a:buNone/>
               <a:defRPr sz="2475" b="1">
                 <a:solidFill>
                   <a:srgbClr val="0E7267"/>
@@ -12200,7 +12809,7 @@
                 <a:ea typeface="Apple SD Gothic Neo"/>
                 <a:cs typeface="Apple SD Gothic Neo"/>
               </a:rPr>
-              <a:t>관련된 세 문서 확보</a:t>
+              <a:t>증상별 관련 런북 검색</a:t>
             </a:r>
           </a:p>
         </p:txBody>
@@ -12246,6 +12855,7 @@
               </a:defRPr>
             </a:defPPr>
             <a:lvl1pPr>
+              <a:buNone/>
               <a:defRPr sz="1875" b="0">
                 <a:solidFill>
                   <a:srgbClr val="253650"/>
@@ -12256,6 +12866,7 @@
               </a:defRPr>
             </a:lvl1pPr>
             <a:lvl2pPr>
+              <a:buNone/>
               <a:defRPr sz="1875" b="0">
                 <a:solidFill>
                   <a:srgbClr val="253650"/>
@@ -12266,6 +12877,7 @@
               </a:defRPr>
             </a:lvl2pPr>
             <a:lvl3pPr>
+              <a:buNone/>
               <a:defRPr sz="1875" b="0">
                 <a:solidFill>
                   <a:srgbClr val="253650"/>
@@ -12276,6 +12888,7 @@
               </a:defRPr>
             </a:lvl3pPr>
             <a:lvl4pPr>
+              <a:buNone/>
               <a:defRPr sz="1875" b="0">
                 <a:solidFill>
                   <a:srgbClr val="253650"/>
@@ -12286,6 +12899,7 @@
               </a:defRPr>
             </a:lvl4pPr>
             <a:lvl5pPr>
+              <a:buNone/>
               <a:defRPr sz="1875" b="0">
                 <a:solidFill>
                   <a:srgbClr val="253650"/>
@@ -12296,6 +12910,7 @@
               </a:defRPr>
             </a:lvl5pPr>
             <a:lvl6pPr>
+              <a:buNone/>
               <a:defRPr sz="1875" b="0">
                 <a:solidFill>
                   <a:srgbClr val="253650"/>
@@ -12306,6 +12921,7 @@
               </a:defRPr>
             </a:lvl6pPr>
             <a:lvl7pPr>
+              <a:buNone/>
               <a:defRPr sz="1875" b="0">
                 <a:solidFill>
                   <a:srgbClr val="253650"/>
@@ -12316,6 +12932,7 @@
               </a:defRPr>
             </a:lvl7pPr>
             <a:lvl8pPr>
+              <a:buNone/>
               <a:defRPr sz="1875" b="0">
                 <a:solidFill>
                   <a:srgbClr val="253650"/>
@@ -12326,6 +12943,7 @@
               </a:defRPr>
             </a:lvl8pPr>
             <a:lvl9pPr>
+              <a:buNone/>
               <a:defRPr sz="1875" b="0">
                 <a:solidFill>
                   <a:srgbClr val="253650"/>
@@ -12338,6 +12956,7 @@
           </a:lstStyle>
           <a:p xmlns:a="http://schemas.openxmlformats.org/drawingml/2006/main">
             <a:pPr>
+              <a:buNone/>
               <a:defRPr sz="1875" b="0">
                 <a:solidFill>
                   <a:srgbClr val="253650"/>
@@ -12356,11 +12975,12 @@
                 <a:ea typeface="Apple SD Gothic Neo"/>
                 <a:cs typeface="Apple SD Gothic Neo"/>
               </a:rPr>
-              <a:t>전체 여섯 후보의 관련성·인용을 검사하고</a:t>
+              <a:t>질문·서비스별 알림으로 검색하고</a:t>
             </a:r>
           </a:p>
           <a:p xmlns:a="http://schemas.openxmlformats.org/drawingml/2006/main">
             <a:pPr>
+              <a:buNone/>
               <a:defRPr sz="1875" b="0">
                 <a:solidFill>
                   <a:srgbClr val="253650"/>
@@ -12379,7 +12999,7 @@
                 <a:ea typeface="Apple SD Gothic Neo"/>
                 <a:cs typeface="Apple SD Gothic Neo"/>
               </a:rPr>
-              <a:t>중복만 합칩니다.</a:t>
+              <a:t>선택한 근거의 인용·원문을 확인합니다.</a:t>
             </a:r>
           </a:p>
         </p:txBody>
@@ -12425,6 +13045,7 @@
               </a:defRPr>
             </a:defPPr>
             <a:lvl1pPr>
+              <a:buNone/>
               <a:defRPr sz="1800" b="1">
                 <a:solidFill>
                   <a:srgbClr val="235ECB"/>
@@ -12435,6 +13056,7 @@
               </a:defRPr>
             </a:lvl1pPr>
             <a:lvl2pPr>
+              <a:buNone/>
               <a:defRPr sz="1800" b="1">
                 <a:solidFill>
                   <a:srgbClr val="235ECB"/>
@@ -12445,6 +13067,7 @@
               </a:defRPr>
             </a:lvl2pPr>
             <a:lvl3pPr>
+              <a:buNone/>
               <a:defRPr sz="1800" b="1">
                 <a:solidFill>
                   <a:srgbClr val="235ECB"/>
@@ -12455,6 +13078,7 @@
               </a:defRPr>
             </a:lvl3pPr>
             <a:lvl4pPr>
+              <a:buNone/>
               <a:defRPr sz="1800" b="1">
                 <a:solidFill>
                   <a:srgbClr val="235ECB"/>
@@ -12465,6 +13089,7 @@
               </a:defRPr>
             </a:lvl4pPr>
             <a:lvl5pPr>
+              <a:buNone/>
               <a:defRPr sz="1800" b="1">
                 <a:solidFill>
                   <a:srgbClr val="235ECB"/>
@@ -12475,6 +13100,7 @@
               </a:defRPr>
             </a:lvl5pPr>
             <a:lvl6pPr>
+              <a:buNone/>
               <a:defRPr sz="1800" b="1">
                 <a:solidFill>
                   <a:srgbClr val="235ECB"/>
@@ -12485,6 +13111,7 @@
               </a:defRPr>
             </a:lvl6pPr>
             <a:lvl7pPr>
+              <a:buNone/>
               <a:defRPr sz="1800" b="1">
                 <a:solidFill>
                   <a:srgbClr val="235ECB"/>
@@ -12495,6 +13122,7 @@
               </a:defRPr>
             </a:lvl7pPr>
             <a:lvl8pPr>
+              <a:buNone/>
               <a:defRPr sz="1800" b="1">
                 <a:solidFill>
                   <a:srgbClr val="235ECB"/>
@@ -12505,6 +13133,7 @@
               </a:defRPr>
             </a:lvl8pPr>
             <a:lvl9pPr>
+              <a:buNone/>
               <a:defRPr sz="1800" b="1">
                 <a:solidFill>
                   <a:srgbClr val="235ECB"/>
@@ -12517,6 +13146,7 @@
           </a:lstStyle>
           <a:p xmlns:a="http://schemas.openxmlformats.org/drawingml/2006/main">
             <a:pPr>
+              <a:buNone/>
               <a:defRPr sz="1800" b="1">
                 <a:solidFill>
                   <a:srgbClr val="235ECB"/>
@@ -12535,7 +13165,7 @@
                 <a:ea typeface="Apple SD Gothic Neo"/>
                 <a:cs typeface="Apple SD Gothic Neo"/>
               </a:rPr>
-              <a:t>별도 실제 사례 F08: 세 서비스 조회와 CPU·메모리·디스크 런북을 확인합니다.</a:t>
+              <a:t>최종본 F08 실제 실행: 세 서비스와 CPU·메모리·디스크 런북 3개 확인</a:t>
             </a:r>
           </a:p>
         </p:txBody>
@@ -12640,6 +13270,7 @@
               </a:defRPr>
             </a:defPPr>
             <a:lvl1pPr>
+              <a:buNone/>
               <a:defRPr sz="1275" b="1">
                 <a:solidFill>
                   <a:srgbClr val="235ECB"/>
@@ -12650,6 +13281,7 @@
               </a:defRPr>
             </a:lvl1pPr>
             <a:lvl2pPr>
+              <a:buNone/>
               <a:defRPr sz="1275" b="1">
                 <a:solidFill>
                   <a:srgbClr val="235ECB"/>
@@ -12660,6 +13292,7 @@
               </a:defRPr>
             </a:lvl2pPr>
             <a:lvl3pPr>
+              <a:buNone/>
               <a:defRPr sz="1275" b="1">
                 <a:solidFill>
                   <a:srgbClr val="235ECB"/>
@@ -12670,6 +13303,7 @@
               </a:defRPr>
             </a:lvl3pPr>
             <a:lvl4pPr>
+              <a:buNone/>
               <a:defRPr sz="1275" b="1">
                 <a:solidFill>
                   <a:srgbClr val="235ECB"/>
@@ -12680,6 +13314,7 @@
               </a:defRPr>
             </a:lvl4pPr>
             <a:lvl5pPr>
+              <a:buNone/>
               <a:defRPr sz="1275" b="1">
                 <a:solidFill>
                   <a:srgbClr val="235ECB"/>
@@ -12690,6 +13325,7 @@
               </a:defRPr>
             </a:lvl5pPr>
             <a:lvl6pPr>
+              <a:buNone/>
               <a:defRPr sz="1275" b="1">
                 <a:solidFill>
                   <a:srgbClr val="235ECB"/>
@@ -12700,6 +13336,7 @@
               </a:defRPr>
             </a:lvl6pPr>
             <a:lvl7pPr>
+              <a:buNone/>
               <a:defRPr sz="1275" b="1">
                 <a:solidFill>
                   <a:srgbClr val="235ECB"/>
@@ -12710,6 +13347,7 @@
               </a:defRPr>
             </a:lvl7pPr>
             <a:lvl8pPr>
+              <a:buNone/>
               <a:defRPr sz="1275" b="1">
                 <a:solidFill>
                   <a:srgbClr val="235ECB"/>
@@ -12720,6 +13358,7 @@
               </a:defRPr>
             </a:lvl8pPr>
             <a:lvl9pPr>
+              <a:buNone/>
               <a:defRPr sz="1275" b="1">
                 <a:solidFill>
                   <a:srgbClr val="235ECB"/>
@@ -12732,6 +13371,7 @@
           </a:lstStyle>
           <a:p xmlns:a="http://schemas.openxmlformats.org/drawingml/2006/main">
             <a:pPr>
+              <a:buNone/>
               <a:defRPr sz="1275" b="1">
                 <a:solidFill>
                   <a:srgbClr val="235ECB"/>
@@ -12796,6 +13436,7 @@
               </a:defRPr>
             </a:defPPr>
             <a:lvl1pPr>
+              <a:buNone/>
               <a:defRPr sz="2850" b="1">
                 <a:solidFill>
                   <a:srgbClr val="172B4D"/>
@@ -12806,6 +13447,7 @@
               </a:defRPr>
             </a:lvl1pPr>
             <a:lvl2pPr>
+              <a:buNone/>
               <a:defRPr sz="2850" b="1">
                 <a:solidFill>
                   <a:srgbClr val="172B4D"/>
@@ -12816,6 +13458,7 @@
               </a:defRPr>
             </a:lvl2pPr>
             <a:lvl3pPr>
+              <a:buNone/>
               <a:defRPr sz="2850" b="1">
                 <a:solidFill>
                   <a:srgbClr val="172B4D"/>
@@ -12826,6 +13469,7 @@
               </a:defRPr>
             </a:lvl3pPr>
             <a:lvl4pPr>
+              <a:buNone/>
               <a:defRPr sz="2850" b="1">
                 <a:solidFill>
                   <a:srgbClr val="172B4D"/>
@@ -12836,6 +13480,7 @@
               </a:defRPr>
             </a:lvl4pPr>
             <a:lvl5pPr>
+              <a:buNone/>
               <a:defRPr sz="2850" b="1">
                 <a:solidFill>
                   <a:srgbClr val="172B4D"/>
@@ -12846,6 +13491,7 @@
               </a:defRPr>
             </a:lvl5pPr>
             <a:lvl6pPr>
+              <a:buNone/>
               <a:defRPr sz="2850" b="1">
                 <a:solidFill>
                   <a:srgbClr val="172B4D"/>
@@ -12856,6 +13502,7 @@
               </a:defRPr>
             </a:lvl6pPr>
             <a:lvl7pPr>
+              <a:buNone/>
               <a:defRPr sz="2850" b="1">
                 <a:solidFill>
                   <a:srgbClr val="172B4D"/>
@@ -12866,6 +13513,7 @@
               </a:defRPr>
             </a:lvl7pPr>
             <a:lvl8pPr>
+              <a:buNone/>
               <a:defRPr sz="2850" b="1">
                 <a:solidFill>
                   <a:srgbClr val="172B4D"/>
@@ -12876,6 +13524,7 @@
               </a:defRPr>
             </a:lvl8pPr>
             <a:lvl9pPr>
+              <a:buNone/>
               <a:defRPr sz="2850" b="1">
                 <a:solidFill>
                   <a:srgbClr val="172B4D"/>
@@ -12888,6 +13537,7 @@
           </a:lstStyle>
           <a:p xmlns:a="http://schemas.openxmlformats.org/drawingml/2006/main">
             <a:pPr>
+              <a:buNone/>
               <a:defRPr sz="2850" b="1">
                 <a:solidFill>
                   <a:srgbClr val="172B4D"/>
@@ -12906,7 +13556,7 @@
                 <a:ea typeface="Apple SD Gothic Neo"/>
                 <a:cs typeface="Apple SD Gothic Neo"/>
               </a:rPr>
-              <a:t>‘그 서비스’도 현재 상태를 다시 조회합니다</a:t>
+              <a:t>저장된 대화를 운영 조사에 연결했습니다</a:t>
             </a:r>
           </a:p>
         </p:txBody>
@@ -12982,6 +13632,7 @@
               </a:defRPr>
             </a:defPPr>
             <a:lvl1pPr>
+              <a:buNone/>
               <a:defRPr sz="975" b="0">
                 <a:solidFill>
                   <a:srgbClr val="5D6D84"/>
@@ -12992,6 +13643,7 @@
               </a:defRPr>
             </a:lvl1pPr>
             <a:lvl2pPr>
+              <a:buNone/>
               <a:defRPr sz="975" b="0">
                 <a:solidFill>
                   <a:srgbClr val="5D6D84"/>
@@ -13002,6 +13654,7 @@
               </a:defRPr>
             </a:lvl2pPr>
             <a:lvl3pPr>
+              <a:buNone/>
               <a:defRPr sz="975" b="0">
                 <a:solidFill>
                   <a:srgbClr val="5D6D84"/>
@@ -13012,6 +13665,7 @@
               </a:defRPr>
             </a:lvl3pPr>
             <a:lvl4pPr>
+              <a:buNone/>
               <a:defRPr sz="975" b="0">
                 <a:solidFill>
                   <a:srgbClr val="5D6D84"/>
@@ -13022,6 +13676,7 @@
               </a:defRPr>
             </a:lvl4pPr>
             <a:lvl5pPr>
+              <a:buNone/>
               <a:defRPr sz="975" b="0">
                 <a:solidFill>
                   <a:srgbClr val="5D6D84"/>
@@ -13032,6 +13687,7 @@
               </a:defRPr>
             </a:lvl5pPr>
             <a:lvl6pPr>
+              <a:buNone/>
               <a:defRPr sz="975" b="0">
                 <a:solidFill>
                   <a:srgbClr val="5D6D84"/>
@@ -13042,6 +13698,7 @@
               </a:defRPr>
             </a:lvl6pPr>
             <a:lvl7pPr>
+              <a:buNone/>
               <a:defRPr sz="975" b="0">
                 <a:solidFill>
                   <a:srgbClr val="5D6D84"/>
@@ -13052,6 +13709,7 @@
               </a:defRPr>
             </a:lvl7pPr>
             <a:lvl8pPr>
+              <a:buNone/>
               <a:defRPr sz="975" b="0">
                 <a:solidFill>
                   <a:srgbClr val="5D6D84"/>
@@ -13062,6 +13720,7 @@
               </a:defRPr>
             </a:lvl8pPr>
             <a:lvl9pPr>
+              <a:buNone/>
               <a:defRPr sz="975" b="0">
                 <a:solidFill>
                   <a:srgbClr val="5D6D84"/>
@@ -13074,6 +13733,7 @@
           </a:lstStyle>
           <a:p xmlns:a="http://schemas.openxmlformats.org/drawingml/2006/main">
             <a:pPr>
+              <a:buNone/>
               <a:defRPr sz="975" b="0">
                 <a:solidFill>
                   <a:srgbClr val="5D6D84"/>
@@ -13092,7 +13752,7 @@
                 <a:ea typeface="Apple SD Gothic Neo"/>
                 <a:cs typeface="Apple SD Gothic Neo"/>
               </a:rPr>
-              <a:t>근거: resolve_followup(), route_node() / F02·F05·F06·F07</a:t>
+              <a:t>근거: 원본 server.py·chat_answer_node() / 최종 request_context.py·request_ui.js</a:t>
             </a:r>
           </a:p>
         </p:txBody>
@@ -13138,6 +13798,7 @@
               </a:defRPr>
             </a:defPPr>
             <a:lvl1pPr>
+              <a:buNone/>
               <a:defRPr sz="1125" b="1">
                 <a:solidFill>
                   <a:srgbClr val="5D6D84"/>
@@ -13148,6 +13809,7 @@
               </a:defRPr>
             </a:lvl1pPr>
             <a:lvl2pPr>
+              <a:buNone/>
               <a:defRPr sz="1125" b="1">
                 <a:solidFill>
                   <a:srgbClr val="5D6D84"/>
@@ -13158,6 +13820,7 @@
               </a:defRPr>
             </a:lvl2pPr>
             <a:lvl3pPr>
+              <a:buNone/>
               <a:defRPr sz="1125" b="1">
                 <a:solidFill>
                   <a:srgbClr val="5D6D84"/>
@@ -13168,6 +13831,7 @@
               </a:defRPr>
             </a:lvl3pPr>
             <a:lvl4pPr>
+              <a:buNone/>
               <a:defRPr sz="1125" b="1">
                 <a:solidFill>
                   <a:srgbClr val="5D6D84"/>
@@ -13178,6 +13842,7 @@
               </a:defRPr>
             </a:lvl4pPr>
             <a:lvl5pPr>
+              <a:buNone/>
               <a:defRPr sz="1125" b="1">
                 <a:solidFill>
                   <a:srgbClr val="5D6D84"/>
@@ -13188,6 +13853,7 @@
               </a:defRPr>
             </a:lvl5pPr>
             <a:lvl6pPr>
+              <a:buNone/>
               <a:defRPr sz="1125" b="1">
                 <a:solidFill>
                   <a:srgbClr val="5D6D84"/>
@@ -13198,6 +13864,7 @@
               </a:defRPr>
             </a:lvl6pPr>
             <a:lvl7pPr>
+              <a:buNone/>
               <a:defRPr sz="1125" b="1">
                 <a:solidFill>
                   <a:srgbClr val="5D6D84"/>
@@ -13208,6 +13875,7 @@
               </a:defRPr>
             </a:lvl7pPr>
             <a:lvl8pPr>
+              <a:buNone/>
               <a:defRPr sz="1125" b="1">
                 <a:solidFill>
                   <a:srgbClr val="5D6D84"/>
@@ -13218,6 +13886,7 @@
               </a:defRPr>
             </a:lvl8pPr>
             <a:lvl9pPr>
+              <a:buNone/>
               <a:defRPr sz="1125" b="1">
                 <a:solidFill>
                   <a:srgbClr val="5D6D84"/>
@@ -13230,6 +13899,7 @@
           </a:lstStyle>
           <a:p xmlns:a="http://schemas.openxmlformats.org/drawingml/2006/main">
             <a:pPr>
+              <a:buNone/>
               <a:defRPr sz="1125" b="1">
                 <a:solidFill>
                   <a:srgbClr val="5D6D84"/>
@@ -13354,6 +14024,7 @@
               </a:defRPr>
             </a:defPPr>
             <a:lvl1pPr>
+              <a:buNone/>
               <a:defRPr sz="2100" b="1">
                 <a:solidFill>
                   <a:srgbClr val="172B4D"/>
@@ -13364,6 +14035,7 @@
               </a:defRPr>
             </a:lvl1pPr>
             <a:lvl2pPr>
+              <a:buNone/>
               <a:defRPr sz="2100" b="1">
                 <a:solidFill>
                   <a:srgbClr val="172B4D"/>
@@ -13374,6 +14046,7 @@
               </a:defRPr>
             </a:lvl2pPr>
             <a:lvl3pPr>
+              <a:buNone/>
               <a:defRPr sz="2100" b="1">
                 <a:solidFill>
                   <a:srgbClr val="172B4D"/>
@@ -13384,6 +14057,7 @@
               </a:defRPr>
             </a:lvl3pPr>
             <a:lvl4pPr>
+              <a:buNone/>
               <a:defRPr sz="2100" b="1">
                 <a:solidFill>
                   <a:srgbClr val="172B4D"/>
@@ -13394,6 +14068,7 @@
               </a:defRPr>
             </a:lvl4pPr>
             <a:lvl5pPr>
+              <a:buNone/>
               <a:defRPr sz="2100" b="1">
                 <a:solidFill>
                   <a:srgbClr val="172B4D"/>
@@ -13404,6 +14079,7 @@
               </a:defRPr>
             </a:lvl5pPr>
             <a:lvl6pPr>
+              <a:buNone/>
               <a:defRPr sz="2100" b="1">
                 <a:solidFill>
                   <a:srgbClr val="172B4D"/>
@@ -13414,6 +14090,7 @@
               </a:defRPr>
             </a:lvl6pPr>
             <a:lvl7pPr>
+              <a:buNone/>
               <a:defRPr sz="2100" b="1">
                 <a:solidFill>
                   <a:srgbClr val="172B4D"/>
@@ -13424,6 +14101,7 @@
               </a:defRPr>
             </a:lvl7pPr>
             <a:lvl8pPr>
+              <a:buNone/>
               <a:defRPr sz="2100" b="1">
                 <a:solidFill>
                   <a:srgbClr val="172B4D"/>
@@ -13434,6 +14112,7 @@
               </a:defRPr>
             </a:lvl8pPr>
             <a:lvl9pPr>
+              <a:buNone/>
               <a:defRPr sz="2100" b="1">
                 <a:solidFill>
                   <a:srgbClr val="172B4D"/>
@@ -13446,6 +14125,7 @@
           </a:lstStyle>
           <a:p xmlns:a="http://schemas.openxmlformats.org/drawingml/2006/main">
             <a:pPr>
+              <a:buNone/>
               <a:defRPr sz="2100" b="1">
                 <a:solidFill>
                   <a:srgbClr val="172B4D"/>
@@ -13464,7 +14144,7 @@
                 <a:ea typeface="Apple SD Gothic Neo"/>
                 <a:cs typeface="Apple SD Gothic Neo"/>
               </a:rPr>
-              <a:t>대상이 하나</a:t>
+              <a:t>기존: 대화 저장</a:t>
             </a:r>
           </a:p>
         </p:txBody>
@@ -13510,6 +14190,7 @@
               </a:defRPr>
             </a:defPPr>
             <a:lvl1pPr>
+              <a:buNone/>
               <a:defRPr sz="1800" b="0">
                 <a:solidFill>
                   <a:srgbClr val="253650"/>
@@ -13520,6 +14201,7 @@
               </a:defRPr>
             </a:lvl1pPr>
             <a:lvl2pPr>
+              <a:buNone/>
               <a:defRPr sz="1800" b="0">
                 <a:solidFill>
                   <a:srgbClr val="253650"/>
@@ -13530,6 +14212,7 @@
               </a:defRPr>
             </a:lvl2pPr>
             <a:lvl3pPr>
+              <a:buNone/>
               <a:defRPr sz="1800" b="0">
                 <a:solidFill>
                   <a:srgbClr val="253650"/>
@@ -13540,6 +14223,7 @@
               </a:defRPr>
             </a:lvl3pPr>
             <a:lvl4pPr>
+              <a:buNone/>
               <a:defRPr sz="1800" b="0">
                 <a:solidFill>
                   <a:srgbClr val="253650"/>
@@ -13550,6 +14234,7 @@
               </a:defRPr>
             </a:lvl4pPr>
             <a:lvl5pPr>
+              <a:buNone/>
               <a:defRPr sz="1800" b="0">
                 <a:solidFill>
                   <a:srgbClr val="253650"/>
@@ -13560,6 +14245,7 @@
               </a:defRPr>
             </a:lvl5pPr>
             <a:lvl6pPr>
+              <a:buNone/>
               <a:defRPr sz="1800" b="0">
                 <a:solidFill>
                   <a:srgbClr val="253650"/>
@@ -13570,6 +14256,7 @@
               </a:defRPr>
             </a:lvl6pPr>
             <a:lvl7pPr>
+              <a:buNone/>
               <a:defRPr sz="1800" b="0">
                 <a:solidFill>
                   <a:srgbClr val="253650"/>
@@ -13580,6 +14267,7 @@
               </a:defRPr>
             </a:lvl7pPr>
             <a:lvl8pPr>
+              <a:buNone/>
               <a:defRPr sz="1800" b="0">
                 <a:solidFill>
                   <a:srgbClr val="253650"/>
@@ -13590,6 +14278,7 @@
               </a:defRPr>
             </a:lvl8pPr>
             <a:lvl9pPr>
+              <a:buNone/>
               <a:defRPr sz="1800" b="0">
                 <a:solidFill>
                   <a:srgbClr val="253650"/>
@@ -13602,6 +14291,7 @@
           </a:lstStyle>
           <a:p xmlns:a="http://schemas.openxmlformats.org/drawingml/2006/main">
             <a:pPr>
+              <a:buNone/>
               <a:defRPr sz="1800" b="0">
                 <a:solidFill>
                   <a:srgbClr val="253650"/>
@@ -13620,11 +14310,12 @@
                 <a:ea typeface="Apple SD Gothic Neo"/>
                 <a:cs typeface="Apple SD Gothic Neo"/>
               </a:rPr>
-              <a:t>이전 사용자 메시지의 서비스 이름만 연결합니다.</a:t>
+              <a:t>SQLite로 대화를 저장하고</a:t>
             </a:r>
           </a:p>
           <a:p xmlns:a="http://schemas.openxmlformats.org/drawingml/2006/main">
             <a:pPr>
+              <a:buNone/>
               <a:defRPr sz="1800" b="0">
                 <a:solidFill>
                   <a:srgbClr val="253650"/>
@@ -13643,7 +14334,31 @@
                 <a:ea typeface="Apple SD Gothic Neo"/>
                 <a:cs typeface="Apple SD Gothic Neo"/>
               </a:rPr>
-              <a:t>예전 CPU·메모리는 새 근거로 복사하지 않습니다.</a:t>
+              <a:t>일반 대화에 이력을 전달했습니다.</a:t>
+            </a:r>
+          </a:p>
+          <a:p xmlns:a="http://schemas.openxmlformats.org/drawingml/2006/main">
+            <a:pPr>
+              <a:buNone/>
+              <a:defRPr sz="1800" b="0">
+                <a:solidFill>
+                  <a:srgbClr val="253650"/>
+                </a:solidFill>
+                <a:latin typeface="Apple SD Gothic Neo"/>
+                <a:ea typeface="Apple SD Gothic Neo"/>
+                <a:cs typeface="Apple SD Gothic Neo"/>
+              </a:defRPr>
+            </a:pPr>
+            <a:r>
+              <a:rPr sz="1800" b="0">
+                <a:solidFill>
+                  <a:srgbClr val="253650"/>
+                </a:solidFill>
+                <a:latin typeface="Apple SD Gothic Neo"/>
+                <a:ea typeface="Apple SD Gothic Neo"/>
+                <a:cs typeface="Apple SD Gothic Neo"/>
+              </a:rPr>
+              <a:t>운영 분류·계획은 현재 질문을 사용했습니다.</a:t>
             </a:r>
           </a:p>
         </p:txBody>
@@ -13749,6 +14464,7 @@
               </a:defRPr>
             </a:defPPr>
             <a:lvl1pPr>
+              <a:buNone/>
               <a:defRPr sz="2100" b="1">
                 <a:solidFill>
                   <a:srgbClr val="172B4D"/>
@@ -13759,6 +14475,7 @@
               </a:defRPr>
             </a:lvl1pPr>
             <a:lvl2pPr>
+              <a:buNone/>
               <a:defRPr sz="2100" b="1">
                 <a:solidFill>
                   <a:srgbClr val="172B4D"/>
@@ -13769,6 +14486,7 @@
               </a:defRPr>
             </a:lvl2pPr>
             <a:lvl3pPr>
+              <a:buNone/>
               <a:defRPr sz="2100" b="1">
                 <a:solidFill>
                   <a:srgbClr val="172B4D"/>
@@ -13779,6 +14497,7 @@
               </a:defRPr>
             </a:lvl3pPr>
             <a:lvl4pPr>
+              <a:buNone/>
               <a:defRPr sz="2100" b="1">
                 <a:solidFill>
                   <a:srgbClr val="172B4D"/>
@@ -13789,6 +14508,7 @@
               </a:defRPr>
             </a:lvl4pPr>
             <a:lvl5pPr>
+              <a:buNone/>
               <a:defRPr sz="2100" b="1">
                 <a:solidFill>
                   <a:srgbClr val="172B4D"/>
@@ -13799,6 +14519,7 @@
               </a:defRPr>
             </a:lvl5pPr>
             <a:lvl6pPr>
+              <a:buNone/>
               <a:defRPr sz="2100" b="1">
                 <a:solidFill>
                   <a:srgbClr val="172B4D"/>
@@ -13809,6 +14530,7 @@
               </a:defRPr>
             </a:lvl6pPr>
             <a:lvl7pPr>
+              <a:buNone/>
               <a:defRPr sz="2100" b="1">
                 <a:solidFill>
                   <a:srgbClr val="172B4D"/>
@@ -13819,6 +14541,7 @@
               </a:defRPr>
             </a:lvl7pPr>
             <a:lvl8pPr>
+              <a:buNone/>
               <a:defRPr sz="2100" b="1">
                 <a:solidFill>
                   <a:srgbClr val="172B4D"/>
@@ -13829,6 +14552,7 @@
               </a:defRPr>
             </a:lvl8pPr>
             <a:lvl9pPr>
+              <a:buNone/>
               <a:defRPr sz="2100" b="1">
                 <a:solidFill>
                   <a:srgbClr val="172B4D"/>
@@ -13841,6 +14565,7 @@
           </a:lstStyle>
           <a:p xmlns:a="http://schemas.openxmlformats.org/drawingml/2006/main">
             <a:pPr>
+              <a:buNone/>
               <a:defRPr sz="2100" b="1">
                 <a:solidFill>
                   <a:srgbClr val="172B4D"/>
@@ -13859,7 +14584,7 @@
                 <a:ea typeface="Apple SD Gothic Neo"/>
                 <a:cs typeface="Apple SD Gothic Neo"/>
               </a:rPr>
-              <a:t>대상이 모호함</a:t>
+              <a:t>개선: 대상 연결</a:t>
             </a:r>
           </a:p>
         </p:txBody>
@@ -13905,6 +14630,7 @@
               </a:defRPr>
             </a:defPPr>
             <a:lvl1pPr>
+              <a:buNone/>
               <a:defRPr sz="1800" b="0">
                 <a:solidFill>
                   <a:srgbClr val="253650"/>
@@ -13915,6 +14641,7 @@
               </a:defRPr>
             </a:lvl1pPr>
             <a:lvl2pPr>
+              <a:buNone/>
               <a:defRPr sz="1800" b="0">
                 <a:solidFill>
                   <a:srgbClr val="253650"/>
@@ -13925,6 +14652,7 @@
               </a:defRPr>
             </a:lvl2pPr>
             <a:lvl3pPr>
+              <a:buNone/>
               <a:defRPr sz="1800" b="0">
                 <a:solidFill>
                   <a:srgbClr val="253650"/>
@@ -13935,6 +14663,7 @@
               </a:defRPr>
             </a:lvl3pPr>
             <a:lvl4pPr>
+              <a:buNone/>
               <a:defRPr sz="1800" b="0">
                 <a:solidFill>
                   <a:srgbClr val="253650"/>
@@ -13945,6 +14674,7 @@
               </a:defRPr>
             </a:lvl4pPr>
             <a:lvl5pPr>
+              <a:buNone/>
               <a:defRPr sz="1800" b="0">
                 <a:solidFill>
                   <a:srgbClr val="253650"/>
@@ -13955,6 +14685,7 @@
               </a:defRPr>
             </a:lvl5pPr>
             <a:lvl6pPr>
+              <a:buNone/>
               <a:defRPr sz="1800" b="0">
                 <a:solidFill>
                   <a:srgbClr val="253650"/>
@@ -13965,6 +14696,7 @@
               </a:defRPr>
             </a:lvl6pPr>
             <a:lvl7pPr>
+              <a:buNone/>
               <a:defRPr sz="1800" b="0">
                 <a:solidFill>
                   <a:srgbClr val="253650"/>
@@ -13975,6 +14707,7 @@
               </a:defRPr>
             </a:lvl7pPr>
             <a:lvl8pPr>
+              <a:buNone/>
               <a:defRPr sz="1800" b="0">
                 <a:solidFill>
                   <a:srgbClr val="253650"/>
@@ -13985,6 +14718,7 @@
               </a:defRPr>
             </a:lvl8pPr>
             <a:lvl9pPr>
+              <a:buNone/>
               <a:defRPr sz="1800" b="0">
                 <a:solidFill>
                   <a:srgbClr val="253650"/>
@@ -13997,6 +14731,7 @@
           </a:lstStyle>
           <a:p xmlns:a="http://schemas.openxmlformats.org/drawingml/2006/main">
             <a:pPr>
+              <a:buNone/>
               <a:defRPr sz="1800" b="0">
                 <a:solidFill>
                   <a:srgbClr val="253650"/>
@@ -14015,11 +14750,12 @@
                 <a:ea typeface="Apple SD Gothic Neo"/>
                 <a:cs typeface="Apple SD Gothic Neo"/>
               </a:rPr>
-              <a:t>두 서비스를 말한 뒤 ‘그 서비스’라고 하면 이름을 되묻습니다.</a:t>
+              <a:t>사용자가 말한 서비스 이름만 연결합니다.</a:t>
             </a:r>
           </a:p>
           <a:p xmlns:a="http://schemas.openxmlformats.org/drawingml/2006/main">
             <a:pPr>
+              <a:buNone/>
               <a:defRPr sz="1800" b="0">
                 <a:solidFill>
                   <a:srgbClr val="253650"/>
@@ -14038,7 +14774,31 @@
                 <a:ea typeface="Apple SD Gothic Neo"/>
                 <a:cs typeface="Apple SD Gothic Neo"/>
               </a:rPr>
-              <a:t>임의로 조회하지 않습니다.</a:t>
+              <a:t>대상이 모호하면 되묻고,</a:t>
+            </a:r>
+          </a:p>
+          <a:p xmlns:a="http://schemas.openxmlformats.org/drawingml/2006/main">
+            <a:pPr>
+              <a:buNone/>
+              <a:defRPr sz="1800" b="0">
+                <a:solidFill>
+                  <a:srgbClr val="253650"/>
+                </a:solidFill>
+                <a:latin typeface="Apple SD Gothic Neo"/>
+                <a:ea typeface="Apple SD Gothic Neo"/>
+                <a:cs typeface="Apple SD Gothic Neo"/>
+              </a:defRPr>
+            </a:pPr>
+            <a:r>
+              <a:rPr sz="1800" b="0">
+                <a:solidFill>
+                  <a:srgbClr val="253650"/>
+                </a:solidFill>
+                <a:latin typeface="Apple SD Gothic Neo"/>
+                <a:ea typeface="Apple SD Gothic Neo"/>
+                <a:cs typeface="Apple SD Gothic Neo"/>
+              </a:rPr>
+              <a:t>확인되면 현재 지표를 새로 조회합니다.</a:t>
             </a:r>
           </a:p>
         </p:txBody>
@@ -14144,6 +14904,7 @@
               </a:defRPr>
             </a:defPPr>
             <a:lvl1pPr>
+              <a:buNone/>
               <a:defRPr sz="2100" b="1">
                 <a:solidFill>
                   <a:srgbClr val="172B4D"/>
@@ -14154,6 +14915,7 @@
               </a:defRPr>
             </a:lvl1pPr>
             <a:lvl2pPr>
+              <a:buNone/>
               <a:defRPr sz="2100" b="1">
                 <a:solidFill>
                   <a:srgbClr val="172B4D"/>
@@ -14164,6 +14926,7 @@
               </a:defRPr>
             </a:lvl2pPr>
             <a:lvl3pPr>
+              <a:buNone/>
               <a:defRPr sz="2100" b="1">
                 <a:solidFill>
                   <a:srgbClr val="172B4D"/>
@@ -14174,6 +14937,7 @@
               </a:defRPr>
             </a:lvl3pPr>
             <a:lvl4pPr>
+              <a:buNone/>
               <a:defRPr sz="2100" b="1">
                 <a:solidFill>
                   <a:srgbClr val="172B4D"/>
@@ -14184,6 +14948,7 @@
               </a:defRPr>
             </a:lvl4pPr>
             <a:lvl5pPr>
+              <a:buNone/>
               <a:defRPr sz="2100" b="1">
                 <a:solidFill>
                   <a:srgbClr val="172B4D"/>
@@ -14194,6 +14959,7 @@
               </a:defRPr>
             </a:lvl5pPr>
             <a:lvl6pPr>
+              <a:buNone/>
               <a:defRPr sz="2100" b="1">
                 <a:solidFill>
                   <a:srgbClr val="172B4D"/>
@@ -14204,6 +14970,7 @@
               </a:defRPr>
             </a:lvl6pPr>
             <a:lvl7pPr>
+              <a:buNone/>
               <a:defRPr sz="2100" b="1">
                 <a:solidFill>
                   <a:srgbClr val="172B4D"/>
@@ -14214,6 +14981,7 @@
               </a:defRPr>
             </a:lvl7pPr>
             <a:lvl8pPr>
+              <a:buNone/>
               <a:defRPr sz="2100" b="1">
                 <a:solidFill>
                   <a:srgbClr val="172B4D"/>
@@ -14224,6 +14992,7 @@
               </a:defRPr>
             </a:lvl8pPr>
             <a:lvl9pPr>
+              <a:buNone/>
               <a:defRPr sz="2100" b="1">
                 <a:solidFill>
                   <a:srgbClr val="172B4D"/>
@@ -14236,6 +15005,7 @@
           </a:lstStyle>
           <a:p xmlns:a="http://schemas.openxmlformats.org/drawingml/2006/main">
             <a:pPr>
+              <a:buNone/>
               <a:defRPr sz="2100" b="1">
                 <a:solidFill>
                   <a:srgbClr val="172B4D"/>
@@ -14254,7 +15024,7 @@
                 <a:ea typeface="Apple SD Gothic Neo"/>
                 <a:cs typeface="Apple SD Gothic Neo"/>
               </a:rPr>
-              <a:t>조회 경로 보장</a:t>
+              <a:t>개선: 화면 구분</a:t>
             </a:r>
           </a:p>
         </p:txBody>
@@ -14300,6 +15070,7 @@
               </a:defRPr>
             </a:defPPr>
             <a:lvl1pPr>
+              <a:buNone/>
               <a:defRPr sz="1800" b="0">
                 <a:solidFill>
                   <a:srgbClr val="253650"/>
@@ -14310,6 +15081,7 @@
               </a:defRPr>
             </a:lvl1pPr>
             <a:lvl2pPr>
+              <a:buNone/>
               <a:defRPr sz="1800" b="0">
                 <a:solidFill>
                   <a:srgbClr val="253650"/>
@@ -14320,6 +15092,7 @@
               </a:defRPr>
             </a:lvl2pPr>
             <a:lvl3pPr>
+              <a:buNone/>
               <a:defRPr sz="1800" b="0">
                 <a:solidFill>
                   <a:srgbClr val="253650"/>
@@ -14330,6 +15103,7 @@
               </a:defRPr>
             </a:lvl3pPr>
             <a:lvl4pPr>
+              <a:buNone/>
               <a:defRPr sz="1800" b="0">
                 <a:solidFill>
                   <a:srgbClr val="253650"/>
@@ -14340,6 +15114,7 @@
               </a:defRPr>
             </a:lvl4pPr>
             <a:lvl5pPr>
+              <a:buNone/>
               <a:defRPr sz="1800" b="0">
                 <a:solidFill>
                   <a:srgbClr val="253650"/>
@@ -14350,6 +15125,7 @@
               </a:defRPr>
             </a:lvl5pPr>
             <a:lvl6pPr>
+              <a:buNone/>
               <a:defRPr sz="1800" b="0">
                 <a:solidFill>
                   <a:srgbClr val="253650"/>
@@ -14360,6 +15136,7 @@
               </a:defRPr>
             </a:lvl6pPr>
             <a:lvl7pPr>
+              <a:buNone/>
               <a:defRPr sz="1800" b="0">
                 <a:solidFill>
                   <a:srgbClr val="253650"/>
@@ -14370,6 +15147,7 @@
               </a:defRPr>
             </a:lvl7pPr>
             <a:lvl8pPr>
+              <a:buNone/>
               <a:defRPr sz="1800" b="0">
                 <a:solidFill>
                   <a:srgbClr val="253650"/>
@@ -14380,6 +15158,7 @@
               </a:defRPr>
             </a:lvl8pPr>
             <a:lvl9pPr>
+              <a:buNone/>
               <a:defRPr sz="1800" b="0">
                 <a:solidFill>
                   <a:srgbClr val="253650"/>
@@ -14392,6 +15171,7 @@
           </a:lstStyle>
           <a:p xmlns:a="http://schemas.openxmlformats.org/drawingml/2006/main">
             <a:pPr>
+              <a:buNone/>
               <a:defRPr sz="1800" b="0">
                 <a:solidFill>
                   <a:srgbClr val="253650"/>
@@ -14410,11 +15190,12 @@
                 <a:ea typeface="Apple SD Gothic Neo"/>
                 <a:cs typeface="Apple SD Gothic Neo"/>
               </a:rPr>
-              <a:t>모델이 일반 대화로 분류해도 연결된 운영 후속 질문은 조회합니다.</a:t>
+              <a:t>요청 ID로 늦게 온 이벤트를 구분합니다.</a:t>
             </a:r>
           </a:p>
           <a:p xmlns:a="http://schemas.openxmlformats.org/drawingml/2006/main">
             <a:pPr>
+              <a:buNone/>
               <a:defRPr sz="1800" b="0">
                 <a:solidFill>
                   <a:srgbClr val="253650"/>
@@ -14433,7 +15214,7 @@
                 <a:ea typeface="Apple SD Gothic Neo"/>
                 <a:cs typeface="Apple SD Gothic Neo"/>
               </a:rPr>
-              <a:t>실제 오분류를 재현해 보완했습니다.</a:t>
+              <a:t>답변은 검수 후 공개하고 실패 초안은 성공 답변으로 저장하지 않습니다.</a:t>
             </a:r>
           </a:p>
         </p:txBody>
@@ -14538,6 +15319,7 @@
               </a:defRPr>
             </a:defPPr>
             <a:lvl1pPr>
+              <a:buNone/>
               <a:defRPr sz="1275" b="1">
                 <a:solidFill>
                   <a:srgbClr val="235ECB"/>
@@ -14548,6 +15330,7 @@
               </a:defRPr>
             </a:lvl1pPr>
             <a:lvl2pPr>
+              <a:buNone/>
               <a:defRPr sz="1275" b="1">
                 <a:solidFill>
                   <a:srgbClr val="235ECB"/>
@@ -14558,6 +15341,7 @@
               </a:defRPr>
             </a:lvl2pPr>
             <a:lvl3pPr>
+              <a:buNone/>
               <a:defRPr sz="1275" b="1">
                 <a:solidFill>
                   <a:srgbClr val="235ECB"/>
@@ -14568,6 +15352,7 @@
               </a:defRPr>
             </a:lvl3pPr>
             <a:lvl4pPr>
+              <a:buNone/>
               <a:defRPr sz="1275" b="1">
                 <a:solidFill>
                   <a:srgbClr val="235ECB"/>
@@ -14578,6 +15363,7 @@
               </a:defRPr>
             </a:lvl4pPr>
             <a:lvl5pPr>
+              <a:buNone/>
               <a:defRPr sz="1275" b="1">
                 <a:solidFill>
                   <a:srgbClr val="235ECB"/>
@@ -14588,6 +15374,7 @@
               </a:defRPr>
             </a:lvl5pPr>
             <a:lvl6pPr>
+              <a:buNone/>
               <a:defRPr sz="1275" b="1">
                 <a:solidFill>
                   <a:srgbClr val="235ECB"/>
@@ -14598,6 +15385,7 @@
               </a:defRPr>
             </a:lvl6pPr>
             <a:lvl7pPr>
+              <a:buNone/>
               <a:defRPr sz="1275" b="1">
                 <a:solidFill>
                   <a:srgbClr val="235ECB"/>
@@ -14608,6 +15396,7 @@
               </a:defRPr>
             </a:lvl7pPr>
             <a:lvl8pPr>
+              <a:buNone/>
               <a:defRPr sz="1275" b="1">
                 <a:solidFill>
                   <a:srgbClr val="235ECB"/>
@@ -14618,6 +15407,7 @@
               </a:defRPr>
             </a:lvl8pPr>
             <a:lvl9pPr>
+              <a:buNone/>
               <a:defRPr sz="1275" b="1">
                 <a:solidFill>
                   <a:srgbClr val="235ECB"/>
@@ -14630,6 +15420,7 @@
           </a:lstStyle>
           <a:p xmlns:a="http://schemas.openxmlformats.org/drawingml/2006/main">
             <a:pPr>
+              <a:buNone/>
               <a:defRPr sz="1275" b="1">
                 <a:solidFill>
                   <a:srgbClr val="235ECB"/>
@@ -14694,6 +15485,7 @@
               </a:defRPr>
             </a:defPPr>
             <a:lvl1pPr>
+              <a:buNone/>
               <a:defRPr sz="2850" b="1">
                 <a:solidFill>
                   <a:srgbClr val="172B4D"/>
@@ -14704,6 +15496,7 @@
               </a:defRPr>
             </a:lvl1pPr>
             <a:lvl2pPr>
+              <a:buNone/>
               <a:defRPr sz="2850" b="1">
                 <a:solidFill>
                   <a:srgbClr val="172B4D"/>
@@ -14714,6 +15507,7 @@
               </a:defRPr>
             </a:lvl2pPr>
             <a:lvl3pPr>
+              <a:buNone/>
               <a:defRPr sz="2850" b="1">
                 <a:solidFill>
                   <a:srgbClr val="172B4D"/>
@@ -14724,6 +15518,7 @@
               </a:defRPr>
             </a:lvl3pPr>
             <a:lvl4pPr>
+              <a:buNone/>
               <a:defRPr sz="2850" b="1">
                 <a:solidFill>
                   <a:srgbClr val="172B4D"/>
@@ -14734,6 +15529,7 @@
               </a:defRPr>
             </a:lvl4pPr>
             <a:lvl5pPr>
+              <a:buNone/>
               <a:defRPr sz="2850" b="1">
                 <a:solidFill>
                   <a:srgbClr val="172B4D"/>
@@ -14744,6 +15540,7 @@
               </a:defRPr>
             </a:lvl5pPr>
             <a:lvl6pPr>
+              <a:buNone/>
               <a:defRPr sz="2850" b="1">
                 <a:solidFill>
                   <a:srgbClr val="172B4D"/>
@@ -14754,6 +15551,7 @@
               </a:defRPr>
             </a:lvl6pPr>
             <a:lvl7pPr>
+              <a:buNone/>
               <a:defRPr sz="2850" b="1">
                 <a:solidFill>
                   <a:srgbClr val="172B4D"/>
@@ -14764,6 +15562,7 @@
               </a:defRPr>
             </a:lvl7pPr>
             <a:lvl8pPr>
+              <a:buNone/>
               <a:defRPr sz="2850" b="1">
                 <a:solidFill>
                   <a:srgbClr val="172B4D"/>
@@ -14774,6 +15573,7 @@
               </a:defRPr>
             </a:lvl8pPr>
             <a:lvl9pPr>
+              <a:buNone/>
               <a:defRPr sz="2850" b="1">
                 <a:solidFill>
                   <a:srgbClr val="172B4D"/>
@@ -14786,6 +15586,7 @@
           </a:lstStyle>
           <a:p xmlns:a="http://schemas.openxmlformats.org/drawingml/2006/main">
             <a:pPr>
+              <a:buNone/>
               <a:defRPr sz="2850" b="1">
                 <a:solidFill>
                   <a:srgbClr val="172B4D"/>
@@ -14880,6 +15681,7 @@
               </a:defRPr>
             </a:defPPr>
             <a:lvl1pPr>
+              <a:buNone/>
               <a:defRPr sz="975" b="0">
                 <a:solidFill>
                   <a:srgbClr val="5D6D84"/>
@@ -14890,6 +15692,7 @@
               </a:defRPr>
             </a:lvl1pPr>
             <a:lvl2pPr>
+              <a:buNone/>
               <a:defRPr sz="975" b="0">
                 <a:solidFill>
                   <a:srgbClr val="5D6D84"/>
@@ -14900,6 +15703,7 @@
               </a:defRPr>
             </a:lvl2pPr>
             <a:lvl3pPr>
+              <a:buNone/>
               <a:defRPr sz="975" b="0">
                 <a:solidFill>
                   <a:srgbClr val="5D6D84"/>
@@ -14910,6 +15714,7 @@
               </a:defRPr>
             </a:lvl3pPr>
             <a:lvl4pPr>
+              <a:buNone/>
               <a:defRPr sz="975" b="0">
                 <a:solidFill>
                   <a:srgbClr val="5D6D84"/>
@@ -14920,6 +15725,7 @@
               </a:defRPr>
             </a:lvl4pPr>
             <a:lvl5pPr>
+              <a:buNone/>
               <a:defRPr sz="975" b="0">
                 <a:solidFill>
                   <a:srgbClr val="5D6D84"/>
@@ -14930,6 +15736,7 @@
               </a:defRPr>
             </a:lvl5pPr>
             <a:lvl6pPr>
+              <a:buNone/>
               <a:defRPr sz="975" b="0">
                 <a:solidFill>
                   <a:srgbClr val="5D6D84"/>
@@ -14940,6 +15747,7 @@
               </a:defRPr>
             </a:lvl6pPr>
             <a:lvl7pPr>
+              <a:buNone/>
               <a:defRPr sz="975" b="0">
                 <a:solidFill>
                   <a:srgbClr val="5D6D84"/>
@@ -14950,6 +15758,7 @@
               </a:defRPr>
             </a:lvl7pPr>
             <a:lvl8pPr>
+              <a:buNone/>
               <a:defRPr sz="975" b="0">
                 <a:solidFill>
                   <a:srgbClr val="5D6D84"/>
@@ -14960,6 +15769,7 @@
               </a:defRPr>
             </a:lvl8pPr>
             <a:lvl9pPr>
+              <a:buNone/>
               <a:defRPr sz="975" b="0">
                 <a:solidFill>
                   <a:srgbClr val="5D6D84"/>
@@ -14972,6 +15782,7 @@
           </a:lstStyle>
           <a:p xmlns:a="http://schemas.openxmlformats.org/drawingml/2006/main">
             <a:pPr>
+              <a:buNone/>
               <a:defRPr sz="975" b="0">
                 <a:solidFill>
                   <a:srgbClr val="5D6D84"/>
@@ -15036,6 +15847,7 @@
               </a:defRPr>
             </a:defPPr>
             <a:lvl1pPr>
+              <a:buNone/>
               <a:defRPr sz="1125" b="1">
                 <a:solidFill>
                   <a:srgbClr val="5D6D84"/>
@@ -15046,6 +15858,7 @@
               </a:defRPr>
             </a:lvl1pPr>
             <a:lvl2pPr>
+              <a:buNone/>
               <a:defRPr sz="1125" b="1">
                 <a:solidFill>
                   <a:srgbClr val="5D6D84"/>
@@ -15056,6 +15869,7 @@
               </a:defRPr>
             </a:lvl2pPr>
             <a:lvl3pPr>
+              <a:buNone/>
               <a:defRPr sz="1125" b="1">
                 <a:solidFill>
                   <a:srgbClr val="5D6D84"/>
@@ -15066,6 +15880,7 @@
               </a:defRPr>
             </a:lvl3pPr>
             <a:lvl4pPr>
+              <a:buNone/>
               <a:defRPr sz="1125" b="1">
                 <a:solidFill>
                   <a:srgbClr val="5D6D84"/>
@@ -15076,6 +15891,7 @@
               </a:defRPr>
             </a:lvl4pPr>
             <a:lvl5pPr>
+              <a:buNone/>
               <a:defRPr sz="1125" b="1">
                 <a:solidFill>
                   <a:srgbClr val="5D6D84"/>
@@ -15086,6 +15902,7 @@
               </a:defRPr>
             </a:lvl5pPr>
             <a:lvl6pPr>
+              <a:buNone/>
               <a:defRPr sz="1125" b="1">
                 <a:solidFill>
                   <a:srgbClr val="5D6D84"/>
@@ -15096,6 +15913,7 @@
               </a:defRPr>
             </a:lvl6pPr>
             <a:lvl7pPr>
+              <a:buNone/>
               <a:defRPr sz="1125" b="1">
                 <a:solidFill>
                   <a:srgbClr val="5D6D84"/>
@@ -15106,6 +15924,7 @@
               </a:defRPr>
             </a:lvl7pPr>
             <a:lvl8pPr>
+              <a:buNone/>
               <a:defRPr sz="1125" b="1">
                 <a:solidFill>
                   <a:srgbClr val="5D6D84"/>
@@ -15116,6 +15935,7 @@
               </a:defRPr>
             </a:lvl8pPr>
             <a:lvl9pPr>
+              <a:buNone/>
               <a:defRPr sz="1125" b="1">
                 <a:solidFill>
                   <a:srgbClr val="5D6D84"/>
@@ -15128,6 +15948,7 @@
           </a:lstStyle>
           <a:p xmlns:a="http://schemas.openxmlformats.org/drawingml/2006/main">
             <a:pPr>
+              <a:buNone/>
               <a:defRPr sz="1125" b="1">
                 <a:solidFill>
                   <a:srgbClr val="5D6D84"/>
@@ -15222,6 +16043,7 @@
               </a:defRPr>
             </a:defPPr>
             <a:lvl1pPr>
+              <a:buNone/>
               <a:defRPr sz="2250" b="1">
                 <a:solidFill>
                   <a:srgbClr val="FFFFFF"/>
@@ -15232,6 +16054,7 @@
               </a:defRPr>
             </a:lvl1pPr>
             <a:lvl2pPr>
+              <a:buNone/>
               <a:defRPr sz="2250" b="1">
                 <a:solidFill>
                   <a:srgbClr val="FFFFFF"/>
@@ -15242,6 +16065,7 @@
               </a:defRPr>
             </a:lvl2pPr>
             <a:lvl3pPr>
+              <a:buNone/>
               <a:defRPr sz="2250" b="1">
                 <a:solidFill>
                   <a:srgbClr val="FFFFFF"/>
@@ -15252,6 +16076,7 @@
               </a:defRPr>
             </a:lvl3pPr>
             <a:lvl4pPr>
+              <a:buNone/>
               <a:defRPr sz="2250" b="1">
                 <a:solidFill>
                   <a:srgbClr val="FFFFFF"/>
@@ -15262,6 +16087,7 @@
               </a:defRPr>
             </a:lvl4pPr>
             <a:lvl5pPr>
+              <a:buNone/>
               <a:defRPr sz="2250" b="1">
                 <a:solidFill>
                   <a:srgbClr val="FFFFFF"/>
@@ -15272,6 +16098,7 @@
               </a:defRPr>
             </a:lvl5pPr>
             <a:lvl6pPr>
+              <a:buNone/>
               <a:defRPr sz="2250" b="1">
                 <a:solidFill>
                   <a:srgbClr val="FFFFFF"/>
@@ -15282,6 +16109,7 @@
               </a:defRPr>
             </a:lvl6pPr>
             <a:lvl7pPr>
+              <a:buNone/>
               <a:defRPr sz="2250" b="1">
                 <a:solidFill>
                   <a:srgbClr val="FFFFFF"/>
@@ -15292,6 +16120,7 @@
               </a:defRPr>
             </a:lvl7pPr>
             <a:lvl8pPr>
+              <a:buNone/>
               <a:defRPr sz="2250" b="1">
                 <a:solidFill>
                   <a:srgbClr val="FFFFFF"/>
@@ -15302,6 +16131,7 @@
               </a:defRPr>
             </a:lvl8pPr>
             <a:lvl9pPr>
+              <a:buNone/>
               <a:defRPr sz="2250" b="1">
                 <a:solidFill>
                   <a:srgbClr val="FFFFFF"/>
@@ -15314,6 +16144,7 @@
           </a:lstStyle>
           <a:p xmlns:a="http://schemas.openxmlformats.org/drawingml/2006/main">
             <a:pPr>
+              <a:buNone/>
               <a:defRPr sz="2250" b="1">
                 <a:solidFill>
                   <a:srgbClr val="FFFFFF"/>
@@ -15438,6 +16269,7 @@
               </a:defRPr>
             </a:defPPr>
             <a:lvl1pPr>
+              <a:buNone/>
               <a:defRPr sz="2100" b="1">
                 <a:solidFill>
                   <a:srgbClr val="172B4D"/>
@@ -15448,6 +16280,7 @@
               </a:defRPr>
             </a:lvl1pPr>
             <a:lvl2pPr>
+              <a:buNone/>
               <a:defRPr sz="2100" b="1">
                 <a:solidFill>
                   <a:srgbClr val="172B4D"/>
@@ -15458,6 +16291,7 @@
               </a:defRPr>
             </a:lvl2pPr>
             <a:lvl3pPr>
+              <a:buNone/>
               <a:defRPr sz="2100" b="1">
                 <a:solidFill>
                   <a:srgbClr val="172B4D"/>
@@ -15468,6 +16302,7 @@
               </a:defRPr>
             </a:lvl3pPr>
             <a:lvl4pPr>
+              <a:buNone/>
               <a:defRPr sz="2100" b="1">
                 <a:solidFill>
                   <a:srgbClr val="172B4D"/>
@@ -15478,6 +16313,7 @@
               </a:defRPr>
             </a:lvl4pPr>
             <a:lvl5pPr>
+              <a:buNone/>
               <a:defRPr sz="2100" b="1">
                 <a:solidFill>
                   <a:srgbClr val="172B4D"/>
@@ -15488,6 +16324,7 @@
               </a:defRPr>
             </a:lvl5pPr>
             <a:lvl6pPr>
+              <a:buNone/>
               <a:defRPr sz="2100" b="1">
                 <a:solidFill>
                   <a:srgbClr val="172B4D"/>
@@ -15498,6 +16335,7 @@
               </a:defRPr>
             </a:lvl6pPr>
             <a:lvl7pPr>
+              <a:buNone/>
               <a:defRPr sz="2100" b="1">
                 <a:solidFill>
                   <a:srgbClr val="172B4D"/>
@@ -15508,6 +16346,7 @@
               </a:defRPr>
             </a:lvl7pPr>
             <a:lvl8pPr>
+              <a:buNone/>
               <a:defRPr sz="2100" b="1">
                 <a:solidFill>
                   <a:srgbClr val="172B4D"/>
@@ -15518,6 +16357,7 @@
               </a:defRPr>
             </a:lvl8pPr>
             <a:lvl9pPr>
+              <a:buNone/>
               <a:defRPr sz="2100" b="1">
                 <a:solidFill>
                   <a:srgbClr val="172B4D"/>
@@ -15530,6 +16370,7 @@
           </a:lstStyle>
           <a:p xmlns:a="http://schemas.openxmlformats.org/drawingml/2006/main">
             <a:pPr>
+              <a:buNone/>
               <a:defRPr sz="2100" b="1">
                 <a:solidFill>
                   <a:srgbClr val="172B4D"/>
@@ -15594,6 +16435,7 @@
               </a:defRPr>
             </a:defPPr>
             <a:lvl1pPr>
+              <a:buNone/>
               <a:defRPr sz="1800" b="0">
                 <a:solidFill>
                   <a:srgbClr val="253650"/>
@@ -15604,6 +16446,7 @@
               </a:defRPr>
             </a:lvl1pPr>
             <a:lvl2pPr>
+              <a:buNone/>
               <a:defRPr sz="1800" b="0">
                 <a:solidFill>
                   <a:srgbClr val="253650"/>
@@ -15614,6 +16457,7 @@
               </a:defRPr>
             </a:lvl2pPr>
             <a:lvl3pPr>
+              <a:buNone/>
               <a:defRPr sz="1800" b="0">
                 <a:solidFill>
                   <a:srgbClr val="253650"/>
@@ -15624,6 +16468,7 @@
               </a:defRPr>
             </a:lvl3pPr>
             <a:lvl4pPr>
+              <a:buNone/>
               <a:defRPr sz="1800" b="0">
                 <a:solidFill>
                   <a:srgbClr val="253650"/>
@@ -15634,6 +16479,7 @@
               </a:defRPr>
             </a:lvl4pPr>
             <a:lvl5pPr>
+              <a:buNone/>
               <a:defRPr sz="1800" b="0">
                 <a:solidFill>
                   <a:srgbClr val="253650"/>
@@ -15644,6 +16490,7 @@
               </a:defRPr>
             </a:lvl5pPr>
             <a:lvl6pPr>
+              <a:buNone/>
               <a:defRPr sz="1800" b="0">
                 <a:solidFill>
                   <a:srgbClr val="253650"/>
@@ -15654,6 +16501,7 @@
               </a:defRPr>
             </a:lvl6pPr>
             <a:lvl7pPr>
+              <a:buNone/>
               <a:defRPr sz="1800" b="0">
                 <a:solidFill>
                   <a:srgbClr val="253650"/>
@@ -15664,6 +16512,7 @@
               </a:defRPr>
             </a:lvl7pPr>
             <a:lvl8pPr>
+              <a:buNone/>
               <a:defRPr sz="1800" b="0">
                 <a:solidFill>
                   <a:srgbClr val="253650"/>
@@ -15674,6 +16523,7 @@
               </a:defRPr>
             </a:lvl8pPr>
             <a:lvl9pPr>
+              <a:buNone/>
               <a:defRPr sz="1800" b="0">
                 <a:solidFill>
                   <a:srgbClr val="253650"/>
@@ -15686,6 +16536,7 @@
           </a:lstStyle>
           <a:p xmlns:a="http://schemas.openxmlformats.org/drawingml/2006/main">
             <a:pPr>
+              <a:buNone/>
               <a:defRPr sz="1800" b="0">
                 <a:solidFill>
                   <a:srgbClr val="253650"/>
@@ -15810,6 +16661,7 @@
               </a:defRPr>
             </a:defPPr>
             <a:lvl1pPr>
+              <a:buNone/>
               <a:defRPr sz="2100" b="1">
                 <a:solidFill>
                   <a:srgbClr val="172B4D"/>
@@ -15820,6 +16672,7 @@
               </a:defRPr>
             </a:lvl1pPr>
             <a:lvl2pPr>
+              <a:buNone/>
               <a:defRPr sz="2100" b="1">
                 <a:solidFill>
                   <a:srgbClr val="172B4D"/>
@@ -15830,6 +16683,7 @@
               </a:defRPr>
             </a:lvl2pPr>
             <a:lvl3pPr>
+              <a:buNone/>
               <a:defRPr sz="2100" b="1">
                 <a:solidFill>
                   <a:srgbClr val="172B4D"/>
@@ -15840,6 +16694,7 @@
               </a:defRPr>
             </a:lvl3pPr>
             <a:lvl4pPr>
+              <a:buNone/>
               <a:defRPr sz="2100" b="1">
                 <a:solidFill>
                   <a:srgbClr val="172B4D"/>
@@ -15850,6 +16705,7 @@
               </a:defRPr>
             </a:lvl4pPr>
             <a:lvl5pPr>
+              <a:buNone/>
               <a:defRPr sz="2100" b="1">
                 <a:solidFill>
                   <a:srgbClr val="172B4D"/>
@@ -15860,6 +16716,7 @@
               </a:defRPr>
             </a:lvl5pPr>
             <a:lvl6pPr>
+              <a:buNone/>
               <a:defRPr sz="2100" b="1">
                 <a:solidFill>
                   <a:srgbClr val="172B4D"/>
@@ -15870,6 +16727,7 @@
               </a:defRPr>
             </a:lvl6pPr>
             <a:lvl7pPr>
+              <a:buNone/>
               <a:defRPr sz="2100" b="1">
                 <a:solidFill>
                   <a:srgbClr val="172B4D"/>
@@ -15880,6 +16738,7 @@
               </a:defRPr>
             </a:lvl7pPr>
             <a:lvl8pPr>
+              <a:buNone/>
               <a:defRPr sz="2100" b="1">
                 <a:solidFill>
                   <a:srgbClr val="172B4D"/>
@@ -15890,6 +16749,7 @@
               </a:defRPr>
             </a:lvl8pPr>
             <a:lvl9pPr>
+              <a:buNone/>
               <a:defRPr sz="2100" b="1">
                 <a:solidFill>
                   <a:srgbClr val="172B4D"/>
@@ -15902,6 +16762,7 @@
           </a:lstStyle>
           <a:p xmlns:a="http://schemas.openxmlformats.org/drawingml/2006/main">
             <a:pPr>
+              <a:buNone/>
               <a:defRPr sz="2100" b="1">
                 <a:solidFill>
                   <a:srgbClr val="172B4D"/>
@@ -15966,6 +16827,7 @@
               </a:defRPr>
             </a:defPPr>
             <a:lvl1pPr>
+              <a:buNone/>
               <a:defRPr sz="1800" b="0">
                 <a:solidFill>
                   <a:srgbClr val="253650"/>
@@ -15976,6 +16838,7 @@
               </a:defRPr>
             </a:lvl1pPr>
             <a:lvl2pPr>
+              <a:buNone/>
               <a:defRPr sz="1800" b="0">
                 <a:solidFill>
                   <a:srgbClr val="253650"/>
@@ -15986,6 +16849,7 @@
               </a:defRPr>
             </a:lvl2pPr>
             <a:lvl3pPr>
+              <a:buNone/>
               <a:defRPr sz="1800" b="0">
                 <a:solidFill>
                   <a:srgbClr val="253650"/>
@@ -15996,6 +16860,7 @@
               </a:defRPr>
             </a:lvl3pPr>
             <a:lvl4pPr>
+              <a:buNone/>
               <a:defRPr sz="1800" b="0">
                 <a:solidFill>
                   <a:srgbClr val="253650"/>
@@ -16006,6 +16871,7 @@
               </a:defRPr>
             </a:lvl4pPr>
             <a:lvl5pPr>
+              <a:buNone/>
               <a:defRPr sz="1800" b="0">
                 <a:solidFill>
                   <a:srgbClr val="253650"/>
@@ -16016,6 +16882,7 @@
               </a:defRPr>
             </a:lvl5pPr>
             <a:lvl6pPr>
+              <a:buNone/>
               <a:defRPr sz="1800" b="0">
                 <a:solidFill>
                   <a:srgbClr val="253650"/>
@@ -16026,6 +16893,7 @@
               </a:defRPr>
             </a:lvl6pPr>
             <a:lvl7pPr>
+              <a:buNone/>
               <a:defRPr sz="1800" b="0">
                 <a:solidFill>
                   <a:srgbClr val="253650"/>
@@ -16036,6 +16904,7 @@
               </a:defRPr>
             </a:lvl7pPr>
             <a:lvl8pPr>
+              <a:buNone/>
               <a:defRPr sz="1800" b="0">
                 <a:solidFill>
                   <a:srgbClr val="253650"/>
@@ -16046,6 +16915,7 @@
               </a:defRPr>
             </a:lvl8pPr>
             <a:lvl9pPr>
+              <a:buNone/>
               <a:defRPr sz="1800" b="0">
                 <a:solidFill>
                   <a:srgbClr val="253650"/>
@@ -16058,6 +16928,7 @@
           </a:lstStyle>
           <a:p xmlns:a="http://schemas.openxmlformats.org/drawingml/2006/main">
             <a:pPr>
+              <a:buNone/>
               <a:defRPr sz="1800" b="0">
                 <a:solidFill>
                   <a:srgbClr val="253650"/>
@@ -16076,11 +16947,12 @@
                 <a:ea typeface="Apple SD Gothic Neo"/>
                 <a:cs typeface="Apple SD Gothic Neo"/>
               </a:rPr>
-              <a:t>참조 ID·대상·수치·조건을 검사합니다.</a:t>
+              <a:t>기존 형식 검사에서</a:t>
             </a:r>
           </a:p>
           <a:p xmlns:a="http://schemas.openxmlformats.org/drawingml/2006/main">
             <a:pPr>
+              <a:buNone/>
               <a:defRPr sz="1800" b="0">
                 <a:solidFill>
                   <a:srgbClr val="253650"/>
@@ -16099,7 +16971,31 @@
                 <a:ea typeface="Apple SD Gothic Neo"/>
                 <a:cs typeface="Apple SD Gothic Neo"/>
               </a:rPr>
-              <a:t>Writer는 최초 포함 최대 3회입니다.</a:t>
+              <a:t>참조 ID·대상·수치·조건 검사로 강화했습니다.</a:t>
+            </a:r>
+          </a:p>
+          <a:p xmlns:a="http://schemas.openxmlformats.org/drawingml/2006/main">
+            <a:pPr>
+              <a:buNone/>
+              <a:defRPr sz="1800" b="0">
+                <a:solidFill>
+                  <a:srgbClr val="253650"/>
+                </a:solidFill>
+                <a:latin typeface="Apple SD Gothic Neo"/>
+                <a:ea typeface="Apple SD Gothic Neo"/>
+                <a:cs typeface="Apple SD Gothic Neo"/>
+              </a:defRPr>
+            </a:pPr>
+            <a:r>
+              <a:rPr sz="1800" b="0">
+                <a:solidFill>
+                  <a:srgbClr val="253650"/>
+                </a:solidFill>
+                <a:latin typeface="Apple SD Gothic Neo"/>
+                <a:ea typeface="Apple SD Gothic Neo"/>
+                <a:cs typeface="Apple SD Gothic Neo"/>
+              </a:rPr>
+              <a:t>최대 3회 후 실패하면 보류합니다.</a:t>
             </a:r>
           </a:p>
         </p:txBody>
@@ -16205,6 +17101,7 @@
               </a:defRPr>
             </a:defPPr>
             <a:lvl1pPr>
+              <a:buNone/>
               <a:defRPr sz="2100" b="1">
                 <a:solidFill>
                   <a:srgbClr val="172B4D"/>
@@ -16215,6 +17112,7 @@
               </a:defRPr>
             </a:lvl1pPr>
             <a:lvl2pPr>
+              <a:buNone/>
               <a:defRPr sz="2100" b="1">
                 <a:solidFill>
                   <a:srgbClr val="172B4D"/>
@@ -16225,6 +17123,7 @@
               </a:defRPr>
             </a:lvl2pPr>
             <a:lvl3pPr>
+              <a:buNone/>
               <a:defRPr sz="2100" b="1">
                 <a:solidFill>
                   <a:srgbClr val="172B4D"/>
@@ -16235,6 +17134,7 @@
               </a:defRPr>
             </a:lvl3pPr>
             <a:lvl4pPr>
+              <a:buNone/>
               <a:defRPr sz="2100" b="1">
                 <a:solidFill>
                   <a:srgbClr val="172B4D"/>
@@ -16245,6 +17145,7 @@
               </a:defRPr>
             </a:lvl4pPr>
             <a:lvl5pPr>
+              <a:buNone/>
               <a:defRPr sz="2100" b="1">
                 <a:solidFill>
                   <a:srgbClr val="172B4D"/>
@@ -16255,6 +17156,7 @@
               </a:defRPr>
             </a:lvl5pPr>
             <a:lvl6pPr>
+              <a:buNone/>
               <a:defRPr sz="2100" b="1">
                 <a:solidFill>
                   <a:srgbClr val="172B4D"/>
@@ -16265,6 +17167,7 @@
               </a:defRPr>
             </a:lvl6pPr>
             <a:lvl7pPr>
+              <a:buNone/>
               <a:defRPr sz="2100" b="1">
                 <a:solidFill>
                   <a:srgbClr val="172B4D"/>
@@ -16275,6 +17178,7 @@
               </a:defRPr>
             </a:lvl7pPr>
             <a:lvl8pPr>
+              <a:buNone/>
               <a:defRPr sz="2100" b="1">
                 <a:solidFill>
                   <a:srgbClr val="172B4D"/>
@@ -16285,6 +17189,7 @@
               </a:defRPr>
             </a:lvl8pPr>
             <a:lvl9pPr>
+              <a:buNone/>
               <a:defRPr sz="2100" b="1">
                 <a:solidFill>
                   <a:srgbClr val="172B4D"/>
@@ -16297,6 +17202,7 @@
           </a:lstStyle>
           <a:p xmlns:a="http://schemas.openxmlformats.org/drawingml/2006/main">
             <a:pPr>
+              <a:buNone/>
               <a:defRPr sz="2100" b="1">
                 <a:solidFill>
                   <a:srgbClr val="172B4D"/>
@@ -16361,6 +17267,7 @@
               </a:defRPr>
             </a:defPPr>
             <a:lvl1pPr>
+              <a:buNone/>
               <a:defRPr sz="1800" b="0">
                 <a:solidFill>
                   <a:srgbClr val="253650"/>
@@ -16371,6 +17278,7 @@
               </a:defRPr>
             </a:lvl1pPr>
             <a:lvl2pPr>
+              <a:buNone/>
               <a:defRPr sz="1800" b="0">
                 <a:solidFill>
                   <a:srgbClr val="253650"/>
@@ -16381,6 +17289,7 @@
               </a:defRPr>
             </a:lvl2pPr>
             <a:lvl3pPr>
+              <a:buNone/>
               <a:defRPr sz="1800" b="0">
                 <a:solidFill>
                   <a:srgbClr val="253650"/>
@@ -16391,6 +17300,7 @@
               </a:defRPr>
             </a:lvl3pPr>
             <a:lvl4pPr>
+              <a:buNone/>
               <a:defRPr sz="1800" b="0">
                 <a:solidFill>
                   <a:srgbClr val="253650"/>
@@ -16401,6 +17311,7 @@
               </a:defRPr>
             </a:lvl4pPr>
             <a:lvl5pPr>
+              <a:buNone/>
               <a:defRPr sz="1800" b="0">
                 <a:solidFill>
                   <a:srgbClr val="253650"/>
@@ -16411,6 +17322,7 @@
               </a:defRPr>
             </a:lvl5pPr>
             <a:lvl6pPr>
+              <a:buNone/>
               <a:defRPr sz="1800" b="0">
                 <a:solidFill>
                   <a:srgbClr val="253650"/>
@@ -16421,6 +17333,7 @@
               </a:defRPr>
             </a:lvl6pPr>
             <a:lvl7pPr>
+              <a:buNone/>
               <a:defRPr sz="1800" b="0">
                 <a:solidFill>
                   <a:srgbClr val="253650"/>
@@ -16431,6 +17344,7 @@
               </a:defRPr>
             </a:lvl7pPr>
             <a:lvl8pPr>
+              <a:buNone/>
               <a:defRPr sz="1800" b="0">
                 <a:solidFill>
                   <a:srgbClr val="253650"/>
@@ -16441,6 +17355,7 @@
               </a:defRPr>
             </a:lvl8pPr>
             <a:lvl9pPr>
+              <a:buNone/>
               <a:defRPr sz="1800" b="0">
                 <a:solidFill>
                   <a:srgbClr val="253650"/>
@@ -16453,6 +17368,7 @@
           </a:lstStyle>
           <a:p xmlns:a="http://schemas.openxmlformats.org/drawingml/2006/main">
             <a:pPr>
+              <a:buNone/>
               <a:defRPr sz="1800" b="0">
                 <a:solidFill>
                   <a:srgbClr val="253650"/>
@@ -16471,11 +17387,12 @@
                 <a:ea typeface="Apple SD Gothic Neo"/>
                 <a:cs typeface="Apple SD Gothic Neo"/>
               </a:rPr>
-              <a:t>복잡한 요청만 별도 검토합니다.</a:t>
+              <a:t>복잡한 요청만 별도로 검토합니다.</a:t>
             </a:r>
           </a:p>
           <a:p xmlns:a="http://schemas.openxmlformats.org/drawingml/2006/main">
             <a:pPr>
+              <a:buNone/>
               <a:defRPr sz="1800" b="0">
                 <a:solidFill>
                   <a:srgbClr val="253650"/>
@@ -16494,7 +17411,31 @@
                 <a:ea typeface="Apple SD Gothic Neo"/>
                 <a:cs typeface="Apple SD Gothic Neo"/>
               </a:rPr>
-              <a:t>최대 2회, 재반려·오류면 보류합니다.</a:t>
+              <a:t>최대 2회이며 첫 반려는 재작성,</a:t>
+            </a:r>
+          </a:p>
+          <a:p xmlns:a="http://schemas.openxmlformats.org/drawingml/2006/main">
+            <a:pPr>
+              <a:buNone/>
+              <a:defRPr sz="1800" b="0">
+                <a:solidFill>
+                  <a:srgbClr val="253650"/>
+                </a:solidFill>
+                <a:latin typeface="Apple SD Gothic Neo"/>
+                <a:ea typeface="Apple SD Gothic Neo"/>
+                <a:cs typeface="Apple SD Gothic Neo"/>
+              </a:defRPr>
+            </a:pPr>
+            <a:r>
+              <a:rPr sz="1800" b="0">
+                <a:solidFill>
+                  <a:srgbClr val="253650"/>
+                </a:solidFill>
+                <a:latin typeface="Apple SD Gothic Neo"/>
+                <a:ea typeface="Apple SD Gothic Neo"/>
+                <a:cs typeface="Apple SD Gothic Neo"/>
+              </a:rPr>
+              <a:t>재반려·오류는 보류합니다.</a:t>
             </a:r>
           </a:p>
         </p:txBody>
@@ -16599,6 +17540,7 @@
               </a:defRPr>
             </a:defPPr>
             <a:lvl1pPr>
+              <a:buNone/>
               <a:defRPr sz="1275" b="1">
                 <a:solidFill>
                   <a:srgbClr val="235ECB"/>
@@ -16609,6 +17551,7 @@
               </a:defRPr>
             </a:lvl1pPr>
             <a:lvl2pPr>
+              <a:buNone/>
               <a:defRPr sz="1275" b="1">
                 <a:solidFill>
                   <a:srgbClr val="235ECB"/>
@@ -16619,6 +17562,7 @@
               </a:defRPr>
             </a:lvl2pPr>
             <a:lvl3pPr>
+              <a:buNone/>
               <a:defRPr sz="1275" b="1">
                 <a:solidFill>
                   <a:srgbClr val="235ECB"/>
@@ -16629,6 +17573,7 @@
               </a:defRPr>
             </a:lvl3pPr>
             <a:lvl4pPr>
+              <a:buNone/>
               <a:defRPr sz="1275" b="1">
                 <a:solidFill>
                   <a:srgbClr val="235ECB"/>
@@ -16639,6 +17584,7 @@
               </a:defRPr>
             </a:lvl4pPr>
             <a:lvl5pPr>
+              <a:buNone/>
               <a:defRPr sz="1275" b="1">
                 <a:solidFill>
                   <a:srgbClr val="235ECB"/>
@@ -16649,6 +17595,7 @@
               </a:defRPr>
             </a:lvl5pPr>
             <a:lvl6pPr>
+              <a:buNone/>
               <a:defRPr sz="1275" b="1">
                 <a:solidFill>
                   <a:srgbClr val="235ECB"/>
@@ -16659,6 +17606,7 @@
               </a:defRPr>
             </a:lvl6pPr>
             <a:lvl7pPr>
+              <a:buNone/>
               <a:defRPr sz="1275" b="1">
                 <a:solidFill>
                   <a:srgbClr val="235ECB"/>
@@ -16669,6 +17617,7 @@
               </a:defRPr>
             </a:lvl7pPr>
             <a:lvl8pPr>
+              <a:buNone/>
               <a:defRPr sz="1275" b="1">
                 <a:solidFill>
                   <a:srgbClr val="235ECB"/>
@@ -16679,6 +17628,7 @@
               </a:defRPr>
             </a:lvl8pPr>
             <a:lvl9pPr>
+              <a:buNone/>
               <a:defRPr sz="1275" b="1">
                 <a:solidFill>
                   <a:srgbClr val="235ECB"/>
@@ -16691,6 +17641,7 @@
           </a:lstStyle>
           <a:p xmlns:a="http://schemas.openxmlformats.org/drawingml/2006/main">
             <a:pPr>
+              <a:buNone/>
               <a:defRPr sz="1275" b="1">
                 <a:solidFill>
                   <a:srgbClr val="235ECB"/>
@@ -16755,6 +17706,7 @@
               </a:defRPr>
             </a:defPPr>
             <a:lvl1pPr>
+              <a:buNone/>
               <a:defRPr sz="2850" b="1">
                 <a:solidFill>
                   <a:srgbClr val="172B4D"/>
@@ -16765,6 +17717,7 @@
               </a:defRPr>
             </a:lvl1pPr>
             <a:lvl2pPr>
+              <a:buNone/>
               <a:defRPr sz="2850" b="1">
                 <a:solidFill>
                   <a:srgbClr val="172B4D"/>
@@ -16775,6 +17728,7 @@
               </a:defRPr>
             </a:lvl2pPr>
             <a:lvl3pPr>
+              <a:buNone/>
               <a:defRPr sz="2850" b="1">
                 <a:solidFill>
                   <a:srgbClr val="172B4D"/>
@@ -16785,6 +17739,7 @@
               </a:defRPr>
             </a:lvl3pPr>
             <a:lvl4pPr>
+              <a:buNone/>
               <a:defRPr sz="2850" b="1">
                 <a:solidFill>
                   <a:srgbClr val="172B4D"/>
@@ -16795,6 +17750,7 @@
               </a:defRPr>
             </a:lvl4pPr>
             <a:lvl5pPr>
+              <a:buNone/>
               <a:defRPr sz="2850" b="1">
                 <a:solidFill>
                   <a:srgbClr val="172B4D"/>
@@ -16805,6 +17761,7 @@
               </a:defRPr>
             </a:lvl5pPr>
             <a:lvl6pPr>
+              <a:buNone/>
               <a:defRPr sz="2850" b="1">
                 <a:solidFill>
                   <a:srgbClr val="172B4D"/>
@@ -16815,6 +17772,7 @@
               </a:defRPr>
             </a:lvl6pPr>
             <a:lvl7pPr>
+              <a:buNone/>
               <a:defRPr sz="2850" b="1">
                 <a:solidFill>
                   <a:srgbClr val="172B4D"/>
@@ -16825,6 +17783,7 @@
               </a:defRPr>
             </a:lvl7pPr>
             <a:lvl8pPr>
+              <a:buNone/>
               <a:defRPr sz="2850" b="1">
                 <a:solidFill>
                   <a:srgbClr val="172B4D"/>
@@ -16835,6 +17794,7 @@
               </a:defRPr>
             </a:lvl8pPr>
             <a:lvl9pPr>
+              <a:buNone/>
               <a:defRPr sz="2850" b="1">
                 <a:solidFill>
                   <a:srgbClr val="172B4D"/>
@@ -16847,6 +17807,7 @@
           </a:lstStyle>
           <a:p xmlns:a="http://schemas.openxmlformats.org/drawingml/2006/main">
             <a:pPr>
+              <a:buNone/>
               <a:defRPr sz="2850" b="1">
                 <a:solidFill>
                   <a:srgbClr val="172B4D"/>
@@ -16865,7 +17826,7 @@
                 <a:ea typeface="Apple SD Gothic Neo"/>
                 <a:cs typeface="Apple SD Gothic Neo"/>
               </a:rPr>
-              <a:t>같은 입력으로 원본과 최종 코드를 다시 측정했습니다</a:t>
+              <a:t>동일한 입력 66건으로 두 버전을 비교했습니다</a:t>
             </a:r>
           </a:p>
         </p:txBody>
@@ -16941,6 +17902,7 @@
               </a:defRPr>
             </a:defPPr>
             <a:lvl1pPr>
+              <a:buNone/>
               <a:defRPr sz="975" b="0">
                 <a:solidFill>
                   <a:srgbClr val="5D6D84"/>
@@ -16951,6 +17913,7 @@
               </a:defRPr>
             </a:lvl1pPr>
             <a:lvl2pPr>
+              <a:buNone/>
               <a:defRPr sz="975" b="0">
                 <a:solidFill>
                   <a:srgbClr val="5D6D84"/>
@@ -16961,6 +17924,7 @@
               </a:defRPr>
             </a:lvl2pPr>
             <a:lvl3pPr>
+              <a:buNone/>
               <a:defRPr sz="975" b="0">
                 <a:solidFill>
                   <a:srgbClr val="5D6D84"/>
@@ -16971,6 +17935,7 @@
               </a:defRPr>
             </a:lvl3pPr>
             <a:lvl4pPr>
+              <a:buNone/>
               <a:defRPr sz="975" b="0">
                 <a:solidFill>
                   <a:srgbClr val="5D6D84"/>
@@ -16981,6 +17946,7 @@
               </a:defRPr>
             </a:lvl4pPr>
             <a:lvl5pPr>
+              <a:buNone/>
               <a:defRPr sz="975" b="0">
                 <a:solidFill>
                   <a:srgbClr val="5D6D84"/>
@@ -16991,6 +17957,7 @@
               </a:defRPr>
             </a:lvl5pPr>
             <a:lvl6pPr>
+              <a:buNone/>
               <a:defRPr sz="975" b="0">
                 <a:solidFill>
                   <a:srgbClr val="5D6D84"/>
@@ -17001,6 +17968,7 @@
               </a:defRPr>
             </a:lvl6pPr>
             <a:lvl7pPr>
+              <a:buNone/>
               <a:defRPr sz="975" b="0">
                 <a:solidFill>
                   <a:srgbClr val="5D6D84"/>
@@ -17011,6 +17979,7 @@
               </a:defRPr>
             </a:lvl7pPr>
             <a:lvl8pPr>
+              <a:buNone/>
               <a:defRPr sz="975" b="0">
                 <a:solidFill>
                   <a:srgbClr val="5D6D84"/>
@@ -17021,6 +17990,7 @@
               </a:defRPr>
             </a:lvl8pPr>
             <a:lvl9pPr>
+              <a:buNone/>
               <a:defRPr sz="975" b="0">
                 <a:solidFill>
                   <a:srgbClr val="5D6D84"/>
@@ -17033,6 +18003,7 @@
           </a:lstStyle>
           <a:p xmlns:a="http://schemas.openxmlformats.org/drawingml/2006/main">
             <a:pPr>
+              <a:buNone/>
               <a:defRPr sz="975" b="0">
                 <a:solidFill>
                   <a:srgbClr val="5D6D84"/>
@@ -17097,6 +18068,7 @@
               </a:defRPr>
             </a:defPPr>
             <a:lvl1pPr>
+              <a:buNone/>
               <a:defRPr sz="1125" b="1">
                 <a:solidFill>
                   <a:srgbClr val="5D6D84"/>
@@ -17107,6 +18079,7 @@
               </a:defRPr>
             </a:lvl1pPr>
             <a:lvl2pPr>
+              <a:buNone/>
               <a:defRPr sz="1125" b="1">
                 <a:solidFill>
                   <a:srgbClr val="5D6D84"/>
@@ -17117,6 +18090,7 @@
               </a:defRPr>
             </a:lvl2pPr>
             <a:lvl3pPr>
+              <a:buNone/>
               <a:defRPr sz="1125" b="1">
                 <a:solidFill>
                   <a:srgbClr val="5D6D84"/>
@@ -17127,6 +18101,7 @@
               </a:defRPr>
             </a:lvl3pPr>
             <a:lvl4pPr>
+              <a:buNone/>
               <a:defRPr sz="1125" b="1">
                 <a:solidFill>
                   <a:srgbClr val="5D6D84"/>
@@ -17137,6 +18112,7 @@
               </a:defRPr>
             </a:lvl4pPr>
             <a:lvl5pPr>
+              <a:buNone/>
               <a:defRPr sz="1125" b="1">
                 <a:solidFill>
                   <a:srgbClr val="5D6D84"/>
@@ -17147,6 +18123,7 @@
               </a:defRPr>
             </a:lvl5pPr>
             <a:lvl6pPr>
+              <a:buNone/>
               <a:defRPr sz="1125" b="1">
                 <a:solidFill>
                   <a:srgbClr val="5D6D84"/>
@@ -17157,6 +18134,7 @@
               </a:defRPr>
             </a:lvl6pPr>
             <a:lvl7pPr>
+              <a:buNone/>
               <a:defRPr sz="1125" b="1">
                 <a:solidFill>
                   <a:srgbClr val="5D6D84"/>
@@ -17167,6 +18145,7 @@
               </a:defRPr>
             </a:lvl7pPr>
             <a:lvl8pPr>
+              <a:buNone/>
               <a:defRPr sz="1125" b="1">
                 <a:solidFill>
                   <a:srgbClr val="5D6D84"/>
@@ -17177,6 +18156,7 @@
               </a:defRPr>
             </a:lvl8pPr>
             <a:lvl9pPr>
+              <a:buNone/>
               <a:defRPr sz="1125" b="1">
                 <a:solidFill>
                   <a:srgbClr val="5D6D84"/>
@@ -17189,6 +18169,7 @@
           </a:lstStyle>
           <a:p xmlns:a="http://schemas.openxmlformats.org/drawingml/2006/main">
             <a:pPr>
+              <a:buNone/>
               <a:defRPr sz="1125" b="1">
                 <a:solidFill>
                   <a:srgbClr val="5D6D84"/>
@@ -17217,7 +18198,7 @@
           <p:cNvPr id="7" name="">
             <a:extLst xmlns:a="http://schemas.openxmlformats.org/drawingml/2006/main">
               <a:ext uri="{FF2B5EF4-FFF2-40B4-BE49-F238E27FC236}">
-                <a16:creationId xmlns:a16="http://schemas.microsoft.com/office/drawing/2014/main" id="{478F6B64-E4E3-43CF-8B34-AA4893D3874E}"/>
+                <a16:creationId xmlns:a16="http://schemas.microsoft.com/office/drawing/2014/main" id="{CA5FB434-7349-42BD-88E5-E318A3E21158}"/>
               </a:ext>
             </a:extLst>
           </p:cNvPr>
@@ -17996,6 +18977,7 @@
               </a:defRPr>
             </a:defPPr>
             <a:lvl1pPr>
+              <a:buNone/>
               <a:defRPr sz="1650" b="0">
                 <a:solidFill>
                   <a:srgbClr val="5D6D84"/>
@@ -18006,6 +18988,7 @@
               </a:defRPr>
             </a:lvl1pPr>
             <a:lvl2pPr>
+              <a:buNone/>
               <a:defRPr sz="1650" b="0">
                 <a:solidFill>
                   <a:srgbClr val="5D6D84"/>
@@ -18016,6 +18999,7 @@
               </a:defRPr>
             </a:lvl2pPr>
             <a:lvl3pPr>
+              <a:buNone/>
               <a:defRPr sz="1650" b="0">
                 <a:solidFill>
                   <a:srgbClr val="5D6D84"/>
@@ -18026,6 +19010,7 @@
               </a:defRPr>
             </a:lvl3pPr>
             <a:lvl4pPr>
+              <a:buNone/>
               <a:defRPr sz="1650" b="0">
                 <a:solidFill>
                   <a:srgbClr val="5D6D84"/>
@@ -18036,6 +19021,7 @@
               </a:defRPr>
             </a:lvl4pPr>
             <a:lvl5pPr>
+              <a:buNone/>
               <a:defRPr sz="1650" b="0">
                 <a:solidFill>
                   <a:srgbClr val="5D6D84"/>
@@ -18046,6 +19032,7 @@
               </a:defRPr>
             </a:lvl5pPr>
             <a:lvl6pPr>
+              <a:buNone/>
               <a:defRPr sz="1650" b="0">
                 <a:solidFill>
                   <a:srgbClr val="5D6D84"/>
@@ -18056,6 +19043,7 @@
               </a:defRPr>
             </a:lvl6pPr>
             <a:lvl7pPr>
+              <a:buNone/>
               <a:defRPr sz="1650" b="0">
                 <a:solidFill>
                   <a:srgbClr val="5D6D84"/>
@@ -18066,6 +19054,7 @@
               </a:defRPr>
             </a:lvl7pPr>
             <a:lvl8pPr>
+              <a:buNone/>
               <a:defRPr sz="1650" b="0">
                 <a:solidFill>
                   <a:srgbClr val="5D6D84"/>
@@ -18076,6 +19065,7 @@
               </a:defRPr>
             </a:lvl8pPr>
             <a:lvl9pPr>
+              <a:buNone/>
               <a:defRPr sz="1650" b="0">
                 <a:solidFill>
                   <a:srgbClr val="5D6D84"/>
@@ -18088,6 +19078,7 @@
           </a:lstStyle>
           <a:p xmlns:a="http://schemas.openxmlformats.org/drawingml/2006/main">
             <a:pPr>
+              <a:buNone/>
               <a:defRPr sz="1650" b="0">
                 <a:solidFill>
                   <a:srgbClr val="5D6D84"/>
@@ -18152,6 +19143,7 @@
               </a:defRPr>
             </a:defPPr>
             <a:lvl1pPr>
+              <a:buNone/>
               <a:defRPr sz="1425" b="0">
                 <a:solidFill>
                   <a:srgbClr val="5D6D84"/>
@@ -18162,6 +19154,7 @@
               </a:defRPr>
             </a:lvl1pPr>
             <a:lvl2pPr>
+              <a:buNone/>
               <a:defRPr sz="1425" b="0">
                 <a:solidFill>
                   <a:srgbClr val="5D6D84"/>
@@ -18172,6 +19165,7 @@
               </a:defRPr>
             </a:lvl2pPr>
             <a:lvl3pPr>
+              <a:buNone/>
               <a:defRPr sz="1425" b="0">
                 <a:solidFill>
                   <a:srgbClr val="5D6D84"/>
@@ -18182,6 +19176,7 @@
               </a:defRPr>
             </a:lvl3pPr>
             <a:lvl4pPr>
+              <a:buNone/>
               <a:defRPr sz="1425" b="0">
                 <a:solidFill>
                   <a:srgbClr val="5D6D84"/>
@@ -18192,6 +19187,7 @@
               </a:defRPr>
             </a:lvl4pPr>
             <a:lvl5pPr>
+              <a:buNone/>
               <a:defRPr sz="1425" b="0">
                 <a:solidFill>
                   <a:srgbClr val="5D6D84"/>
@@ -18202,6 +19198,7 @@
               </a:defRPr>
             </a:lvl5pPr>
             <a:lvl6pPr>
+              <a:buNone/>
               <a:defRPr sz="1425" b="0">
                 <a:solidFill>
                   <a:srgbClr val="5D6D84"/>
@@ -18212,6 +19209,7 @@
               </a:defRPr>
             </a:lvl6pPr>
             <a:lvl7pPr>
+              <a:buNone/>
               <a:defRPr sz="1425" b="0">
                 <a:solidFill>
                   <a:srgbClr val="5D6D84"/>
@@ -18222,6 +19220,7 @@
               </a:defRPr>
             </a:lvl7pPr>
             <a:lvl8pPr>
+              <a:buNone/>
               <a:defRPr sz="1425" b="0">
                 <a:solidFill>
                   <a:srgbClr val="5D6D84"/>
@@ -18232,6 +19231,7 @@
               </a:defRPr>
             </a:lvl8pPr>
             <a:lvl9pPr>
+              <a:buNone/>
               <a:defRPr sz="1425" b="0">
                 <a:solidFill>
                   <a:srgbClr val="5D6D84"/>
@@ -18244,6 +19244,7 @@
           </a:lstStyle>
           <a:p xmlns:a="http://schemas.openxmlformats.org/drawingml/2006/main">
             <a:pPr>
+              <a:buNone/>
               <a:defRPr sz="1425" b="0">
                 <a:solidFill>
                   <a:srgbClr val="5D6D84"/>
@@ -18367,6 +19368,7 @@
               </a:defRPr>
             </a:defPPr>
             <a:lvl1pPr>
+              <a:buNone/>
               <a:defRPr sz="1275" b="1">
                 <a:solidFill>
                   <a:srgbClr val="235ECB"/>
@@ -18377,6 +19379,7 @@
               </a:defRPr>
             </a:lvl1pPr>
             <a:lvl2pPr>
+              <a:buNone/>
               <a:defRPr sz="1275" b="1">
                 <a:solidFill>
                   <a:srgbClr val="235ECB"/>
@@ -18387,6 +19390,7 @@
               </a:defRPr>
             </a:lvl2pPr>
             <a:lvl3pPr>
+              <a:buNone/>
               <a:defRPr sz="1275" b="1">
                 <a:solidFill>
                   <a:srgbClr val="235ECB"/>
@@ -18397,6 +19401,7 @@
               </a:defRPr>
             </a:lvl3pPr>
             <a:lvl4pPr>
+              <a:buNone/>
               <a:defRPr sz="1275" b="1">
                 <a:solidFill>
                   <a:srgbClr val="235ECB"/>
@@ -18407,6 +19412,7 @@
               </a:defRPr>
             </a:lvl4pPr>
             <a:lvl5pPr>
+              <a:buNone/>
               <a:defRPr sz="1275" b="1">
                 <a:solidFill>
                   <a:srgbClr val="235ECB"/>
@@ -18417,6 +19423,7 @@
               </a:defRPr>
             </a:lvl5pPr>
             <a:lvl6pPr>
+              <a:buNone/>
               <a:defRPr sz="1275" b="1">
                 <a:solidFill>
                   <a:srgbClr val="235ECB"/>
@@ -18427,6 +19434,7 @@
               </a:defRPr>
             </a:lvl6pPr>
             <a:lvl7pPr>
+              <a:buNone/>
               <a:defRPr sz="1275" b="1">
                 <a:solidFill>
                   <a:srgbClr val="235ECB"/>
@@ -18437,6 +19445,7 @@
               </a:defRPr>
             </a:lvl7pPr>
             <a:lvl8pPr>
+              <a:buNone/>
               <a:defRPr sz="1275" b="1">
                 <a:solidFill>
                   <a:srgbClr val="235ECB"/>
@@ -18447,6 +19456,7 @@
               </a:defRPr>
             </a:lvl8pPr>
             <a:lvl9pPr>
+              <a:buNone/>
               <a:defRPr sz="1275" b="1">
                 <a:solidFill>
                   <a:srgbClr val="235ECB"/>
@@ -18459,6 +19469,7 @@
           </a:lstStyle>
           <a:p xmlns:a="http://schemas.openxmlformats.org/drawingml/2006/main">
             <a:pPr>
+              <a:buNone/>
               <a:defRPr sz="1275" b="1">
                 <a:solidFill>
                   <a:srgbClr val="235ECB"/>
@@ -18523,6 +19534,7 @@
               </a:defRPr>
             </a:defPPr>
             <a:lvl1pPr>
+              <a:buNone/>
               <a:defRPr sz="2850" b="1">
                 <a:solidFill>
                   <a:srgbClr val="172B4D"/>
@@ -18533,6 +19545,7 @@
               </a:defRPr>
             </a:lvl1pPr>
             <a:lvl2pPr>
+              <a:buNone/>
               <a:defRPr sz="2850" b="1">
                 <a:solidFill>
                   <a:srgbClr val="172B4D"/>
@@ -18543,6 +19556,7 @@
               </a:defRPr>
             </a:lvl2pPr>
             <a:lvl3pPr>
+              <a:buNone/>
               <a:defRPr sz="2850" b="1">
                 <a:solidFill>
                   <a:srgbClr val="172B4D"/>
@@ -18553,6 +19567,7 @@
               </a:defRPr>
             </a:lvl3pPr>
             <a:lvl4pPr>
+              <a:buNone/>
               <a:defRPr sz="2850" b="1">
                 <a:solidFill>
                   <a:srgbClr val="172B4D"/>
@@ -18563,6 +19578,7 @@
               </a:defRPr>
             </a:lvl4pPr>
             <a:lvl5pPr>
+              <a:buNone/>
               <a:defRPr sz="2850" b="1">
                 <a:solidFill>
                   <a:srgbClr val="172B4D"/>
@@ -18573,6 +19589,7 @@
               </a:defRPr>
             </a:lvl5pPr>
             <a:lvl6pPr>
+              <a:buNone/>
               <a:defRPr sz="2850" b="1">
                 <a:solidFill>
                   <a:srgbClr val="172B4D"/>
@@ -18583,6 +19600,7 @@
               </a:defRPr>
             </a:lvl6pPr>
             <a:lvl7pPr>
+              <a:buNone/>
               <a:defRPr sz="2850" b="1">
                 <a:solidFill>
                   <a:srgbClr val="172B4D"/>
@@ -18593,6 +19611,7 @@
               </a:defRPr>
             </a:lvl7pPr>
             <a:lvl8pPr>
+              <a:buNone/>
               <a:defRPr sz="2850" b="1">
                 <a:solidFill>
                   <a:srgbClr val="172B4D"/>
@@ -18603,6 +19622,7 @@
               </a:defRPr>
             </a:lvl8pPr>
             <a:lvl9pPr>
+              <a:buNone/>
               <a:defRPr sz="2850" b="1">
                 <a:solidFill>
                   <a:srgbClr val="172B4D"/>
@@ -18615,6 +19635,7 @@
           </a:lstStyle>
           <a:p xmlns:a="http://schemas.openxmlformats.org/drawingml/2006/main">
             <a:pPr>
+              <a:buNone/>
               <a:defRPr sz="2850" b="1">
                 <a:solidFill>
                   <a:srgbClr val="172B4D"/>
@@ -18709,6 +19730,7 @@
               </a:defRPr>
             </a:defPPr>
             <a:lvl1pPr>
+              <a:buNone/>
               <a:defRPr sz="975" b="0">
                 <a:solidFill>
                   <a:srgbClr val="5D6D84"/>
@@ -18719,6 +19741,7 @@
               </a:defRPr>
             </a:lvl1pPr>
             <a:lvl2pPr>
+              <a:buNone/>
               <a:defRPr sz="975" b="0">
                 <a:solidFill>
                   <a:srgbClr val="5D6D84"/>
@@ -18729,6 +19752,7 @@
               </a:defRPr>
             </a:lvl2pPr>
             <a:lvl3pPr>
+              <a:buNone/>
               <a:defRPr sz="975" b="0">
                 <a:solidFill>
                   <a:srgbClr val="5D6D84"/>
@@ -18739,6 +19763,7 @@
               </a:defRPr>
             </a:lvl3pPr>
             <a:lvl4pPr>
+              <a:buNone/>
               <a:defRPr sz="975" b="0">
                 <a:solidFill>
                   <a:srgbClr val="5D6D84"/>
@@ -18749,6 +19774,7 @@
               </a:defRPr>
             </a:lvl4pPr>
             <a:lvl5pPr>
+              <a:buNone/>
               <a:defRPr sz="975" b="0">
                 <a:solidFill>
                   <a:srgbClr val="5D6D84"/>
@@ -18759,6 +19785,7 @@
               </a:defRPr>
             </a:lvl5pPr>
             <a:lvl6pPr>
+              <a:buNone/>
               <a:defRPr sz="975" b="0">
                 <a:solidFill>
                   <a:srgbClr val="5D6D84"/>
@@ -18769,6 +19796,7 @@
               </a:defRPr>
             </a:lvl6pPr>
             <a:lvl7pPr>
+              <a:buNone/>
               <a:defRPr sz="975" b="0">
                 <a:solidFill>
                   <a:srgbClr val="5D6D84"/>
@@ -18779,6 +19807,7 @@
               </a:defRPr>
             </a:lvl7pPr>
             <a:lvl8pPr>
+              <a:buNone/>
               <a:defRPr sz="975" b="0">
                 <a:solidFill>
                   <a:srgbClr val="5D6D84"/>
@@ -18789,6 +19818,7 @@
               </a:defRPr>
             </a:lvl8pPr>
             <a:lvl9pPr>
+              <a:buNone/>
               <a:defRPr sz="975" b="0">
                 <a:solidFill>
                   <a:srgbClr val="5D6D84"/>
@@ -18801,6 +19831,7 @@
           </a:lstStyle>
           <a:p xmlns:a="http://schemas.openxmlformats.org/drawingml/2006/main">
             <a:pPr>
+              <a:buNone/>
               <a:defRPr sz="975" b="0">
                 <a:solidFill>
                   <a:srgbClr val="5D6D84"/>
@@ -18865,6 +19896,7 @@
               </a:defRPr>
             </a:defPPr>
             <a:lvl1pPr>
+              <a:buNone/>
               <a:defRPr sz="1125" b="1">
                 <a:solidFill>
                   <a:srgbClr val="5D6D84"/>
@@ -18875,6 +19907,7 @@
               </a:defRPr>
             </a:lvl1pPr>
             <a:lvl2pPr>
+              <a:buNone/>
               <a:defRPr sz="1125" b="1">
                 <a:solidFill>
                   <a:srgbClr val="5D6D84"/>
@@ -18885,6 +19918,7 @@
               </a:defRPr>
             </a:lvl2pPr>
             <a:lvl3pPr>
+              <a:buNone/>
               <a:defRPr sz="1125" b="1">
                 <a:solidFill>
                   <a:srgbClr val="5D6D84"/>
@@ -18895,6 +19929,7 @@
               </a:defRPr>
             </a:lvl3pPr>
             <a:lvl4pPr>
+              <a:buNone/>
               <a:defRPr sz="1125" b="1">
                 <a:solidFill>
                   <a:srgbClr val="5D6D84"/>
@@ -18905,6 +19940,7 @@
               </a:defRPr>
             </a:lvl4pPr>
             <a:lvl5pPr>
+              <a:buNone/>
               <a:defRPr sz="1125" b="1">
                 <a:solidFill>
                   <a:srgbClr val="5D6D84"/>
@@ -18915,6 +19951,7 @@
               </a:defRPr>
             </a:lvl5pPr>
             <a:lvl6pPr>
+              <a:buNone/>
               <a:defRPr sz="1125" b="1">
                 <a:solidFill>
                   <a:srgbClr val="5D6D84"/>
@@ -18925,6 +19962,7 @@
               </a:defRPr>
             </a:lvl6pPr>
             <a:lvl7pPr>
+              <a:buNone/>
               <a:defRPr sz="1125" b="1">
                 <a:solidFill>
                   <a:srgbClr val="5D6D84"/>
@@ -18935,6 +19973,7 @@
               </a:defRPr>
             </a:lvl7pPr>
             <a:lvl8pPr>
+              <a:buNone/>
               <a:defRPr sz="1125" b="1">
                 <a:solidFill>
                   <a:srgbClr val="5D6D84"/>
@@ -18945,6 +19984,7 @@
               </a:defRPr>
             </a:lvl8pPr>
             <a:lvl9pPr>
+              <a:buNone/>
               <a:defRPr sz="1125" b="1">
                 <a:solidFill>
                   <a:srgbClr val="5D6D84"/>
@@ -18957,6 +19997,7 @@
           </a:lstStyle>
           <a:p xmlns:a="http://schemas.openxmlformats.org/drawingml/2006/main">
             <a:pPr>
+              <a:buNone/>
               <a:defRPr sz="1125" b="1">
                 <a:solidFill>
                   <a:srgbClr val="5D6D84"/>
@@ -19081,6 +20122,7 @@
               </a:defRPr>
             </a:defPPr>
             <a:lvl1pPr>
+              <a:buNone/>
               <a:defRPr sz="2100" b="1">
                 <a:solidFill>
                   <a:srgbClr val="172B4D"/>
@@ -19091,6 +20133,7 @@
               </a:defRPr>
             </a:lvl1pPr>
             <a:lvl2pPr>
+              <a:buNone/>
               <a:defRPr sz="2100" b="1">
                 <a:solidFill>
                   <a:srgbClr val="172B4D"/>
@@ -19101,6 +20144,7 @@
               </a:defRPr>
             </a:lvl2pPr>
             <a:lvl3pPr>
+              <a:buNone/>
               <a:defRPr sz="2100" b="1">
                 <a:solidFill>
                   <a:srgbClr val="172B4D"/>
@@ -19111,6 +20155,7 @@
               </a:defRPr>
             </a:lvl3pPr>
             <a:lvl4pPr>
+              <a:buNone/>
               <a:defRPr sz="2100" b="1">
                 <a:solidFill>
                   <a:srgbClr val="172B4D"/>
@@ -19121,6 +20166,7 @@
               </a:defRPr>
             </a:lvl4pPr>
             <a:lvl5pPr>
+              <a:buNone/>
               <a:defRPr sz="2100" b="1">
                 <a:solidFill>
                   <a:srgbClr val="172B4D"/>
@@ -19131,6 +20177,7 @@
               </a:defRPr>
             </a:lvl5pPr>
             <a:lvl6pPr>
+              <a:buNone/>
               <a:defRPr sz="2100" b="1">
                 <a:solidFill>
                   <a:srgbClr val="172B4D"/>
@@ -19141,6 +20188,7 @@
               </a:defRPr>
             </a:lvl6pPr>
             <a:lvl7pPr>
+              <a:buNone/>
               <a:defRPr sz="2100" b="1">
                 <a:solidFill>
                   <a:srgbClr val="172B4D"/>
@@ -19151,6 +20199,7 @@
               </a:defRPr>
             </a:lvl7pPr>
             <a:lvl8pPr>
+              <a:buNone/>
               <a:defRPr sz="2100" b="1">
                 <a:solidFill>
                   <a:srgbClr val="172B4D"/>
@@ -19161,6 +20210,7 @@
               </a:defRPr>
             </a:lvl8pPr>
             <a:lvl9pPr>
+              <a:buNone/>
               <a:defRPr sz="2100" b="1">
                 <a:solidFill>
                   <a:srgbClr val="172B4D"/>
@@ -19173,6 +20223,7 @@
           </a:lstStyle>
           <a:p xmlns:a="http://schemas.openxmlformats.org/drawingml/2006/main">
             <a:pPr>
+              <a:buNone/>
               <a:defRPr sz="2100" b="1">
                 <a:solidFill>
                   <a:srgbClr val="172B4D"/>
@@ -19237,6 +20288,7 @@
               </a:defRPr>
             </a:defPPr>
             <a:lvl1pPr>
+              <a:buNone/>
               <a:defRPr sz="1800" b="0">
                 <a:solidFill>
                   <a:srgbClr val="253650"/>
@@ -19247,6 +20299,7 @@
               </a:defRPr>
             </a:lvl1pPr>
             <a:lvl2pPr>
+              <a:buNone/>
               <a:defRPr sz="1800" b="0">
                 <a:solidFill>
                   <a:srgbClr val="253650"/>
@@ -19257,6 +20310,7 @@
               </a:defRPr>
             </a:lvl2pPr>
             <a:lvl3pPr>
+              <a:buNone/>
               <a:defRPr sz="1800" b="0">
                 <a:solidFill>
                   <a:srgbClr val="253650"/>
@@ -19267,6 +20321,7 @@
               </a:defRPr>
             </a:lvl3pPr>
             <a:lvl4pPr>
+              <a:buNone/>
               <a:defRPr sz="1800" b="0">
                 <a:solidFill>
                   <a:srgbClr val="253650"/>
@@ -19277,6 +20332,7 @@
               </a:defRPr>
             </a:lvl4pPr>
             <a:lvl5pPr>
+              <a:buNone/>
               <a:defRPr sz="1800" b="0">
                 <a:solidFill>
                   <a:srgbClr val="253650"/>
@@ -19287,6 +20343,7 @@
               </a:defRPr>
             </a:lvl5pPr>
             <a:lvl6pPr>
+              <a:buNone/>
               <a:defRPr sz="1800" b="0">
                 <a:solidFill>
                   <a:srgbClr val="253650"/>
@@ -19297,6 +20354,7 @@
               </a:defRPr>
             </a:lvl6pPr>
             <a:lvl7pPr>
+              <a:buNone/>
               <a:defRPr sz="1800" b="0">
                 <a:solidFill>
                   <a:srgbClr val="253650"/>
@@ -19307,6 +20365,7 @@
               </a:defRPr>
             </a:lvl7pPr>
             <a:lvl8pPr>
+              <a:buNone/>
               <a:defRPr sz="1800" b="0">
                 <a:solidFill>
                   <a:srgbClr val="253650"/>
@@ -19317,6 +20376,7 @@
               </a:defRPr>
             </a:lvl8pPr>
             <a:lvl9pPr>
+              <a:buNone/>
               <a:defRPr sz="1800" b="0">
                 <a:solidFill>
                   <a:srgbClr val="253650"/>
@@ -19329,6 +20389,7 @@
           </a:lstStyle>
           <a:p xmlns:a="http://schemas.openxmlformats.org/drawingml/2006/main">
             <a:pPr>
+              <a:buNone/>
               <a:defRPr sz="1800" b="0">
                 <a:solidFill>
                   <a:srgbClr val="253650"/>
@@ -19347,11 +20408,12 @@
                 <a:ea typeface="Apple SD Gothic Neo"/>
                 <a:cs typeface="Apple SD Gothic Neo"/>
               </a:rPr>
-              <a:t>관련 근거와 Reviewer 입력이 추가됩니다.</a:t>
+              <a:t>근거·조건과 Reviewer 입력으로</a:t>
             </a:r>
           </a:p>
           <a:p xmlns:a="http://schemas.openxmlformats.org/drawingml/2006/main">
             <a:pPr>
+              <a:buNone/>
               <a:defRPr sz="1800" b="0">
                 <a:solidFill>
                   <a:srgbClr val="253650"/>
@@ -19370,7 +20432,31 @@
                 <a:ea typeface="Apple SD Gothic Neo"/>
                 <a:cs typeface="Apple SD Gothic Neo"/>
               </a:rPr>
-              <a:t>토큰 증가를 숨기지 않고 시간과 별도로 비교합니다.</a:t>
+              <a:t>전체 토큰이 원본보다 늘었습니다.</a:t>
+            </a:r>
+          </a:p>
+          <a:p xmlns:a="http://schemas.openxmlformats.org/drawingml/2006/main">
+            <a:pPr>
+              <a:buNone/>
+              <a:defRPr sz="1800" b="0">
+                <a:solidFill>
+                  <a:srgbClr val="253650"/>
+                </a:solidFill>
+                <a:latin typeface="Apple SD Gothic Neo"/>
+                <a:ea typeface="Apple SD Gothic Neo"/>
+                <a:cs typeface="Apple SD Gothic Neo"/>
+              </a:defRPr>
+            </a:pPr>
+            <a:r>
+              <a:rPr sz="1800" b="0">
+                <a:solidFill>
+                  <a:srgbClr val="253650"/>
+                </a:solidFill>
+                <a:latin typeface="Apple SD Gothic Neo"/>
+                <a:ea typeface="Apple SD Gothic Neo"/>
+                <a:cs typeface="Apple SD Gothic Neo"/>
+              </a:rPr>
+              <a:t>처리시간과 사용량을 구분해 봤습니다.</a:t>
             </a:r>
           </a:p>
         </p:txBody>
@@ -19476,6 +20562,7 @@
               </a:defRPr>
             </a:defPPr>
             <a:lvl1pPr>
+              <a:buNone/>
               <a:defRPr sz="2100" b="1">
                 <a:solidFill>
                   <a:srgbClr val="172B4D"/>
@@ -19486,6 +20573,7 @@
               </a:defRPr>
             </a:lvl1pPr>
             <a:lvl2pPr>
+              <a:buNone/>
               <a:defRPr sz="2100" b="1">
                 <a:solidFill>
                   <a:srgbClr val="172B4D"/>
@@ -19496,6 +20584,7 @@
               </a:defRPr>
             </a:lvl2pPr>
             <a:lvl3pPr>
+              <a:buNone/>
               <a:defRPr sz="2100" b="1">
                 <a:solidFill>
                   <a:srgbClr val="172B4D"/>
@@ -19506,6 +20595,7 @@
               </a:defRPr>
             </a:lvl3pPr>
             <a:lvl4pPr>
+              <a:buNone/>
               <a:defRPr sz="2100" b="1">
                 <a:solidFill>
                   <a:srgbClr val="172B4D"/>
@@ -19516,6 +20606,7 @@
               </a:defRPr>
             </a:lvl4pPr>
             <a:lvl5pPr>
+              <a:buNone/>
               <a:defRPr sz="2100" b="1">
                 <a:solidFill>
                   <a:srgbClr val="172B4D"/>
@@ -19526,6 +20617,7 @@
               </a:defRPr>
             </a:lvl5pPr>
             <a:lvl6pPr>
+              <a:buNone/>
               <a:defRPr sz="2100" b="1">
                 <a:solidFill>
                   <a:srgbClr val="172B4D"/>
@@ -19536,6 +20628,7 @@
               </a:defRPr>
             </a:lvl6pPr>
             <a:lvl7pPr>
+              <a:buNone/>
               <a:defRPr sz="2100" b="1">
                 <a:solidFill>
                   <a:srgbClr val="172B4D"/>
@@ -19546,6 +20639,7 @@
               </a:defRPr>
             </a:lvl7pPr>
             <a:lvl8pPr>
+              <a:buNone/>
               <a:defRPr sz="2100" b="1">
                 <a:solidFill>
                   <a:srgbClr val="172B4D"/>
@@ -19556,6 +20650,7 @@
               </a:defRPr>
             </a:lvl8pPr>
             <a:lvl9pPr>
+              <a:buNone/>
               <a:defRPr sz="2100" b="1">
                 <a:solidFill>
                   <a:srgbClr val="172B4D"/>
@@ -19568,6 +20663,7 @@
           </a:lstStyle>
           <a:p xmlns:a="http://schemas.openxmlformats.org/drawingml/2006/main">
             <a:pPr>
+              <a:buNone/>
               <a:defRPr sz="2100" b="1">
                 <a:solidFill>
                   <a:srgbClr val="172B4D"/>
@@ -19632,6 +20728,7 @@
               </a:defRPr>
             </a:defPPr>
             <a:lvl1pPr>
+              <a:buNone/>
               <a:defRPr sz="1800" b="0">
                 <a:solidFill>
                   <a:srgbClr val="253650"/>
@@ -19642,6 +20739,7 @@
               </a:defRPr>
             </a:lvl1pPr>
             <a:lvl2pPr>
+              <a:buNone/>
               <a:defRPr sz="1800" b="0">
                 <a:solidFill>
                   <a:srgbClr val="253650"/>
@@ -19652,6 +20750,7 @@
               </a:defRPr>
             </a:lvl2pPr>
             <a:lvl3pPr>
+              <a:buNone/>
               <a:defRPr sz="1800" b="0">
                 <a:solidFill>
                   <a:srgbClr val="253650"/>
@@ -19662,6 +20761,7 @@
               </a:defRPr>
             </a:lvl3pPr>
             <a:lvl4pPr>
+              <a:buNone/>
               <a:defRPr sz="1800" b="0">
                 <a:solidFill>
                   <a:srgbClr val="253650"/>
@@ -19672,6 +20772,7 @@
               </a:defRPr>
             </a:lvl4pPr>
             <a:lvl5pPr>
+              <a:buNone/>
               <a:defRPr sz="1800" b="0">
                 <a:solidFill>
                   <a:srgbClr val="253650"/>
@@ -19682,6 +20783,7 @@
               </a:defRPr>
             </a:lvl5pPr>
             <a:lvl6pPr>
+              <a:buNone/>
               <a:defRPr sz="1800" b="0">
                 <a:solidFill>
                   <a:srgbClr val="253650"/>
@@ -19692,6 +20794,7 @@
               </a:defRPr>
             </a:lvl6pPr>
             <a:lvl7pPr>
+              <a:buNone/>
               <a:defRPr sz="1800" b="0">
                 <a:solidFill>
                   <a:srgbClr val="253650"/>
@@ -19702,6 +20805,7 @@
               </a:defRPr>
             </a:lvl7pPr>
             <a:lvl8pPr>
+              <a:buNone/>
               <a:defRPr sz="1800" b="0">
                 <a:solidFill>
                   <a:srgbClr val="253650"/>
@@ -19712,6 +20816,7 @@
               </a:defRPr>
             </a:lvl8pPr>
             <a:lvl9pPr>
+              <a:buNone/>
               <a:defRPr sz="1800" b="0">
                 <a:solidFill>
                   <a:srgbClr val="253650"/>
@@ -19724,6 +20829,7 @@
           </a:lstStyle>
           <a:p xmlns:a="http://schemas.openxmlformats.org/drawingml/2006/main">
             <a:pPr>
+              <a:buNone/>
               <a:defRPr sz="1800" b="0">
                 <a:solidFill>
                   <a:srgbClr val="253650"/>
@@ -19747,6 +20853,7 @@
           </a:p>
           <a:p xmlns:a="http://schemas.openxmlformats.org/drawingml/2006/main">
             <a:pPr>
+              <a:buNone/>
               <a:defRPr sz="1800" b="0">
                 <a:solidFill>
                   <a:srgbClr val="253650"/>
@@ -19871,6 +20978,7 @@
               </a:defRPr>
             </a:defPPr>
             <a:lvl1pPr>
+              <a:buNone/>
               <a:defRPr sz="2100" b="1">
                 <a:solidFill>
                   <a:srgbClr val="172B4D"/>
@@ -19881,6 +20989,7 @@
               </a:defRPr>
             </a:lvl1pPr>
             <a:lvl2pPr>
+              <a:buNone/>
               <a:defRPr sz="2100" b="1">
                 <a:solidFill>
                   <a:srgbClr val="172B4D"/>
@@ -19891,6 +21000,7 @@
               </a:defRPr>
             </a:lvl2pPr>
             <a:lvl3pPr>
+              <a:buNone/>
               <a:defRPr sz="2100" b="1">
                 <a:solidFill>
                   <a:srgbClr val="172B4D"/>
@@ -19901,6 +21011,7 @@
               </a:defRPr>
             </a:lvl3pPr>
             <a:lvl4pPr>
+              <a:buNone/>
               <a:defRPr sz="2100" b="1">
                 <a:solidFill>
                   <a:srgbClr val="172B4D"/>
@@ -19911,6 +21022,7 @@
               </a:defRPr>
             </a:lvl4pPr>
             <a:lvl5pPr>
+              <a:buNone/>
               <a:defRPr sz="2100" b="1">
                 <a:solidFill>
                   <a:srgbClr val="172B4D"/>
@@ -19921,6 +21033,7 @@
               </a:defRPr>
             </a:lvl5pPr>
             <a:lvl6pPr>
+              <a:buNone/>
               <a:defRPr sz="2100" b="1">
                 <a:solidFill>
                   <a:srgbClr val="172B4D"/>
@@ -19931,6 +21044,7 @@
               </a:defRPr>
             </a:lvl6pPr>
             <a:lvl7pPr>
+              <a:buNone/>
               <a:defRPr sz="2100" b="1">
                 <a:solidFill>
                   <a:srgbClr val="172B4D"/>
@@ -19941,6 +21055,7 @@
               </a:defRPr>
             </a:lvl7pPr>
             <a:lvl8pPr>
+              <a:buNone/>
               <a:defRPr sz="2100" b="1">
                 <a:solidFill>
                   <a:srgbClr val="172B4D"/>
@@ -19951,6 +21066,7 @@
               </a:defRPr>
             </a:lvl8pPr>
             <a:lvl9pPr>
+              <a:buNone/>
               <a:defRPr sz="2100" b="1">
                 <a:solidFill>
                   <a:srgbClr val="172B4D"/>
@@ -19963,6 +21079,7 @@
           </a:lstStyle>
           <a:p xmlns:a="http://schemas.openxmlformats.org/drawingml/2006/main">
             <a:pPr>
+              <a:buNone/>
               <a:defRPr sz="2100" b="1">
                 <a:solidFill>
                   <a:srgbClr val="172B4D"/>
@@ -20027,6 +21144,7 @@
               </a:defRPr>
             </a:defPPr>
             <a:lvl1pPr>
+              <a:buNone/>
               <a:defRPr sz="1800" b="0">
                 <a:solidFill>
                   <a:srgbClr val="253650"/>
@@ -20037,6 +21155,7 @@
               </a:defRPr>
             </a:lvl1pPr>
             <a:lvl2pPr>
+              <a:buNone/>
               <a:defRPr sz="1800" b="0">
                 <a:solidFill>
                   <a:srgbClr val="253650"/>
@@ -20047,6 +21166,7 @@
               </a:defRPr>
             </a:lvl2pPr>
             <a:lvl3pPr>
+              <a:buNone/>
               <a:defRPr sz="1800" b="0">
                 <a:solidFill>
                   <a:srgbClr val="253650"/>
@@ -20057,6 +21177,7 @@
               </a:defRPr>
             </a:lvl3pPr>
             <a:lvl4pPr>
+              <a:buNone/>
               <a:defRPr sz="1800" b="0">
                 <a:solidFill>
                   <a:srgbClr val="253650"/>
@@ -20067,6 +21188,7 @@
               </a:defRPr>
             </a:lvl4pPr>
             <a:lvl5pPr>
+              <a:buNone/>
               <a:defRPr sz="1800" b="0">
                 <a:solidFill>
                   <a:srgbClr val="253650"/>
@@ -20077,6 +21199,7 @@
               </a:defRPr>
             </a:lvl5pPr>
             <a:lvl6pPr>
+              <a:buNone/>
               <a:defRPr sz="1800" b="0">
                 <a:solidFill>
                   <a:srgbClr val="253650"/>
@@ -20087,6 +21210,7 @@
               </a:defRPr>
             </a:lvl6pPr>
             <a:lvl7pPr>
+              <a:buNone/>
               <a:defRPr sz="1800" b="0">
                 <a:solidFill>
                   <a:srgbClr val="253650"/>
@@ -20097,6 +21221,7 @@
               </a:defRPr>
             </a:lvl7pPr>
             <a:lvl8pPr>
+              <a:buNone/>
               <a:defRPr sz="1800" b="0">
                 <a:solidFill>
                   <a:srgbClr val="253650"/>
@@ -20107,6 +21232,7 @@
               </a:defRPr>
             </a:lvl8pPr>
             <a:lvl9pPr>
+              <a:buNone/>
               <a:defRPr sz="1800" b="0">
                 <a:solidFill>
                   <a:srgbClr val="253650"/>
@@ -20119,6 +21245,7 @@
           </a:lstStyle>
           <a:p xmlns:a="http://schemas.openxmlformats.org/drawingml/2006/main">
             <a:pPr>
+              <a:buNone/>
               <a:defRPr sz="1800" b="0">
                 <a:solidFill>
                   <a:srgbClr val="253650"/>
@@ -20242,6 +21369,7 @@
               </a:defRPr>
             </a:defPPr>
             <a:lvl1pPr>
+              <a:buNone/>
               <a:defRPr sz="1275" b="1">
                 <a:solidFill>
                   <a:srgbClr val="235ECB"/>
@@ -20252,6 +21380,7 @@
               </a:defRPr>
             </a:lvl1pPr>
             <a:lvl2pPr>
+              <a:buNone/>
               <a:defRPr sz="1275" b="1">
                 <a:solidFill>
                   <a:srgbClr val="235ECB"/>
@@ -20262,6 +21391,7 @@
               </a:defRPr>
             </a:lvl2pPr>
             <a:lvl3pPr>
+              <a:buNone/>
               <a:defRPr sz="1275" b="1">
                 <a:solidFill>
                   <a:srgbClr val="235ECB"/>
@@ -20272,6 +21402,7 @@
               </a:defRPr>
             </a:lvl3pPr>
             <a:lvl4pPr>
+              <a:buNone/>
               <a:defRPr sz="1275" b="1">
                 <a:solidFill>
                   <a:srgbClr val="235ECB"/>
@@ -20282,6 +21413,7 @@
               </a:defRPr>
             </a:lvl4pPr>
             <a:lvl5pPr>
+              <a:buNone/>
               <a:defRPr sz="1275" b="1">
                 <a:solidFill>
                   <a:srgbClr val="235ECB"/>
@@ -20292,6 +21424,7 @@
               </a:defRPr>
             </a:lvl5pPr>
             <a:lvl6pPr>
+              <a:buNone/>
               <a:defRPr sz="1275" b="1">
                 <a:solidFill>
                   <a:srgbClr val="235ECB"/>
@@ -20302,6 +21435,7 @@
               </a:defRPr>
             </a:lvl6pPr>
             <a:lvl7pPr>
+              <a:buNone/>
               <a:defRPr sz="1275" b="1">
                 <a:solidFill>
                   <a:srgbClr val="235ECB"/>
@@ -20312,6 +21446,7 @@
               </a:defRPr>
             </a:lvl7pPr>
             <a:lvl8pPr>
+              <a:buNone/>
               <a:defRPr sz="1275" b="1">
                 <a:solidFill>
                   <a:srgbClr val="235ECB"/>
@@ -20322,6 +21457,7 @@
               </a:defRPr>
             </a:lvl8pPr>
             <a:lvl9pPr>
+              <a:buNone/>
               <a:defRPr sz="1275" b="1">
                 <a:solidFill>
                   <a:srgbClr val="235ECB"/>
@@ -20334,6 +21470,7 @@
           </a:lstStyle>
           <a:p xmlns:a="http://schemas.openxmlformats.org/drawingml/2006/main">
             <a:pPr>
+              <a:buNone/>
               <a:defRPr sz="1275" b="1">
                 <a:solidFill>
                   <a:srgbClr val="235ECB"/>
@@ -20398,6 +21535,7 @@
               </a:defRPr>
             </a:defPPr>
             <a:lvl1pPr>
+              <a:buNone/>
               <a:defRPr sz="2850" b="1">
                 <a:solidFill>
                   <a:srgbClr val="172B4D"/>
@@ -20408,6 +21546,7 @@
               </a:defRPr>
             </a:lvl1pPr>
             <a:lvl2pPr>
+              <a:buNone/>
               <a:defRPr sz="2850" b="1">
                 <a:solidFill>
                   <a:srgbClr val="172B4D"/>
@@ -20418,6 +21557,7 @@
               </a:defRPr>
             </a:lvl2pPr>
             <a:lvl3pPr>
+              <a:buNone/>
               <a:defRPr sz="2850" b="1">
                 <a:solidFill>
                   <a:srgbClr val="172B4D"/>
@@ -20428,6 +21568,7 @@
               </a:defRPr>
             </a:lvl3pPr>
             <a:lvl4pPr>
+              <a:buNone/>
               <a:defRPr sz="2850" b="1">
                 <a:solidFill>
                   <a:srgbClr val="172B4D"/>
@@ -20438,6 +21579,7 @@
               </a:defRPr>
             </a:lvl4pPr>
             <a:lvl5pPr>
+              <a:buNone/>
               <a:defRPr sz="2850" b="1">
                 <a:solidFill>
                   <a:srgbClr val="172B4D"/>
@@ -20448,6 +21590,7 @@
               </a:defRPr>
             </a:lvl5pPr>
             <a:lvl6pPr>
+              <a:buNone/>
               <a:defRPr sz="2850" b="1">
                 <a:solidFill>
                   <a:srgbClr val="172B4D"/>
@@ -20458,6 +21601,7 @@
               </a:defRPr>
             </a:lvl6pPr>
             <a:lvl7pPr>
+              <a:buNone/>
               <a:defRPr sz="2850" b="1">
                 <a:solidFill>
                   <a:srgbClr val="172B4D"/>
@@ -20468,6 +21612,7 @@
               </a:defRPr>
             </a:lvl7pPr>
             <a:lvl8pPr>
+              <a:buNone/>
               <a:defRPr sz="2850" b="1">
                 <a:solidFill>
                   <a:srgbClr val="172B4D"/>
@@ -20478,6 +21623,7 @@
               </a:defRPr>
             </a:lvl8pPr>
             <a:lvl9pPr>
+              <a:buNone/>
               <a:defRPr sz="2850" b="1">
                 <a:solidFill>
                   <a:srgbClr val="172B4D"/>
@@ -20490,6 +21636,7 @@
           </a:lstStyle>
           <a:p xmlns:a="http://schemas.openxmlformats.org/drawingml/2006/main">
             <a:pPr>
+              <a:buNone/>
               <a:defRPr sz="2850" b="1">
                 <a:solidFill>
                   <a:srgbClr val="172B4D"/>
@@ -20508,7 +21655,7 @@
                 <a:ea typeface="Apple SD Gothic Neo"/>
                 <a:cs typeface="Apple SD Gothic Neo"/>
               </a:rPr>
-              <a:t>코드·실측·발표 증빙을 구분해 정리했습니다</a:t>
+              <a:t>원본의 기능과 실제 변경을 구분했습니다</a:t>
             </a:r>
           </a:p>
         </p:txBody>
@@ -20584,6 +21731,7 @@
               </a:defRPr>
             </a:defPPr>
             <a:lvl1pPr>
+              <a:buNone/>
               <a:defRPr sz="975" b="0">
                 <a:solidFill>
                   <a:srgbClr val="5D6D84"/>
@@ -20594,6 +21742,7 @@
               </a:defRPr>
             </a:lvl1pPr>
             <a:lvl2pPr>
+              <a:buNone/>
               <a:defRPr sz="975" b="0">
                 <a:solidFill>
                   <a:srgbClr val="5D6D84"/>
@@ -20604,6 +21753,7 @@
               </a:defRPr>
             </a:lvl2pPr>
             <a:lvl3pPr>
+              <a:buNone/>
               <a:defRPr sz="975" b="0">
                 <a:solidFill>
                   <a:srgbClr val="5D6D84"/>
@@ -20614,6 +21764,7 @@
               </a:defRPr>
             </a:lvl3pPr>
             <a:lvl4pPr>
+              <a:buNone/>
               <a:defRPr sz="975" b="0">
                 <a:solidFill>
                   <a:srgbClr val="5D6D84"/>
@@ -20624,6 +21775,7 @@
               </a:defRPr>
             </a:lvl4pPr>
             <a:lvl5pPr>
+              <a:buNone/>
               <a:defRPr sz="975" b="0">
                 <a:solidFill>
                   <a:srgbClr val="5D6D84"/>
@@ -20634,6 +21786,7 @@
               </a:defRPr>
             </a:lvl5pPr>
             <a:lvl6pPr>
+              <a:buNone/>
               <a:defRPr sz="975" b="0">
                 <a:solidFill>
                   <a:srgbClr val="5D6D84"/>
@@ -20644,6 +21797,7 @@
               </a:defRPr>
             </a:lvl6pPr>
             <a:lvl7pPr>
+              <a:buNone/>
               <a:defRPr sz="975" b="0">
                 <a:solidFill>
                   <a:srgbClr val="5D6D84"/>
@@ -20654,6 +21808,7 @@
               </a:defRPr>
             </a:lvl7pPr>
             <a:lvl8pPr>
+              <a:buNone/>
               <a:defRPr sz="975" b="0">
                 <a:solidFill>
                   <a:srgbClr val="5D6D84"/>
@@ -20664,6 +21819,7 @@
               </a:defRPr>
             </a:lvl8pPr>
             <a:lvl9pPr>
+              <a:buNone/>
               <a:defRPr sz="975" b="0">
                 <a:solidFill>
                   <a:srgbClr val="5D6D84"/>
@@ -20676,6 +21832,7 @@
           </a:lstStyle>
           <a:p xmlns:a="http://schemas.openxmlformats.org/drawingml/2006/main">
             <a:pPr>
+              <a:buNone/>
               <a:defRPr sz="975" b="0">
                 <a:solidFill>
                   <a:srgbClr val="5D6D84"/>
@@ -20694,7 +21851,7 @@
                 <a:ea typeface="Apple SD Gothic Neo"/>
                 <a:cs typeface="Apple SD Gothic Neo"/>
               </a:rPr>
-              <a:t>근거: doc/final_review.md / tests / LangSmith / 실제 응답 기록</a:t>
+              <a:t>근거: original_final_feature_audit.md / final_review.md / 실제 응답 기록</a:t>
             </a:r>
           </a:p>
         </p:txBody>
@@ -20740,6 +21897,7 @@
               </a:defRPr>
             </a:defPPr>
             <a:lvl1pPr>
+              <a:buNone/>
               <a:defRPr sz="1125" b="1">
                 <a:solidFill>
                   <a:srgbClr val="5D6D84"/>
@@ -20750,6 +21908,7 @@
               </a:defRPr>
             </a:lvl1pPr>
             <a:lvl2pPr>
+              <a:buNone/>
               <a:defRPr sz="1125" b="1">
                 <a:solidFill>
                   <a:srgbClr val="5D6D84"/>
@@ -20760,6 +21919,7 @@
               </a:defRPr>
             </a:lvl2pPr>
             <a:lvl3pPr>
+              <a:buNone/>
               <a:defRPr sz="1125" b="1">
                 <a:solidFill>
                   <a:srgbClr val="5D6D84"/>
@@ -20770,6 +21930,7 @@
               </a:defRPr>
             </a:lvl3pPr>
             <a:lvl4pPr>
+              <a:buNone/>
               <a:defRPr sz="1125" b="1">
                 <a:solidFill>
                   <a:srgbClr val="5D6D84"/>
@@ -20780,6 +21941,7 @@
               </a:defRPr>
             </a:lvl4pPr>
             <a:lvl5pPr>
+              <a:buNone/>
               <a:defRPr sz="1125" b="1">
                 <a:solidFill>
                   <a:srgbClr val="5D6D84"/>
@@ -20790,6 +21952,7 @@
               </a:defRPr>
             </a:lvl5pPr>
             <a:lvl6pPr>
+              <a:buNone/>
               <a:defRPr sz="1125" b="1">
                 <a:solidFill>
                   <a:srgbClr val="5D6D84"/>
@@ -20800,6 +21963,7 @@
               </a:defRPr>
             </a:lvl6pPr>
             <a:lvl7pPr>
+              <a:buNone/>
               <a:defRPr sz="1125" b="1">
                 <a:solidFill>
                   <a:srgbClr val="5D6D84"/>
@@ -20810,6 +21974,7 @@
               </a:defRPr>
             </a:lvl7pPr>
             <a:lvl8pPr>
+              <a:buNone/>
               <a:defRPr sz="1125" b="1">
                 <a:solidFill>
                   <a:srgbClr val="5D6D84"/>
@@ -20820,6 +21985,7 @@
               </a:defRPr>
             </a:lvl8pPr>
             <a:lvl9pPr>
+              <a:buNone/>
               <a:defRPr sz="1125" b="1">
                 <a:solidFill>
                   <a:srgbClr val="5D6D84"/>
@@ -20832,6 +21998,7 @@
           </a:lstStyle>
           <a:p xmlns:a="http://schemas.openxmlformats.org/drawingml/2006/main">
             <a:pPr>
+              <a:buNone/>
               <a:defRPr sz="1125" b="1">
                 <a:solidFill>
                   <a:srgbClr val="5D6D84"/>
@@ -20926,6 +22093,7 @@
               </a:defRPr>
             </a:defPPr>
             <a:lvl1pPr>
+              <a:buNone/>
               <a:defRPr sz="2550" b="1">
                 <a:solidFill>
                   <a:srgbClr val="0E7267"/>
@@ -20936,6 +22104,7 @@
               </a:defRPr>
             </a:lvl1pPr>
             <a:lvl2pPr>
+              <a:buNone/>
               <a:defRPr sz="2550" b="1">
                 <a:solidFill>
                   <a:srgbClr val="0E7267"/>
@@ -20946,6 +22115,7 @@
               </a:defRPr>
             </a:lvl2pPr>
             <a:lvl3pPr>
+              <a:buNone/>
               <a:defRPr sz="2550" b="1">
                 <a:solidFill>
                   <a:srgbClr val="0E7267"/>
@@ -20956,6 +22126,7 @@
               </a:defRPr>
             </a:lvl3pPr>
             <a:lvl4pPr>
+              <a:buNone/>
               <a:defRPr sz="2550" b="1">
                 <a:solidFill>
                   <a:srgbClr val="0E7267"/>
@@ -20966,6 +22137,7 @@
               </a:defRPr>
             </a:lvl4pPr>
             <a:lvl5pPr>
+              <a:buNone/>
               <a:defRPr sz="2550" b="1">
                 <a:solidFill>
                   <a:srgbClr val="0E7267"/>
@@ -20976,6 +22148,7 @@
               </a:defRPr>
             </a:lvl5pPr>
             <a:lvl6pPr>
+              <a:buNone/>
               <a:defRPr sz="2550" b="1">
                 <a:solidFill>
                   <a:srgbClr val="0E7267"/>
@@ -20986,6 +22159,7 @@
               </a:defRPr>
             </a:lvl6pPr>
             <a:lvl7pPr>
+              <a:buNone/>
               <a:defRPr sz="2550" b="1">
                 <a:solidFill>
                   <a:srgbClr val="0E7267"/>
@@ -20996,6 +22170,7 @@
               </a:defRPr>
             </a:lvl7pPr>
             <a:lvl8pPr>
+              <a:buNone/>
               <a:defRPr sz="2550" b="1">
                 <a:solidFill>
                   <a:srgbClr val="0E7267"/>
@@ -21006,6 +22181,7 @@
               </a:defRPr>
             </a:lvl8pPr>
             <a:lvl9pPr>
+              <a:buNone/>
               <a:defRPr sz="2550" b="1">
                 <a:solidFill>
                   <a:srgbClr val="0E7267"/>
@@ -21018,6 +22194,7 @@
           </a:lstStyle>
           <a:p xmlns:a="http://schemas.openxmlformats.org/drawingml/2006/main">
             <a:pPr>
+              <a:buNone/>
               <a:defRPr sz="2550" b="1">
                 <a:solidFill>
                   <a:srgbClr val="0E7267"/>
@@ -21082,6 +22259,7 @@
               </a:defRPr>
             </a:defPPr>
             <a:lvl1pPr>
+              <a:buNone/>
               <a:defRPr sz="2250" b="1">
                 <a:solidFill>
                   <a:srgbClr val="172B4D"/>
@@ -21092,6 +22270,7 @@
               </a:defRPr>
             </a:lvl1pPr>
             <a:lvl2pPr>
+              <a:buNone/>
               <a:defRPr sz="2250" b="1">
                 <a:solidFill>
                   <a:srgbClr val="172B4D"/>
@@ -21102,6 +22281,7 @@
               </a:defRPr>
             </a:lvl2pPr>
             <a:lvl3pPr>
+              <a:buNone/>
               <a:defRPr sz="2250" b="1">
                 <a:solidFill>
                   <a:srgbClr val="172B4D"/>
@@ -21112,6 +22292,7 @@
               </a:defRPr>
             </a:lvl3pPr>
             <a:lvl4pPr>
+              <a:buNone/>
               <a:defRPr sz="2250" b="1">
                 <a:solidFill>
                   <a:srgbClr val="172B4D"/>
@@ -21122,6 +22303,7 @@
               </a:defRPr>
             </a:lvl4pPr>
             <a:lvl5pPr>
+              <a:buNone/>
               <a:defRPr sz="2250" b="1">
                 <a:solidFill>
                   <a:srgbClr val="172B4D"/>
@@ -21132,6 +22314,7 @@
               </a:defRPr>
             </a:lvl5pPr>
             <a:lvl6pPr>
+              <a:buNone/>
               <a:defRPr sz="2250" b="1">
                 <a:solidFill>
                   <a:srgbClr val="172B4D"/>
@@ -21142,6 +22325,7 @@
               </a:defRPr>
             </a:lvl6pPr>
             <a:lvl7pPr>
+              <a:buNone/>
               <a:defRPr sz="2250" b="1">
                 <a:solidFill>
                   <a:srgbClr val="172B4D"/>
@@ -21152,6 +22336,7 @@
               </a:defRPr>
             </a:lvl7pPr>
             <a:lvl8pPr>
+              <a:buNone/>
               <a:defRPr sz="2250" b="1">
                 <a:solidFill>
                   <a:srgbClr val="172B4D"/>
@@ -21162,6 +22347,7 @@
               </a:defRPr>
             </a:lvl8pPr>
             <a:lvl9pPr>
+              <a:buNone/>
               <a:defRPr sz="2250" b="1">
                 <a:solidFill>
                   <a:srgbClr val="172B4D"/>
@@ -21174,6 +22360,7 @@
           </a:lstStyle>
           <a:p xmlns:a="http://schemas.openxmlformats.org/drawingml/2006/main">
             <a:pPr>
+              <a:buNone/>
               <a:defRPr sz="2250" b="1">
                 <a:solidFill>
                   <a:srgbClr val="172B4D"/>
@@ -21238,6 +22425,7 @@
               </a:defRPr>
             </a:defPPr>
             <a:lvl1pPr>
+              <a:buNone/>
               <a:defRPr sz="1950" b="0">
                 <a:solidFill>
                   <a:srgbClr val="253650"/>
@@ -21248,6 +22436,7 @@
               </a:defRPr>
             </a:lvl1pPr>
             <a:lvl2pPr>
+              <a:buNone/>
               <a:defRPr sz="1950" b="0">
                 <a:solidFill>
                   <a:srgbClr val="253650"/>
@@ -21258,6 +22447,7 @@
               </a:defRPr>
             </a:lvl2pPr>
             <a:lvl3pPr>
+              <a:buNone/>
               <a:defRPr sz="1950" b="0">
                 <a:solidFill>
                   <a:srgbClr val="253650"/>
@@ -21268,6 +22458,7 @@
               </a:defRPr>
             </a:lvl3pPr>
             <a:lvl4pPr>
+              <a:buNone/>
               <a:defRPr sz="1950" b="0">
                 <a:solidFill>
                   <a:srgbClr val="253650"/>
@@ -21278,6 +22469,7 @@
               </a:defRPr>
             </a:lvl4pPr>
             <a:lvl5pPr>
+              <a:buNone/>
               <a:defRPr sz="1950" b="0">
                 <a:solidFill>
                   <a:srgbClr val="253650"/>
@@ -21288,6 +22480,7 @@
               </a:defRPr>
             </a:lvl5pPr>
             <a:lvl6pPr>
+              <a:buNone/>
               <a:defRPr sz="1950" b="0">
                 <a:solidFill>
                   <a:srgbClr val="253650"/>
@@ -21298,6 +22491,7 @@
               </a:defRPr>
             </a:lvl6pPr>
             <a:lvl7pPr>
+              <a:buNone/>
               <a:defRPr sz="1950" b="0">
                 <a:solidFill>
                   <a:srgbClr val="253650"/>
@@ -21308,6 +22502,7 @@
               </a:defRPr>
             </a:lvl7pPr>
             <a:lvl8pPr>
+              <a:buNone/>
               <a:defRPr sz="1950" b="0">
                 <a:solidFill>
                   <a:srgbClr val="253650"/>
@@ -21318,6 +22513,7 @@
               </a:defRPr>
             </a:lvl8pPr>
             <a:lvl9pPr>
+              <a:buNone/>
               <a:defRPr sz="1950" b="0">
                 <a:solidFill>
                   <a:srgbClr val="253650"/>
@@ -21330,6 +22526,7 @@
           </a:lstStyle>
           <a:p xmlns:a="http://schemas.openxmlformats.org/drawingml/2006/main">
             <a:pPr>
+              <a:buNone/>
               <a:defRPr sz="1950" b="0">
                 <a:solidFill>
                   <a:srgbClr val="253650"/>
@@ -21348,7 +22545,7 @@
                 <a:ea typeface="Apple SD Gothic Neo"/>
                 <a:cs typeface="Apple SD Gothic Neo"/>
               </a:rPr>
-              <a:t>LangSmith 추적, 제공자 usage, 원문·샘플·소스 해시를 대조합니다.</a:t>
+              <a:t>기존 추적 기능으로 실행·토큰·원문·샘플·소스 해시를 대조했습니다.</a:t>
             </a:r>
           </a:p>
         </p:txBody>
@@ -21394,6 +22591,7 @@
               </a:defRPr>
             </a:defPPr>
             <a:lvl1pPr>
+              <a:buNone/>
               <a:defRPr sz="1875" b="1">
                 <a:solidFill>
                   <a:srgbClr val="235ECB"/>
@@ -21404,6 +22602,7 @@
               </a:defRPr>
             </a:lvl1pPr>
             <a:lvl2pPr>
+              <a:buNone/>
               <a:defRPr sz="1875" b="1">
                 <a:solidFill>
                   <a:srgbClr val="235ECB"/>
@@ -21414,6 +22613,7 @@
               </a:defRPr>
             </a:lvl2pPr>
             <a:lvl3pPr>
+              <a:buNone/>
               <a:defRPr sz="1875" b="1">
                 <a:solidFill>
                   <a:srgbClr val="235ECB"/>
@@ -21424,6 +22624,7 @@
               </a:defRPr>
             </a:lvl3pPr>
             <a:lvl4pPr>
+              <a:buNone/>
               <a:defRPr sz="1875" b="1">
                 <a:solidFill>
                   <a:srgbClr val="235ECB"/>
@@ -21434,6 +22635,7 @@
               </a:defRPr>
             </a:lvl4pPr>
             <a:lvl5pPr>
+              <a:buNone/>
               <a:defRPr sz="1875" b="1">
                 <a:solidFill>
                   <a:srgbClr val="235ECB"/>
@@ -21444,6 +22646,7 @@
               </a:defRPr>
             </a:lvl5pPr>
             <a:lvl6pPr>
+              <a:buNone/>
               <a:defRPr sz="1875" b="1">
                 <a:solidFill>
                   <a:srgbClr val="235ECB"/>
@@ -21454,6 +22657,7 @@
               </a:defRPr>
             </a:lvl6pPr>
             <a:lvl7pPr>
+              <a:buNone/>
               <a:defRPr sz="1875" b="1">
                 <a:solidFill>
                   <a:srgbClr val="235ECB"/>
@@ -21464,6 +22668,7 @@
               </a:defRPr>
             </a:lvl7pPr>
             <a:lvl8pPr>
+              <a:buNone/>
               <a:defRPr sz="1875" b="1">
                 <a:solidFill>
                   <a:srgbClr val="235ECB"/>
@@ -21474,6 +22679,7 @@
               </a:defRPr>
             </a:lvl8pPr>
             <a:lvl9pPr>
+              <a:buNone/>
               <a:defRPr sz="1875" b="1">
                 <a:solidFill>
                   <a:srgbClr val="235ECB"/>
@@ -21486,6 +22692,7 @@
           </a:lstStyle>
           <a:p xmlns:a="http://schemas.openxmlformats.org/drawingml/2006/main">
             <a:pPr>
+              <a:buNone/>
               <a:defRPr sz="1875" b="1">
                 <a:solidFill>
                   <a:srgbClr val="235ECB"/>

--- a/output/AI_Agent_개선_최종발표.pptx
+++ b/output/AI_Agent_개선_최종발표.pptx
@@ -2,21 +2,21 @@
 <file path=ppt/presentation.xml><?xml version="1.0" encoding="utf-8"?>
 <p:presentation xmlns:p="http://schemas.openxmlformats.org/presentationml/2006/main">
   <p:sldMasterIdLst>
-    <p:sldMasterId xmlns:r="http://schemas.openxmlformats.org/officeDocument/2006/relationships" id="2147483648" r:id="R77d2776eb5a14ad1"/>
+    <p:sldMasterId xmlns:r="http://schemas.openxmlformats.org/officeDocument/2006/relationships" id="2147483648" r:id="Rd3f045841ec04fa7"/>
   </p:sldMasterIdLst>
   <p:notesMasterIdLst>
-    <p:notesMasterId xmlns:r="http://schemas.openxmlformats.org/officeDocument/2006/relationships" r:id="R1fdef60634d2402d"/>
+    <p:notesMasterId xmlns:r="http://schemas.openxmlformats.org/officeDocument/2006/relationships" r:id="R234c6d2e8cdb48ae"/>
   </p:notesMasterIdLst>
   <p:sldIdLst>
-    <p:sldId xmlns:r="http://schemas.openxmlformats.org/officeDocument/2006/relationships" id="256" r:id="R0dffc35f83ea4071"/>
-    <p:sldId xmlns:r="http://schemas.openxmlformats.org/officeDocument/2006/relationships" id="257" r:id="R663c6a1578da448f"/>
-    <p:sldId xmlns:r="http://schemas.openxmlformats.org/officeDocument/2006/relationships" id="258" r:id="R4f623981b7314d88"/>
-    <p:sldId xmlns:r="http://schemas.openxmlformats.org/officeDocument/2006/relationships" id="259" r:id="R1a945ace9b644406"/>
-    <p:sldId xmlns:r="http://schemas.openxmlformats.org/officeDocument/2006/relationships" id="260" r:id="Radf5580c18724685"/>
-    <p:sldId xmlns:r="http://schemas.openxmlformats.org/officeDocument/2006/relationships" id="261" r:id="Rde1db7b87883492c"/>
-    <p:sldId xmlns:r="http://schemas.openxmlformats.org/officeDocument/2006/relationships" id="262" r:id="R874e62326aaf4a65"/>
-    <p:sldId xmlns:r="http://schemas.openxmlformats.org/officeDocument/2006/relationships" id="263" r:id="Rb28d15e3eb5a4588"/>
-    <p:sldId xmlns:r="http://schemas.openxmlformats.org/officeDocument/2006/relationships" id="264" r:id="R952695533e6a41b4"/>
+    <p:sldId xmlns:r="http://schemas.openxmlformats.org/officeDocument/2006/relationships" id="256" r:id="Rb6f584fc85a74181"/>
+    <p:sldId xmlns:r="http://schemas.openxmlformats.org/officeDocument/2006/relationships" id="257" r:id="Ra7280c202a3441a4"/>
+    <p:sldId xmlns:r="http://schemas.openxmlformats.org/officeDocument/2006/relationships" id="258" r:id="R175ebd26dbdc4118"/>
+    <p:sldId xmlns:r="http://schemas.openxmlformats.org/officeDocument/2006/relationships" id="259" r:id="Re381094b14d34fa0"/>
+    <p:sldId xmlns:r="http://schemas.openxmlformats.org/officeDocument/2006/relationships" id="260" r:id="Rbe3eea440a794fdc"/>
+    <p:sldId xmlns:r="http://schemas.openxmlformats.org/officeDocument/2006/relationships" id="261" r:id="Rcda5fa8efab64dc0"/>
+    <p:sldId xmlns:r="http://schemas.openxmlformats.org/officeDocument/2006/relationships" id="262" r:id="R9ad18d16cf51412f"/>
+    <p:sldId xmlns:r="http://schemas.openxmlformats.org/officeDocument/2006/relationships" id="263" r:id="R99b0e73361a74d29"/>
+    <p:sldId xmlns:r="http://schemas.openxmlformats.org/officeDocument/2006/relationships" id="264" r:id="R3b4168cf6c524ec8"/>
   </p:sldIdLst>
   <p:sldSz cx="12192000" cy="6858000"/>
   <p:notesSz cx="6858000" cy="9144000"/>
@@ -470,7 +470,7 @@
           </a:p>
           <a:p xmlns:a="http://schemas.openxmlformats.org/drawingml/2006/main">
             <a:r>
-              <a:t>doc/report.md 1절 / 원본 0d8405e·최종 제품 69d58eb</a:t>
+              <a:t>원본 0d8405e · 실측 제품 69d58eb · 최신 표시 f2e26e1 / doc/report.md</a:t>
             </a:r>
           </a:p>
         </p:txBody>
@@ -545,7 +545,7 @@
           </a:p>
           <a:p xmlns:a="http://schemas.openxmlformats.org/drawingml/2006/main">
             <a:r>
-              <a:t>기존에도 MCP 조회와 런북 기반 작성, 복수 서비스 계획과 대화 저장이 있었습니다. 저는 전체 요청 대상과 실제 조회값을 대조하는 검사를 보완했습니다. 런북은 첫 키워드 유형 선택에서 질문과 서비스별 알림을 활용하는 RAG로 바꿨습니다. Writer는 절차 ID를 고르고 코드가 사실과 조건을 조립하도록 했으며, 복잡한 요청에 별도 Reviewer를 추가했습니다. 운영 후속 질문의 대상과 늦은 화면 이벤트도 구분했습니다.</a:t>
+              <a:t>기존에도 MCP 조회와 런북 기반 작성, 복수 서비스 계획과 대화 저장이 있었습니다. 저는 요청 대상과 실제 조회값을 대조하고, 런북을 질문과 서비스별 알림으로 검색하도록 바꿨습니다. Writer는 절차 ID를 고르고 코드가 사실과 조건을 조립하며, 복잡한 요청에는 Reviewer를 추가했습니다. 최신 화면은 핵심을 먼저 표시하고 전체 근거를 접습니다. 최신 검사는 Python 아흔 개와 화면 열한 개가 통과했습니다.</a:t>
             </a:r>
           </a:p>
           <a:p xmlns:a="http://schemas.openxmlformats.org/drawingml/2006/main">
@@ -560,7 +560,7 @@
           </a:p>
           <a:p xmlns:a="http://schemas.openxmlformats.org/drawingml/2006/main">
             <a:r>
-              <a:t>doc/original_final_feature_audit.md / 19개 기능 코드 대조</a:t>
+              <a:t>doc/report.md / 최신 제출 소스 Python 90개·화면 11개 / 통제 테스트와 실제 API 구분</a:t>
             </a:r>
           </a:p>
         </p:txBody>
@@ -635,7 +635,7 @@
           </a:p>
           <a:p xmlns:a="http://schemas.openxmlformats.org/drawingml/2006/main">
             <a:r>
-              <a:t>화면은 같은 메모리 질문을 최종본에서 실제 실행한 결과입니다. 원본은 현재 메모리 89퍼센트에도 즉시 재시작을 권고했습니다. 최종본은 현재값, 원인 가설, 미확보 자료와 런북 출처를 나눕니다. 실제 조치는 실행하지 않습니다. 이 캡처 시연은 다음 통계와 별도로 기록했습니다.</a:t>
+              <a:t>같은 메모리 질문과 고정 샘플을 최신 화면에 입력한 결과입니다. 현재 메모리 89퍼센트와 추가 점검을 먼저 보여주고, 원문과 긴 근거는 펼쳐 보도록 바꿨습니다. 실제 조치는 실행하지 않습니다. 요약용 모델 호출이나 검수 기준 변경도 없습니다. 이 화면 시연은 다음 예순여섯 건 실측과 분리했습니다.</a:t>
             </a:r>
           </a:p>
           <a:p xmlns:a="http://schemas.openxmlformats.org/drawingml/2006/main">
@@ -650,7 +650,7 @@
           </a:p>
           <a:p xmlns:a="http://schemas.openxmlformats.org/drawingml/2006/main">
             <a:r>
-              <a:t>doc/assets/before_comparison.jpg·after_comparison.jpg / 별도 실제 실행 캡처 / 수업용 고정 샘플</a:t>
+              <a:t>doc/assets/current_answer.png / 실제 OpenAI·고정 수업 샘플 89% / 별도 화면 시연 / API 원문·검수 보존</a:t>
             </a:r>
           </a:p>
         </p:txBody>
@@ -905,7 +905,7 @@
           </a:p>
           <a:p xmlns:a="http://schemas.openxmlformats.org/drawingml/2006/main">
             <a:r>
-              <a:t>MCP는 기존 통로를 재사용했습니다. 새로 연결한 부분은 retrieve_runbooks_node입니다. 먼저 런북 Resource를 제공하는 서버와 주소 양식을 찾습니다. RAG가 고른 key를 그 주소에 넣고 read_resource로 원문을 읽습니다. 이어 등록된 ID인지, 읽은 원문과 카탈로그의 해시가 같은지 확인합니다. 모니터링은 Tool, 매뉴얼은 Resource라는 역할 차이입니다. 해시는 내용 일치만 확인하며 최신성이나 정답을 보장하지는 않습니다.</a:t>
+              <a:t>MCP는 기존 통로를 재사용했습니다. retrieve_runbooks_node에서 런북 Resource의 서버와 주소 양식을 찾고, RAG가 고른 key로 원문을 읽어 해시를 대조합니다. 모니터링은 Tool, 매뉴얼은 Resource입니다. 현재 Tool은 상태와 CPU, 메모리, 알림을 제공하며 p95나 커넥션 풀의 현재값을 직접 조회하지는 않습니다. 런북의 추가 점검은 별도 자료로 확인해야 합니다.</a:t>
             </a:r>
           </a:p>
           <a:p xmlns:a="http://schemas.openxmlformats.org/drawingml/2006/main">
@@ -920,7 +920,7 @@
           </a:p>
           <a:p xmlns:a="http://schemas.openxmlformats.org/drawingml/2006/main">
             <a:r>
-              <a:t>agent/graph.py retrieve_runbooks_node() / agent/mcp_client.py 원본 동일 / 호출부 발췌 줄바꿈 정리</a:t>
+              <a:t>agent/graph.py retrieve_runbooks_node() / mcp_server.py SystemStatus / 기존 MCP 클라이언트 유지</a:t>
             </a:r>
           </a:p>
         </p:txBody>
@@ -1175,7 +1175,7 @@
           </a:p>
           <a:p xmlns:a="http://schemas.openxmlformats.org/drawingml/2006/main">
             <a:r>
-              <a:t>검수 강화로 입력 토큰이 늘었고, 샘플에는 시계열과 배포 이력이 없어 근본 원인을 확정할 수 없습니다. 이후에는 미지원 서비스의 대체 정책과 검색 입력 예산을 개선하고, 사람의 정답 채점으로 품질을 확인하고 싶습니다. 감사합니다.</a:t>
+              <a:t>입력 토큰이 늘었고, 현재 p95와 커넥션 풀, 시계열과 로그를 직접 조회하지 않으므로 원인을 확정할 수 없습니다. 이후에는 미지원 서비스의 대체 정책과 검색 입력 예산을 개선하고, 사람이 정답을 채점해 품질을 확인하고 싶습니다. 감사합니다.</a:t>
             </a:r>
           </a:p>
           <a:p xmlns:a="http://schemas.openxmlformats.org/drawingml/2006/main">
@@ -3633,12 +3633,12 @@
   </p:cSld>
   <p:clrMap bg1="lt1" tx1="dk1" bg2="lt2" tx2="dk2" accent1="accent1" accent2="accent2" accent3="accent3" accent4="accent4" accent5="accent5" accent6="accent6" hlink="hlink" folHlink="folHlink"/>
   <p:sldLayoutIdLst>
-    <p:sldLayoutId xmlns:r="http://schemas.openxmlformats.org/officeDocument/2006/relationships" id="2147483649" r:id="R1d4ac03ad04547aa"/>
-    <p:sldLayoutId xmlns:r="http://schemas.openxmlformats.org/officeDocument/2006/relationships" id="2147483650" r:id="Rba1dfbf2876748d6"/>
-    <p:sldLayoutId xmlns:r="http://schemas.openxmlformats.org/officeDocument/2006/relationships" id="2147483651" r:id="R96e9e051a49143a7"/>
-    <p:sldLayoutId xmlns:r="http://schemas.openxmlformats.org/officeDocument/2006/relationships" id="2147483652" r:id="Rb45bb788580c4e4d"/>
-    <p:sldLayoutId xmlns:r="http://schemas.openxmlformats.org/officeDocument/2006/relationships" id="2147483653" r:id="R34b158f7aa354277"/>
-    <p:sldLayoutId xmlns:r="http://schemas.openxmlformats.org/officeDocument/2006/relationships" id="2147483654" r:id="R78a87e0e9a7549e7"/>
+    <p:sldLayoutId xmlns:r="http://schemas.openxmlformats.org/officeDocument/2006/relationships" id="2147483649" r:id="R625a77fb925541bc"/>
+    <p:sldLayoutId xmlns:r="http://schemas.openxmlformats.org/officeDocument/2006/relationships" id="2147483650" r:id="Ra705748f3e814371"/>
+    <p:sldLayoutId xmlns:r="http://schemas.openxmlformats.org/officeDocument/2006/relationships" id="2147483651" r:id="R290ab6b056ea4bb7"/>
+    <p:sldLayoutId xmlns:r="http://schemas.openxmlformats.org/officeDocument/2006/relationships" id="2147483652" r:id="R2598f4fb3eca4faf"/>
+    <p:sldLayoutId xmlns:r="http://schemas.openxmlformats.org/officeDocument/2006/relationships" id="2147483653" r:id="Re99043c2c8a94f7c"/>
+    <p:sldLayoutId xmlns:r="http://schemas.openxmlformats.org/officeDocument/2006/relationships" id="2147483654" r:id="Ra4b0694f8abf4175"/>
   </p:sldLayoutIdLst>
   <p:txStyles>
     <p:titleStyle>
@@ -4737,7 +4737,7 @@
                 <a:ea typeface="Apple SD Gothic Neo"/>
                 <a:cs typeface="Apple SD Gothic Neo"/>
               </a:rPr>
-              <a:t>수업용 샘플 / 제품 소스 69d58eb / 2026.10.21</a:t>
+              <a:t>수업용 샘플 / 실측 69d58eb · 최신 화면 f2e26e1 / 2026.10.21</a:t>
             </a:r>
           </a:p>
         </p:txBody>
@@ -6184,7 +6184,7 @@
                 <a:ea typeface="Apple SD Gothic Neo"/>
                 <a:cs typeface="Apple SD Gothic Neo"/>
               </a:rPr>
-              <a:t>기존 기반 유지: MCP·LangGraph·DI·LangSmith·SQLite·기본 역할 분리</a:t>
+              <a:t>기존 기반 유지: MCP·LangGraph·DI·LangSmith·SQLite / 최신 검사 Python 90개·화면 11개</a:t>
             </a:r>
           </a:p>
         </p:txBody>
@@ -8433,7 +8433,7 @@
           <p:cNvPr id="13" name="">
             <a:extLst xmlns:a="http://schemas.openxmlformats.org/drawingml/2006/main">
               <a:ext uri="{FF2B5EF4-FFF2-40B4-BE49-F238E27FC236}">
-                <a16:creationId xmlns:a16="http://schemas.microsoft.com/office/drawing/2014/main" id="{AD303114-26E0-44A9-9E30-3C8F8DD85F9B}"/>
+                <a16:creationId xmlns:a16="http://schemas.microsoft.com/office/drawing/2014/main" id="{C85D1E9F-12F6-45B9-AD48-64A0B9188466}"/>
               </a:ext>
             </a:extLst>
           </p:cNvPr>
@@ -8443,7 +8443,7 @@
           <p:nvPr/>
         </p:nvPicPr>
         <p:blipFill>
-          <a:blip xmlns:r="http://schemas.openxmlformats.org/officeDocument/2006/relationships" xmlns:a="http://schemas.openxmlformats.org/drawingml/2006/main" r:embed="R0d9d50d699ad4f28"/>
+          <a:blip xmlns:r="http://schemas.openxmlformats.org/officeDocument/2006/relationships" xmlns:a="http://schemas.openxmlformats.org/drawingml/2006/main" r:embed="R618895791d7340e3"/>
           <a:stretch xmlns:a="http://schemas.openxmlformats.org/drawingml/2006/main"/>
         </p:blipFill>
         <p:spPr>
@@ -8494,6 +8494,7 @@
               </a:defRPr>
             </a:defPPr>
             <a:lvl1pPr>
+              <a:buNone/>
               <a:defRPr sz="1950" b="1">
                 <a:solidFill>
                   <a:srgbClr val="0D766F"/>
@@ -8501,6 +8502,7 @@
               </a:defRPr>
             </a:lvl1pPr>
             <a:lvl2pPr>
+              <a:buNone/>
               <a:defRPr sz="1950" b="1">
                 <a:solidFill>
                   <a:srgbClr val="0D766F"/>
@@ -8508,6 +8510,7 @@
               </a:defRPr>
             </a:lvl2pPr>
             <a:lvl3pPr>
+              <a:buNone/>
               <a:defRPr sz="1950" b="1">
                 <a:solidFill>
                   <a:srgbClr val="0D766F"/>
@@ -8515,6 +8518,7 @@
               </a:defRPr>
             </a:lvl3pPr>
             <a:lvl4pPr>
+              <a:buNone/>
               <a:defRPr sz="1950" b="1">
                 <a:solidFill>
                   <a:srgbClr val="0D766F"/>
@@ -8522,6 +8526,7 @@
               </a:defRPr>
             </a:lvl4pPr>
             <a:lvl5pPr>
+              <a:buNone/>
               <a:defRPr sz="1950" b="1">
                 <a:solidFill>
                   <a:srgbClr val="0D766F"/>
@@ -8529,6 +8534,7 @@
               </a:defRPr>
             </a:lvl5pPr>
             <a:lvl6pPr>
+              <a:buNone/>
               <a:defRPr sz="1950" b="1">
                 <a:solidFill>
                   <a:srgbClr val="0D766F"/>
@@ -8536,6 +8542,7 @@
               </a:defRPr>
             </a:lvl6pPr>
             <a:lvl7pPr>
+              <a:buNone/>
               <a:defRPr sz="1950" b="1">
                 <a:solidFill>
                   <a:srgbClr val="0D766F"/>
@@ -8543,6 +8550,7 @@
               </a:defRPr>
             </a:lvl7pPr>
             <a:lvl8pPr>
+              <a:buNone/>
               <a:defRPr sz="1950" b="1">
                 <a:solidFill>
                   <a:srgbClr val="0D766F"/>
@@ -8550,6 +8558,7 @@
               </a:defRPr>
             </a:lvl8pPr>
             <a:lvl9pPr>
+              <a:buNone/>
               <a:defRPr sz="1950" b="1">
                 <a:solidFill>
                   <a:srgbClr val="0D766F"/>
@@ -8559,6 +8568,7 @@
           </a:lstStyle>
           <a:p xmlns:a="http://schemas.openxmlformats.org/drawingml/2006/main">
             <a:pPr>
+              <a:buNone/>
               <a:defRPr sz="1950" b="1">
                 <a:solidFill>
                   <a:srgbClr val="0D766F"/>
@@ -8571,7 +8581,7 @@
                   <a:srgbClr val="0D766F"/>
                 </a:solidFill>
               </a:rPr>
-              <a:t>메모리 질문의 실제 출력</a:t>
+              <a:t>최신 답변 화면</a:t>
             </a:r>
           </a:p>
         </p:txBody>
@@ -8614,6 +8624,7 @@
               </a:defRPr>
             </a:defPPr>
             <a:lvl1pPr>
+              <a:buNone/>
               <a:defRPr sz="1800" b="0">
                 <a:solidFill>
                   <a:srgbClr val="192E50"/>
@@ -8621,6 +8632,7 @@
               </a:defRPr>
             </a:lvl1pPr>
             <a:lvl2pPr>
+              <a:buNone/>
               <a:defRPr sz="1800" b="0">
                 <a:solidFill>
                   <a:srgbClr val="192E50"/>
@@ -8628,6 +8640,7 @@
               </a:defRPr>
             </a:lvl2pPr>
             <a:lvl3pPr>
+              <a:buNone/>
               <a:defRPr sz="1800" b="0">
                 <a:solidFill>
                   <a:srgbClr val="192E50"/>
@@ -8635,6 +8648,7 @@
               </a:defRPr>
             </a:lvl3pPr>
             <a:lvl4pPr>
+              <a:buNone/>
               <a:defRPr sz="1800" b="0">
                 <a:solidFill>
                   <a:srgbClr val="192E50"/>
@@ -8642,6 +8656,7 @@
               </a:defRPr>
             </a:lvl4pPr>
             <a:lvl5pPr>
+              <a:buNone/>
               <a:defRPr sz="1800" b="0">
                 <a:solidFill>
                   <a:srgbClr val="192E50"/>
@@ -8649,6 +8664,7 @@
               </a:defRPr>
             </a:lvl5pPr>
             <a:lvl6pPr>
+              <a:buNone/>
               <a:defRPr sz="1800" b="0">
                 <a:solidFill>
                   <a:srgbClr val="192E50"/>
@@ -8656,6 +8672,7 @@
               </a:defRPr>
             </a:lvl6pPr>
             <a:lvl7pPr>
+              <a:buNone/>
               <a:defRPr sz="1800" b="0">
                 <a:solidFill>
                   <a:srgbClr val="192E50"/>
@@ -8663,6 +8680,7 @@
               </a:defRPr>
             </a:lvl7pPr>
             <a:lvl8pPr>
+              <a:buNone/>
               <a:defRPr sz="1800" b="0">
                 <a:solidFill>
                   <a:srgbClr val="192E50"/>
@@ -8670,6 +8688,7 @@
               </a:defRPr>
             </a:lvl8pPr>
             <a:lvl9pPr>
+              <a:buNone/>
               <a:defRPr sz="1800" b="0">
                 <a:solidFill>
                   <a:srgbClr val="192E50"/>
@@ -8679,6 +8698,7 @@
           </a:lstStyle>
           <a:p xmlns:a="http://schemas.openxmlformats.org/drawingml/2006/main">
             <a:pPr>
+              <a:buNone/>
               <a:defRPr sz="1800" b="0">
                 <a:solidFill>
                   <a:srgbClr val="192E50"/>
@@ -8695,12 +8715,46 @@
             </a:r>
           </a:p>
           <a:p xmlns:a="http://schemas.openxmlformats.org/drawingml/2006/main">
+            <a:pPr>
+              <a:buNone/>
+              <a:defRPr sz="1800" b="0">
+                <a:solidFill>
+                  <a:srgbClr val="192E50"/>
+                </a:solidFill>
+              </a:defRPr>
+            </a:pPr>
+          </a:p>
+          <a:p xmlns:a="http://schemas.openxmlformats.org/drawingml/2006/main">
+            <a:pPr>
+              <a:buNone/>
+              <a:defRPr sz="1800" b="0">
+                <a:solidFill>
+                  <a:srgbClr val="192E50"/>
+                </a:solidFill>
+              </a:defRPr>
+            </a:pPr>
             <a:r>
-              <a:t/>
+              <a:rPr sz="1800" b="0">
+                <a:solidFill>
+                  <a:srgbClr val="192E50"/>
+                </a:solidFill>
+              </a:rPr>
+              <a:t>추가 점검을 먼저 표시</a:t>
             </a:r>
           </a:p>
           <a:p xmlns:a="http://schemas.openxmlformats.org/drawingml/2006/main">
             <a:pPr>
+              <a:buNone/>
+              <a:defRPr sz="1800" b="0">
+                <a:solidFill>
+                  <a:srgbClr val="192E50"/>
+                </a:solidFill>
+              </a:defRPr>
+            </a:pPr>
+          </a:p>
+          <a:p xmlns:a="http://schemas.openxmlformats.org/drawingml/2006/main">
+            <a:pPr>
+              <a:buNone/>
               <a:defRPr sz="1800" b="0">
                 <a:solidFill>
                   <a:srgbClr val="192E50"/>
@@ -8713,16 +8767,22 @@
                   <a:srgbClr val="192E50"/>
                 </a:solidFill>
               </a:rPr>
-              <a:t>원인 후보는 가설로 표시</a:t>
-            </a:r>
-          </a:p>
-          <a:p xmlns:a="http://schemas.openxmlformats.org/drawingml/2006/main">
-            <a:r>
-              <a:t/>
+              <a:t>원문·근거는 펼쳐 보기</a:t>
             </a:r>
           </a:p>
           <a:p xmlns:a="http://schemas.openxmlformats.org/drawingml/2006/main">
             <a:pPr>
+              <a:buNone/>
+              <a:defRPr sz="1800" b="0">
+                <a:solidFill>
+                  <a:srgbClr val="192E50"/>
+                </a:solidFill>
+              </a:defRPr>
+            </a:pPr>
+          </a:p>
+          <a:p xmlns:a="http://schemas.openxmlformats.org/drawingml/2006/main">
+            <a:pPr>
+              <a:buNone/>
               <a:defRPr sz="1800" b="0">
                 <a:solidFill>
                   <a:srgbClr val="192E50"/>
@@ -8735,29 +8795,7 @@
                   <a:srgbClr val="192E50"/>
                 </a:solidFill>
               </a:rPr>
-              <a:t>시계열·배포 이력 미확보</a:t>
-            </a:r>
-          </a:p>
-          <a:p xmlns:a="http://schemas.openxmlformats.org/drawingml/2006/main">
-            <a:r>
-              <a:t/>
-            </a:r>
-          </a:p>
-          <a:p xmlns:a="http://schemas.openxmlformats.org/drawingml/2006/main">
-            <a:pPr>
-              <a:defRPr sz="1800" b="0">
-                <a:solidFill>
-                  <a:srgbClr val="192E50"/>
-                </a:solidFill>
-              </a:defRPr>
-            </a:pPr>
-            <a:r>
-              <a:rPr sz="1800" b="0">
-                <a:solidFill>
-                  <a:srgbClr val="192E50"/>
-                </a:solidFill>
-              </a:rPr>
-              <a:t>런북 원문 출처 연결</a:t>
+              <a:t>실제 조치는 미실행</a:t>
             </a:r>
           </a:p>
         </p:txBody>
@@ -8800,6 +8838,7 @@
               </a:defRPr>
             </a:defPPr>
             <a:lvl1pPr>
+              <a:buNone/>
               <a:defRPr sz="1350" b="0">
                 <a:solidFill>
                   <a:srgbClr val="566B88"/>
@@ -8807,6 +8846,7 @@
               </a:defRPr>
             </a:lvl1pPr>
             <a:lvl2pPr>
+              <a:buNone/>
               <a:defRPr sz="1350" b="0">
                 <a:solidFill>
                   <a:srgbClr val="566B88"/>
@@ -8814,6 +8854,7 @@
               </a:defRPr>
             </a:lvl2pPr>
             <a:lvl3pPr>
+              <a:buNone/>
               <a:defRPr sz="1350" b="0">
                 <a:solidFill>
                   <a:srgbClr val="566B88"/>
@@ -8821,6 +8862,7 @@
               </a:defRPr>
             </a:lvl3pPr>
             <a:lvl4pPr>
+              <a:buNone/>
               <a:defRPr sz="1350" b="0">
                 <a:solidFill>
                   <a:srgbClr val="566B88"/>
@@ -8828,6 +8870,7 @@
               </a:defRPr>
             </a:lvl4pPr>
             <a:lvl5pPr>
+              <a:buNone/>
               <a:defRPr sz="1350" b="0">
                 <a:solidFill>
                   <a:srgbClr val="566B88"/>
@@ -8835,6 +8878,7 @@
               </a:defRPr>
             </a:lvl5pPr>
             <a:lvl6pPr>
+              <a:buNone/>
               <a:defRPr sz="1350" b="0">
                 <a:solidFill>
                   <a:srgbClr val="566B88"/>
@@ -8842,6 +8886,7 @@
               </a:defRPr>
             </a:lvl6pPr>
             <a:lvl7pPr>
+              <a:buNone/>
               <a:defRPr sz="1350" b="0">
                 <a:solidFill>
                   <a:srgbClr val="566B88"/>
@@ -8849,6 +8894,7 @@
               </a:defRPr>
             </a:lvl7pPr>
             <a:lvl8pPr>
+              <a:buNone/>
               <a:defRPr sz="1350" b="0">
                 <a:solidFill>
                   <a:srgbClr val="566B88"/>
@@ -8856,6 +8902,7 @@
               </a:defRPr>
             </a:lvl8pPr>
             <a:lvl9pPr>
+              <a:buNone/>
               <a:defRPr sz="1350" b="0">
                 <a:solidFill>
                   <a:srgbClr val="566B88"/>
@@ -8865,6 +8912,7 @@
           </a:lstStyle>
           <a:p xmlns:a="http://schemas.openxmlformats.org/drawingml/2006/main">
             <a:pPr>
+              <a:buNone/>
               <a:defRPr sz="1350" b="0">
                 <a:solidFill>
                   <a:srgbClr val="566B88"/>
@@ -8877,7 +8925,7 @@
                   <a:srgbClr val="566B88"/>
                 </a:solidFill>
               </a:rPr>
-              <a:t>동일 질문의 별도 화면 시연입니다. 66건 통계와 분리했습니다.</a:t>
+              <a:t>같은 고정 샘플의 최신 화면입니다. 원문·검수는 유지하며 66건 실측과 분리했습니다.</a:t>
             </a:r>
           </a:p>
         </p:txBody>
@@ -9640,7 +9688,7 @@
           <p:cNvPr id="7" name="">
             <a:extLst xmlns:a="http://schemas.openxmlformats.org/drawingml/2006/main">
               <a:ext uri="{FF2B5EF4-FFF2-40B4-BE49-F238E27FC236}">
-                <a16:creationId xmlns:a16="http://schemas.microsoft.com/office/drawing/2014/main" id="{38F5E370-6706-42A5-B087-B2D0285C08E6}"/>
+                <a16:creationId xmlns:a16="http://schemas.microsoft.com/office/drawing/2014/main" id="{AC26BF7E-E247-4B78-8F2F-A79410848048}"/>
               </a:ext>
             </a:extLst>
           </p:cNvPr>
@@ -15162,6 +15210,7 @@
               </a:defRPr>
             </a:defPPr>
             <a:lvl1pPr>
+              <a:buNone/>
               <a:defRPr sz="1800" b="1">
                 <a:solidFill>
                   <a:srgbClr val="0D766F"/>
@@ -15169,6 +15218,7 @@
               </a:defRPr>
             </a:lvl1pPr>
             <a:lvl2pPr>
+              <a:buNone/>
               <a:defRPr sz="1800" b="1">
                 <a:solidFill>
                   <a:srgbClr val="0D766F"/>
@@ -15176,6 +15226,7 @@
               </a:defRPr>
             </a:lvl2pPr>
             <a:lvl3pPr>
+              <a:buNone/>
               <a:defRPr sz="1800" b="1">
                 <a:solidFill>
                   <a:srgbClr val="0D766F"/>
@@ -15183,6 +15234,7 @@
               </a:defRPr>
             </a:lvl3pPr>
             <a:lvl4pPr>
+              <a:buNone/>
               <a:defRPr sz="1800" b="1">
                 <a:solidFill>
                   <a:srgbClr val="0D766F"/>
@@ -15190,6 +15242,7 @@
               </a:defRPr>
             </a:lvl4pPr>
             <a:lvl5pPr>
+              <a:buNone/>
               <a:defRPr sz="1800" b="1">
                 <a:solidFill>
                   <a:srgbClr val="0D766F"/>
@@ -15197,6 +15250,7 @@
               </a:defRPr>
             </a:lvl5pPr>
             <a:lvl6pPr>
+              <a:buNone/>
               <a:defRPr sz="1800" b="1">
                 <a:solidFill>
                   <a:srgbClr val="0D766F"/>
@@ -15204,6 +15258,7 @@
               </a:defRPr>
             </a:lvl6pPr>
             <a:lvl7pPr>
+              <a:buNone/>
               <a:defRPr sz="1800" b="1">
                 <a:solidFill>
                   <a:srgbClr val="0D766F"/>
@@ -15211,6 +15266,7 @@
               </a:defRPr>
             </a:lvl7pPr>
             <a:lvl8pPr>
+              <a:buNone/>
               <a:defRPr sz="1800" b="1">
                 <a:solidFill>
                   <a:srgbClr val="0D766F"/>
@@ -15218,6 +15274,7 @@
               </a:defRPr>
             </a:lvl8pPr>
             <a:lvl9pPr>
+              <a:buNone/>
               <a:defRPr sz="1800" b="1">
                 <a:solidFill>
                   <a:srgbClr val="0D766F"/>
@@ -15227,6 +15284,7 @@
           </a:lstStyle>
           <a:p xmlns:a="http://schemas.openxmlformats.org/drawingml/2006/main">
             <a:pPr>
+              <a:buNone/>
               <a:defRPr sz="1800" b="1">
                 <a:solidFill>
                   <a:srgbClr val="0D766F"/>
@@ -15282,6 +15340,7 @@
               </a:defRPr>
             </a:defPPr>
             <a:lvl1pPr>
+              <a:buNone/>
               <a:defRPr sz="1500" b="0">
                 <a:solidFill>
                   <a:srgbClr val="192E50"/>
@@ -15289,6 +15348,7 @@
               </a:defRPr>
             </a:lvl1pPr>
             <a:lvl2pPr>
+              <a:buNone/>
               <a:defRPr sz="1500" b="0">
                 <a:solidFill>
                   <a:srgbClr val="192E50"/>
@@ -15296,6 +15356,7 @@
               </a:defRPr>
             </a:lvl2pPr>
             <a:lvl3pPr>
+              <a:buNone/>
               <a:defRPr sz="1500" b="0">
                 <a:solidFill>
                   <a:srgbClr val="192E50"/>
@@ -15303,6 +15364,7 @@
               </a:defRPr>
             </a:lvl3pPr>
             <a:lvl4pPr>
+              <a:buNone/>
               <a:defRPr sz="1500" b="0">
                 <a:solidFill>
                   <a:srgbClr val="192E50"/>
@@ -15310,6 +15372,7 @@
               </a:defRPr>
             </a:lvl4pPr>
             <a:lvl5pPr>
+              <a:buNone/>
               <a:defRPr sz="1500" b="0">
                 <a:solidFill>
                   <a:srgbClr val="192E50"/>
@@ -15317,6 +15380,7 @@
               </a:defRPr>
             </a:lvl5pPr>
             <a:lvl6pPr>
+              <a:buNone/>
               <a:defRPr sz="1500" b="0">
                 <a:solidFill>
                   <a:srgbClr val="192E50"/>
@@ -15324,6 +15388,7 @@
               </a:defRPr>
             </a:lvl6pPr>
             <a:lvl7pPr>
+              <a:buNone/>
               <a:defRPr sz="1500" b="0">
                 <a:solidFill>
                   <a:srgbClr val="192E50"/>
@@ -15331,6 +15396,7 @@
               </a:defRPr>
             </a:lvl7pPr>
             <a:lvl8pPr>
+              <a:buNone/>
               <a:defRPr sz="1500" b="0">
                 <a:solidFill>
                   <a:srgbClr val="192E50"/>
@@ -15338,6 +15404,7 @@
               </a:defRPr>
             </a:lvl8pPr>
             <a:lvl9pPr>
+              <a:buNone/>
               <a:defRPr sz="1500" b="0">
                 <a:solidFill>
                   <a:srgbClr val="192E50"/>
@@ -15347,6 +15414,7 @@
           </a:lstStyle>
           <a:p xmlns:a="http://schemas.openxmlformats.org/drawingml/2006/main">
             <a:pPr>
+              <a:buNone/>
               <a:defRPr sz="1500" b="0">
                 <a:solidFill>
                   <a:srgbClr val="192E50"/>
@@ -15364,6 +15432,7 @@
           </a:p>
           <a:p xmlns:a="http://schemas.openxmlformats.org/drawingml/2006/main">
             <a:pPr>
+              <a:buNone/>
               <a:defRPr sz="1500" b="0">
                 <a:solidFill>
                   <a:srgbClr val="192E50"/>
@@ -15381,6 +15450,7 @@
           </a:p>
           <a:p xmlns:a="http://schemas.openxmlformats.org/drawingml/2006/main">
             <a:pPr>
+              <a:buNone/>
               <a:defRPr sz="1500" b="0">
                 <a:solidFill>
                   <a:srgbClr val="192E50"/>
@@ -15398,6 +15468,7 @@
           </a:p>
           <a:p xmlns:a="http://schemas.openxmlformats.org/drawingml/2006/main">
             <a:pPr>
+              <a:buNone/>
               <a:defRPr sz="1500" b="0">
                 <a:solidFill>
                   <a:srgbClr val="192E50"/>
@@ -15415,6 +15486,7 @@
           </a:p>
           <a:p xmlns:a="http://schemas.openxmlformats.org/drawingml/2006/main">
             <a:pPr>
+              <a:buNone/>
               <a:defRPr sz="1500" b="0">
                 <a:solidFill>
                   <a:srgbClr val="192E50"/>
@@ -15432,6 +15504,7 @@
           </a:p>
           <a:p xmlns:a="http://schemas.openxmlformats.org/drawingml/2006/main">
             <a:pPr>
+              <a:buNone/>
               <a:defRPr sz="1500" b="0">
                 <a:solidFill>
                   <a:srgbClr val="192E50"/>
@@ -15487,6 +15560,7 @@
               </a:defRPr>
             </a:defPPr>
             <a:lvl1pPr>
+              <a:buNone/>
               <a:defRPr sz="1950" b="1">
                 <a:solidFill>
                   <a:srgbClr val="0D766F"/>
@@ -15494,6 +15568,7 @@
               </a:defRPr>
             </a:lvl1pPr>
             <a:lvl2pPr>
+              <a:buNone/>
               <a:defRPr sz="1950" b="1">
                 <a:solidFill>
                   <a:srgbClr val="0D766F"/>
@@ -15501,6 +15576,7 @@
               </a:defRPr>
             </a:lvl2pPr>
             <a:lvl3pPr>
+              <a:buNone/>
               <a:defRPr sz="1950" b="1">
                 <a:solidFill>
                   <a:srgbClr val="0D766F"/>
@@ -15508,6 +15584,7 @@
               </a:defRPr>
             </a:lvl3pPr>
             <a:lvl4pPr>
+              <a:buNone/>
               <a:defRPr sz="1950" b="1">
                 <a:solidFill>
                   <a:srgbClr val="0D766F"/>
@@ -15515,6 +15592,7 @@
               </a:defRPr>
             </a:lvl4pPr>
             <a:lvl5pPr>
+              <a:buNone/>
               <a:defRPr sz="1950" b="1">
                 <a:solidFill>
                   <a:srgbClr val="0D766F"/>
@@ -15522,6 +15600,7 @@
               </a:defRPr>
             </a:lvl5pPr>
             <a:lvl6pPr>
+              <a:buNone/>
               <a:defRPr sz="1950" b="1">
                 <a:solidFill>
                   <a:srgbClr val="0D766F"/>
@@ -15529,6 +15608,7 @@
               </a:defRPr>
             </a:lvl6pPr>
             <a:lvl7pPr>
+              <a:buNone/>
               <a:defRPr sz="1950" b="1">
                 <a:solidFill>
                   <a:srgbClr val="0D766F"/>
@@ -15536,6 +15616,7 @@
               </a:defRPr>
             </a:lvl7pPr>
             <a:lvl8pPr>
+              <a:buNone/>
               <a:defRPr sz="1950" b="1">
                 <a:solidFill>
                   <a:srgbClr val="0D766F"/>
@@ -15543,6 +15624,7 @@
               </a:defRPr>
             </a:lvl8pPr>
             <a:lvl9pPr>
+              <a:buNone/>
               <a:defRPr sz="1950" b="1">
                 <a:solidFill>
                   <a:srgbClr val="0D766F"/>
@@ -15552,6 +15634,7 @@
           </a:lstStyle>
           <a:p xmlns:a="http://schemas.openxmlformats.org/drawingml/2006/main">
             <a:pPr>
+              <a:buNone/>
               <a:defRPr sz="1950" b="1">
                 <a:solidFill>
                   <a:srgbClr val="0D766F"/>
@@ -15607,6 +15690,7 @@
               </a:defRPr>
             </a:defPPr>
             <a:lvl1pPr>
+              <a:buNone/>
               <a:defRPr sz="1800" b="0">
                 <a:solidFill>
                   <a:srgbClr val="192E50"/>
@@ -15614,6 +15698,7 @@
               </a:defRPr>
             </a:lvl1pPr>
             <a:lvl2pPr>
+              <a:buNone/>
               <a:defRPr sz="1800" b="0">
                 <a:solidFill>
                   <a:srgbClr val="192E50"/>
@@ -15621,6 +15706,7 @@
               </a:defRPr>
             </a:lvl2pPr>
             <a:lvl3pPr>
+              <a:buNone/>
               <a:defRPr sz="1800" b="0">
                 <a:solidFill>
                   <a:srgbClr val="192E50"/>
@@ -15628,6 +15714,7 @@
               </a:defRPr>
             </a:lvl3pPr>
             <a:lvl4pPr>
+              <a:buNone/>
               <a:defRPr sz="1800" b="0">
                 <a:solidFill>
                   <a:srgbClr val="192E50"/>
@@ -15635,6 +15722,7 @@
               </a:defRPr>
             </a:lvl4pPr>
             <a:lvl5pPr>
+              <a:buNone/>
               <a:defRPr sz="1800" b="0">
                 <a:solidFill>
                   <a:srgbClr val="192E50"/>
@@ -15642,6 +15730,7 @@
               </a:defRPr>
             </a:lvl5pPr>
             <a:lvl6pPr>
+              <a:buNone/>
               <a:defRPr sz="1800" b="0">
                 <a:solidFill>
                   <a:srgbClr val="192E50"/>
@@ -15649,6 +15738,7 @@
               </a:defRPr>
             </a:lvl6pPr>
             <a:lvl7pPr>
+              <a:buNone/>
               <a:defRPr sz="1800" b="0">
                 <a:solidFill>
                   <a:srgbClr val="192E50"/>
@@ -15656,6 +15746,7 @@
               </a:defRPr>
             </a:lvl7pPr>
             <a:lvl8pPr>
+              <a:buNone/>
               <a:defRPr sz="1800" b="0">
                 <a:solidFill>
                   <a:srgbClr val="192E50"/>
@@ -15663,6 +15754,7 @@
               </a:defRPr>
             </a:lvl8pPr>
             <a:lvl9pPr>
+              <a:buNone/>
               <a:defRPr sz="1800" b="0">
                 <a:solidFill>
                   <a:srgbClr val="192E50"/>
@@ -15672,6 +15764,7 @@
           </a:lstStyle>
           <a:p xmlns:a="http://schemas.openxmlformats.org/drawingml/2006/main">
             <a:pPr>
+              <a:buNone/>
               <a:defRPr sz="1800" b="0">
                 <a:solidFill>
                   <a:srgbClr val="192E50"/>
@@ -15694,6 +15787,7 @@
           </a:p>
           <a:p xmlns:a="http://schemas.openxmlformats.org/drawingml/2006/main">
             <a:pPr>
+              <a:buNone/>
               <a:defRPr sz="1800" b="0">
                 <a:solidFill>
                   <a:srgbClr val="192E50"/>
@@ -15716,6 +15810,7 @@
           </a:p>
           <a:p xmlns:a="http://schemas.openxmlformats.org/drawingml/2006/main">
             <a:pPr>
+              <a:buNone/>
               <a:defRPr sz="1800" b="0">
                 <a:solidFill>
                   <a:srgbClr val="192E50"/>
@@ -15771,6 +15866,7 @@
               </a:defRPr>
             </a:defPPr>
             <a:lvl1pPr>
+              <a:buNone/>
               <a:defRPr sz="1650" b="0">
                 <a:solidFill>
                   <a:srgbClr val="566B88"/>
@@ -15778,6 +15874,7 @@
               </a:defRPr>
             </a:lvl1pPr>
             <a:lvl2pPr>
+              <a:buNone/>
               <a:defRPr sz="1650" b="0">
                 <a:solidFill>
                   <a:srgbClr val="566B88"/>
@@ -15785,6 +15882,7 @@
               </a:defRPr>
             </a:lvl2pPr>
             <a:lvl3pPr>
+              <a:buNone/>
               <a:defRPr sz="1650" b="0">
                 <a:solidFill>
                   <a:srgbClr val="566B88"/>
@@ -15792,6 +15890,7 @@
               </a:defRPr>
             </a:lvl3pPr>
             <a:lvl4pPr>
+              <a:buNone/>
               <a:defRPr sz="1650" b="0">
                 <a:solidFill>
                   <a:srgbClr val="566B88"/>
@@ -15799,6 +15898,7 @@
               </a:defRPr>
             </a:lvl4pPr>
             <a:lvl5pPr>
+              <a:buNone/>
               <a:defRPr sz="1650" b="0">
                 <a:solidFill>
                   <a:srgbClr val="566B88"/>
@@ -15806,6 +15906,7 @@
               </a:defRPr>
             </a:lvl5pPr>
             <a:lvl6pPr>
+              <a:buNone/>
               <a:defRPr sz="1650" b="0">
                 <a:solidFill>
                   <a:srgbClr val="566B88"/>
@@ -15813,6 +15914,7 @@
               </a:defRPr>
             </a:lvl6pPr>
             <a:lvl7pPr>
+              <a:buNone/>
               <a:defRPr sz="1650" b="0">
                 <a:solidFill>
                   <a:srgbClr val="566B88"/>
@@ -15820,6 +15922,7 @@
               </a:defRPr>
             </a:lvl7pPr>
             <a:lvl8pPr>
+              <a:buNone/>
               <a:defRPr sz="1650" b="0">
                 <a:solidFill>
                   <a:srgbClr val="566B88"/>
@@ -15827,6 +15930,7 @@
               </a:defRPr>
             </a:lvl8pPr>
             <a:lvl9pPr>
+              <a:buNone/>
               <a:defRPr sz="1650" b="0">
                 <a:solidFill>
                   <a:srgbClr val="566B88"/>
@@ -15836,6 +15940,7 @@
           </a:lstStyle>
           <a:p xmlns:a="http://schemas.openxmlformats.org/drawingml/2006/main">
             <a:pPr>
+              <a:buNone/>
               <a:defRPr sz="1650" b="0">
                 <a:solidFill>
                   <a:srgbClr val="566B88"/>
@@ -15848,7 +15953,25 @@
                   <a:srgbClr val="566B88"/>
                 </a:solidFill>
               </a:rPr>
-              <a:t>기존 stdio MCP 클라이언트를 재사용합니다. 모니터링은 Tool, 런북 원문은 Resource입니다.</a:t>
+              <a:t>모니터링 Tool은 상태·CPU·메모리·알림을 제공합니다.</a:t>
+            </a:r>
+          </a:p>
+          <a:p xmlns:a="http://schemas.openxmlformats.org/drawingml/2006/main">
+            <a:pPr>
+              <a:buNone/>
+              <a:defRPr sz="1650" b="0">
+                <a:solidFill>
+                  <a:srgbClr val="566B88"/>
+                </a:solidFill>
+              </a:defRPr>
+            </a:pPr>
+            <a:r>
+              <a:rPr sz="1650" b="0">
+                <a:solidFill>
+                  <a:srgbClr val="566B88"/>
+                </a:solidFill>
+              </a:rPr>
+              <a:t>p95·커넥션 풀·시계열·로그는 별도 자료로 확인해야 합니다.</a:t>
             </a:r>
           </a:p>
         </p:txBody>
@@ -16644,6 +16767,7 @@
               </a:defRPr>
             </a:defPPr>
             <a:lvl1pPr>
+              <a:buNone/>
               <a:defRPr sz="1800" b="1">
                 <a:solidFill>
                   <a:srgbClr val="0D766F"/>
@@ -16651,6 +16775,7 @@
               </a:defRPr>
             </a:lvl1pPr>
             <a:lvl2pPr>
+              <a:buNone/>
               <a:defRPr sz="1800" b="1">
                 <a:solidFill>
                   <a:srgbClr val="0D766F"/>
@@ -16658,6 +16783,7 @@
               </a:defRPr>
             </a:lvl2pPr>
             <a:lvl3pPr>
+              <a:buNone/>
               <a:defRPr sz="1800" b="1">
                 <a:solidFill>
                   <a:srgbClr val="0D766F"/>
@@ -16665,6 +16791,7 @@
               </a:defRPr>
             </a:lvl3pPr>
             <a:lvl4pPr>
+              <a:buNone/>
               <a:defRPr sz="1800" b="1">
                 <a:solidFill>
                   <a:srgbClr val="0D766F"/>
@@ -16672,6 +16799,7 @@
               </a:defRPr>
             </a:lvl4pPr>
             <a:lvl5pPr>
+              <a:buNone/>
               <a:defRPr sz="1800" b="1">
                 <a:solidFill>
                   <a:srgbClr val="0D766F"/>
@@ -16679,6 +16807,7 @@
               </a:defRPr>
             </a:lvl5pPr>
             <a:lvl6pPr>
+              <a:buNone/>
               <a:defRPr sz="1800" b="1">
                 <a:solidFill>
                   <a:srgbClr val="0D766F"/>
@@ -16686,6 +16815,7 @@
               </a:defRPr>
             </a:lvl6pPr>
             <a:lvl7pPr>
+              <a:buNone/>
               <a:defRPr sz="1800" b="1">
                 <a:solidFill>
                   <a:srgbClr val="0D766F"/>
@@ -16693,6 +16823,7 @@
               </a:defRPr>
             </a:lvl7pPr>
             <a:lvl8pPr>
+              <a:buNone/>
               <a:defRPr sz="1800" b="1">
                 <a:solidFill>
                   <a:srgbClr val="0D766F"/>
@@ -16700,6 +16831,7 @@
               </a:defRPr>
             </a:lvl8pPr>
             <a:lvl9pPr>
+              <a:buNone/>
               <a:defRPr sz="1800" b="1">
                 <a:solidFill>
                   <a:srgbClr val="0D766F"/>
@@ -16709,6 +16841,7 @@
           </a:lstStyle>
           <a:p xmlns:a="http://schemas.openxmlformats.org/drawingml/2006/main">
             <a:pPr>
+              <a:buNone/>
               <a:defRPr sz="1800" b="1">
                 <a:solidFill>
                   <a:srgbClr val="0D766F"/>
@@ -16764,6 +16897,7 @@
               </a:defRPr>
             </a:defPPr>
             <a:lvl1pPr>
+              <a:buNone/>
               <a:defRPr sz="1500" b="0">
                 <a:solidFill>
                   <a:srgbClr val="192E50"/>
@@ -16771,6 +16905,7 @@
               </a:defRPr>
             </a:lvl1pPr>
             <a:lvl2pPr>
+              <a:buNone/>
               <a:defRPr sz="1500" b="0">
                 <a:solidFill>
                   <a:srgbClr val="192E50"/>
@@ -16778,6 +16913,7 @@
               </a:defRPr>
             </a:lvl2pPr>
             <a:lvl3pPr>
+              <a:buNone/>
               <a:defRPr sz="1500" b="0">
                 <a:solidFill>
                   <a:srgbClr val="192E50"/>
@@ -16785,6 +16921,7 @@
               </a:defRPr>
             </a:lvl3pPr>
             <a:lvl4pPr>
+              <a:buNone/>
               <a:defRPr sz="1500" b="0">
                 <a:solidFill>
                   <a:srgbClr val="192E50"/>
@@ -16792,6 +16929,7 @@
               </a:defRPr>
             </a:lvl4pPr>
             <a:lvl5pPr>
+              <a:buNone/>
               <a:defRPr sz="1500" b="0">
                 <a:solidFill>
                   <a:srgbClr val="192E50"/>
@@ -16799,6 +16937,7 @@
               </a:defRPr>
             </a:lvl5pPr>
             <a:lvl6pPr>
+              <a:buNone/>
               <a:defRPr sz="1500" b="0">
                 <a:solidFill>
                   <a:srgbClr val="192E50"/>
@@ -16806,6 +16945,7 @@
               </a:defRPr>
             </a:lvl6pPr>
             <a:lvl7pPr>
+              <a:buNone/>
               <a:defRPr sz="1500" b="0">
                 <a:solidFill>
                   <a:srgbClr val="192E50"/>
@@ -16813,6 +16953,7 @@
               </a:defRPr>
             </a:lvl7pPr>
             <a:lvl8pPr>
+              <a:buNone/>
               <a:defRPr sz="1500" b="0">
                 <a:solidFill>
                   <a:srgbClr val="192E50"/>
@@ -16820,6 +16961,7 @@
               </a:defRPr>
             </a:lvl8pPr>
             <a:lvl9pPr>
+              <a:buNone/>
               <a:defRPr sz="1500" b="0">
                 <a:solidFill>
                   <a:srgbClr val="192E50"/>
@@ -16829,6 +16971,7 @@
           </a:lstStyle>
           <a:p xmlns:a="http://schemas.openxmlformats.org/drawingml/2006/main">
             <a:pPr>
+              <a:buNone/>
               <a:defRPr sz="1500" b="0">
                 <a:solidFill>
                   <a:srgbClr val="192E50"/>
@@ -16846,6 +16989,7 @@
           </a:p>
           <a:p xmlns:a="http://schemas.openxmlformats.org/drawingml/2006/main">
             <a:pPr>
+              <a:buNone/>
               <a:defRPr sz="1500" b="0">
                 <a:solidFill>
                   <a:srgbClr val="192E50"/>
@@ -16863,6 +17007,7 @@
           </a:p>
           <a:p xmlns:a="http://schemas.openxmlformats.org/drawingml/2006/main">
             <a:pPr>
+              <a:buNone/>
               <a:defRPr sz="1500" b="0">
                 <a:solidFill>
                   <a:srgbClr val="192E50"/>
@@ -16880,6 +17025,7 @@
           </a:p>
           <a:p xmlns:a="http://schemas.openxmlformats.org/drawingml/2006/main">
             <a:pPr>
+              <a:buNone/>
               <a:defRPr sz="1500" b="0">
                 <a:solidFill>
                   <a:srgbClr val="192E50"/>
@@ -16897,6 +17043,7 @@
           </a:p>
           <a:p xmlns:a="http://schemas.openxmlformats.org/drawingml/2006/main">
             <a:pPr>
+              <a:buNone/>
               <a:defRPr sz="1500" b="0">
                 <a:solidFill>
                   <a:srgbClr val="192E50"/>
@@ -16914,6 +17061,7 @@
           </a:p>
           <a:p xmlns:a="http://schemas.openxmlformats.org/drawingml/2006/main">
             <a:pPr>
+              <a:buNone/>
               <a:defRPr sz="1500" b="0">
                 <a:solidFill>
                   <a:srgbClr val="192E50"/>
@@ -16931,6 +17079,7 @@
           </a:p>
           <a:p xmlns:a="http://schemas.openxmlformats.org/drawingml/2006/main">
             <a:pPr>
+              <a:buNone/>
               <a:defRPr sz="1500" b="0">
                 <a:solidFill>
                   <a:srgbClr val="192E50"/>
@@ -16986,6 +17135,7 @@
               </a:defRPr>
             </a:defPPr>
             <a:lvl1pPr>
+              <a:buNone/>
               <a:defRPr sz="1950" b="1">
                 <a:solidFill>
                   <a:srgbClr val="0D766F"/>
@@ -16993,6 +17143,7 @@
               </a:defRPr>
             </a:lvl1pPr>
             <a:lvl2pPr>
+              <a:buNone/>
               <a:defRPr sz="1950" b="1">
                 <a:solidFill>
                   <a:srgbClr val="0D766F"/>
@@ -17000,6 +17151,7 @@
               </a:defRPr>
             </a:lvl2pPr>
             <a:lvl3pPr>
+              <a:buNone/>
               <a:defRPr sz="1950" b="1">
                 <a:solidFill>
                   <a:srgbClr val="0D766F"/>
@@ -17007,6 +17159,7 @@
               </a:defRPr>
             </a:lvl3pPr>
             <a:lvl4pPr>
+              <a:buNone/>
               <a:defRPr sz="1950" b="1">
                 <a:solidFill>
                   <a:srgbClr val="0D766F"/>
@@ -17014,6 +17167,7 @@
               </a:defRPr>
             </a:lvl4pPr>
             <a:lvl5pPr>
+              <a:buNone/>
               <a:defRPr sz="1950" b="1">
                 <a:solidFill>
                   <a:srgbClr val="0D766F"/>
@@ -17021,6 +17175,7 @@
               </a:defRPr>
             </a:lvl5pPr>
             <a:lvl6pPr>
+              <a:buNone/>
               <a:defRPr sz="1950" b="1">
                 <a:solidFill>
                   <a:srgbClr val="0D766F"/>
@@ -17028,6 +17183,7 @@
               </a:defRPr>
             </a:lvl6pPr>
             <a:lvl7pPr>
+              <a:buNone/>
               <a:defRPr sz="1950" b="1">
                 <a:solidFill>
                   <a:srgbClr val="0D766F"/>
@@ -17035,6 +17191,7 @@
               </a:defRPr>
             </a:lvl7pPr>
             <a:lvl8pPr>
+              <a:buNone/>
               <a:defRPr sz="1950" b="1">
                 <a:solidFill>
                   <a:srgbClr val="0D766F"/>
@@ -17042,6 +17199,7 @@
               </a:defRPr>
             </a:lvl8pPr>
             <a:lvl9pPr>
+              <a:buNone/>
               <a:defRPr sz="1950" b="1">
                 <a:solidFill>
                   <a:srgbClr val="0D766F"/>
@@ -17051,6 +17209,7 @@
           </a:lstStyle>
           <a:p xmlns:a="http://schemas.openxmlformats.org/drawingml/2006/main">
             <a:pPr>
+              <a:buNone/>
               <a:defRPr sz="1950" b="1">
                 <a:solidFill>
                   <a:srgbClr val="0D766F"/>
@@ -17106,6 +17265,7 @@
               </a:defRPr>
             </a:defPPr>
             <a:lvl1pPr>
+              <a:buNone/>
               <a:defRPr sz="1800" b="0">
                 <a:solidFill>
                   <a:srgbClr val="192E50"/>
@@ -17113,6 +17273,7 @@
               </a:defRPr>
             </a:lvl1pPr>
             <a:lvl2pPr>
+              <a:buNone/>
               <a:defRPr sz="1800" b="0">
                 <a:solidFill>
                   <a:srgbClr val="192E50"/>
@@ -17120,6 +17281,7 @@
               </a:defRPr>
             </a:lvl2pPr>
             <a:lvl3pPr>
+              <a:buNone/>
               <a:defRPr sz="1800" b="0">
                 <a:solidFill>
                   <a:srgbClr val="192E50"/>
@@ -17127,6 +17289,7 @@
               </a:defRPr>
             </a:lvl3pPr>
             <a:lvl4pPr>
+              <a:buNone/>
               <a:defRPr sz="1800" b="0">
                 <a:solidFill>
                   <a:srgbClr val="192E50"/>
@@ -17134,6 +17297,7 @@
               </a:defRPr>
             </a:lvl4pPr>
             <a:lvl5pPr>
+              <a:buNone/>
               <a:defRPr sz="1800" b="0">
                 <a:solidFill>
                   <a:srgbClr val="192E50"/>
@@ -17141,6 +17305,7 @@
               </a:defRPr>
             </a:lvl5pPr>
             <a:lvl6pPr>
+              <a:buNone/>
               <a:defRPr sz="1800" b="0">
                 <a:solidFill>
                   <a:srgbClr val="192E50"/>
@@ -17148,6 +17313,7 @@
               </a:defRPr>
             </a:lvl6pPr>
             <a:lvl7pPr>
+              <a:buNone/>
               <a:defRPr sz="1800" b="0">
                 <a:solidFill>
                   <a:srgbClr val="192E50"/>
@@ -17155,6 +17321,7 @@
               </a:defRPr>
             </a:lvl7pPr>
             <a:lvl8pPr>
+              <a:buNone/>
               <a:defRPr sz="1800" b="0">
                 <a:solidFill>
                   <a:srgbClr val="192E50"/>
@@ -17162,6 +17329,7 @@
               </a:defRPr>
             </a:lvl8pPr>
             <a:lvl9pPr>
+              <a:buNone/>
               <a:defRPr sz="1800" b="0">
                 <a:solidFill>
                   <a:srgbClr val="192E50"/>
@@ -17171,6 +17339,7 @@
           </a:lstStyle>
           <a:p xmlns:a="http://schemas.openxmlformats.org/drawingml/2006/main">
             <a:pPr>
+              <a:buNone/>
               <a:defRPr sz="1800" b="0">
                 <a:solidFill>
                   <a:srgbClr val="192E50"/>
@@ -17193,6 +17362,7 @@
           </a:p>
           <a:p xmlns:a="http://schemas.openxmlformats.org/drawingml/2006/main">
             <a:pPr>
+              <a:buNone/>
               <a:defRPr sz="1800" b="0">
                 <a:solidFill>
                   <a:srgbClr val="192E50"/>
@@ -17215,6 +17385,7 @@
           </a:p>
           <a:p xmlns:a="http://schemas.openxmlformats.org/drawingml/2006/main">
             <a:pPr>
+              <a:buNone/>
               <a:defRPr sz="1800" b="0">
                 <a:solidFill>
                   <a:srgbClr val="192E50"/>
@@ -17270,6 +17441,7 @@
               </a:defRPr>
             </a:defPPr>
             <a:lvl1pPr>
+              <a:buNone/>
               <a:defRPr sz="1575" b="0">
                 <a:solidFill>
                   <a:srgbClr val="566B88"/>
@@ -17277,6 +17449,7 @@
               </a:defRPr>
             </a:lvl1pPr>
             <a:lvl2pPr>
+              <a:buNone/>
               <a:defRPr sz="1575" b="0">
                 <a:solidFill>
                   <a:srgbClr val="566B88"/>
@@ -17284,6 +17457,7 @@
               </a:defRPr>
             </a:lvl2pPr>
             <a:lvl3pPr>
+              <a:buNone/>
               <a:defRPr sz="1575" b="0">
                 <a:solidFill>
                   <a:srgbClr val="566B88"/>
@@ -17291,6 +17465,7 @@
               </a:defRPr>
             </a:lvl3pPr>
             <a:lvl4pPr>
+              <a:buNone/>
               <a:defRPr sz="1575" b="0">
                 <a:solidFill>
                   <a:srgbClr val="566B88"/>
@@ -17298,6 +17473,7 @@
               </a:defRPr>
             </a:lvl4pPr>
             <a:lvl5pPr>
+              <a:buNone/>
               <a:defRPr sz="1575" b="0">
                 <a:solidFill>
                   <a:srgbClr val="566B88"/>
@@ -17305,6 +17481,7 @@
               </a:defRPr>
             </a:lvl5pPr>
             <a:lvl6pPr>
+              <a:buNone/>
               <a:defRPr sz="1575" b="0">
                 <a:solidFill>
                   <a:srgbClr val="566B88"/>
@@ -17312,6 +17489,7 @@
               </a:defRPr>
             </a:lvl6pPr>
             <a:lvl7pPr>
+              <a:buNone/>
               <a:defRPr sz="1575" b="0">
                 <a:solidFill>
                   <a:srgbClr val="566B88"/>
@@ -17319,6 +17497,7 @@
               </a:defRPr>
             </a:lvl7pPr>
             <a:lvl8pPr>
+              <a:buNone/>
               <a:defRPr sz="1575" b="0">
                 <a:solidFill>
                   <a:srgbClr val="566B88"/>
@@ -17326,6 +17505,7 @@
               </a:defRPr>
             </a:lvl8pPr>
             <a:lvl9pPr>
+              <a:buNone/>
               <a:defRPr sz="1575" b="0">
                 <a:solidFill>
                   <a:srgbClr val="566B88"/>
@@ -17335,6 +17515,7 @@
           </a:lstStyle>
           <a:p xmlns:a="http://schemas.openxmlformats.org/drawingml/2006/main">
             <a:pPr>
+              <a:buNone/>
               <a:defRPr sz="1575" b="0">
                 <a:solidFill>
                   <a:srgbClr val="566B88"/>
@@ -21168,7 +21349,7 @@
                 <a:ea typeface="Apple SD Gothic Neo"/>
                 <a:cs typeface="Apple SD Gothic Neo"/>
               </a:rPr>
-              <a:t>시계열·배포 이력·호출 관계가 없습니다.</a:t>
+              <a:t>현재 p95·커넥션 풀·시계열·로그는 직접 조회하지 않습니다.</a:t>
             </a:r>
           </a:p>
           <a:p xmlns:a="http://schemas.openxmlformats.org/drawingml/2006/main">
@@ -21192,7 +21373,7 @@
                 <a:ea typeface="Apple SD Gothic Neo"/>
                 <a:cs typeface="Apple SD Gothic Neo"/>
               </a:rPr>
-              <a:t>근본 원인과 실제 복구를 확정할 수 없습니다.</a:t>
+              <a:t>근본 원인과 실제 복구는 미확인입니다.</a:t>
             </a:r>
           </a:p>
         </p:txBody>
